--- a/briefings/housing-market-briefing.pptx
+++ b/briefings/housing-market-briefing.pptx
@@ -5,12 +5,12 @@
     <p:sldMasterId id="2147483648" r:id="rId1"/>
   </p:sldMasterIdLst>
   <p:notesMasterIdLst>
-    <p:notesMasterId r:id="rId6"/>
+    <p:notesMasterId r:id="rId9"/>
   </p:notesMasterIdLst>
   <p:sldIdLst>
     <p:sldId id="256" r:id="rId7"/>
     <p:sldId id="257" r:id="rId8"/>
-    <p:sldId id="258" r:id="rId9"/>
+    <p:sldId id="258" r:id="rId6"/>
     <p:sldId id="259" r:id="rId5"/>
     <p:sldId id="260" r:id="rId4"/>
     <p:sldId id="261" r:id="rId3"/>
@@ -122,28 +122,7 @@
 <c:chartSpace xmlns:c="http://schemas.openxmlformats.org/drawingml/2006/chart" xmlns:a="http://schemas.openxmlformats.org/drawingml/2006/main" xmlns:r="http://schemas.openxmlformats.org/officeDocument/2006/relationships">
   <c:date1904 val="0"/>
   <c:chart>
-    <c:title>
-      <c:tx>
-        <c:rich>
-          <a:bodyPr/>
-          <a:lstStyle/>
-          <a:p>
-            <a:r>
-              <a:rPr sz="1200" b="1">
-                <a:solidFill>
-                  <a:srgbClr val="F0F6FC"/>
-                </a:solidFill>
-                <a:latin typeface="Arial"/>
-              </a:rPr>
-              <a:t>FHFA U.S. House Price Index, seasonally adjusted, monthly, 2000 to latest</a:t>
-            </a:r>
-          </a:p>
-        </c:rich>
-      </c:tx>
-      <c:layout/>
-      <c:overlay val="0"/>
-    </c:title>
-    <c:autoTitleDeleted val="0"/>
+    <c:autoTitleDeleted val="1"/>
     <c:plotArea>
       <c:lineChart>
         <c:grouping val="standard"/>
@@ -157,13 +136,13 @@
               <c:strCache>
                 <c:ptCount val="1"/>
                 <c:pt idx="0">
-                  <c:v>U.S. house price index (SA)</c:v>
+                  <c:v>U.S. HPI</c:v>
                 </c:pt>
               </c:strCache>
             </c:strRef>
           </c:tx>
           <c:spPr>
-            <a:ln w="28575">
+            <a:ln w="31750">
               <a:solidFill>
                 <a:srgbClr val="58A6FF"/>
               </a:solidFill>
@@ -174,7 +153,7 @@
           </c:marker>
           <c:dLbls>
             <c:dLbl>
-              <c:idx val="87"/>
+              <c:idx val="115"/>
               <c:tx>
                 <c:rich>
                   <a:bodyPr/>
@@ -183,11 +162,20 @@
                     <a:r>
                       <a:rPr sz="1000" b="1">
                         <a:solidFill>
-                          <a:srgbClr val="F0F6FC"/>
+                          <a:srgbClr val="B1BAC4"/>
                         </a:solidFill>
-                        <a:latin typeface="Arial"/>
                       </a:rPr>
-                      <a:t>Apr 2007: 224</a:t>
+                      <a:t>2019 Q4</a:t>
+                    </a:r>
+                  </a:p>
+                  <a:p>
+                    <a:r>
+                      <a:rPr sz="1000" b="1">
+                        <a:solidFill>
+                          <a:srgbClr val="B1BAC4"/>
+                        </a:solidFill>
+                      </a:rPr>
+                      <a:t>275.0</a:t>
                     </a:r>
                   </a:p>
                 </c:rich>
@@ -201,47 +189,29 @@
               <c:showBubbleSize val="0"/>
             </c:dLbl>
             <c:dLbl>
-              <c:idx val="136"/>
+              <c:idx val="141"/>
               <c:tx>
                 <c:rich>
                   <a:bodyPr/>
                   <a:lstStyle/>
                   <a:p>
                     <a:r>
-                      <a:rPr sz="1000" b="1">
+                      <a:rPr sz="1100" b="1">
                         <a:solidFill>
                           <a:srgbClr val="F0F6FC"/>
                         </a:solidFill>
-                        <a:latin typeface="Arial"/>
                       </a:rPr>
-                      <a:t>May 2011: 177</a:t>
+                      <a:t>2026 Q2</a:t>
                     </a:r>
                   </a:p>
-                </c:rich>
-              </c:tx>
-              <c:dLblPos val="b"/>
-              <c:showLegendKey val="0"/>
-              <c:showVal val="1"/>
-              <c:showCatName val="0"/>
-              <c:showSerName val="0"/>
-              <c:showPercent val="0"/>
-              <c:showBubbleSize val="0"/>
-            </c:dLbl>
-            <c:dLbl>
-              <c:idx val="318"/>
-              <c:tx>
-                <c:rich>
-                  <a:bodyPr/>
-                  <a:lstStyle/>
                   <a:p>
                     <a:r>
-                      <a:rPr sz="1000" b="1">
+                      <a:rPr sz="1100" b="1">
                         <a:solidFill>
                           <a:srgbClr val="F0F6FC"/>
                         </a:solidFill>
-                        <a:latin typeface="Arial"/>
                       </a:rPr>
-                      <a:t>Jul 2026: 444</a:t>
+                      <a:t>450.9</a:t>
                     </a:r>
                   </a:p>
                 </c:rich>
@@ -264,1931 +234,869 @@
           </c:dLbls>
           <c:cat>
             <c:strRef>
-              <c:f>Sheet1!$A$2:$A$320</c:f>
+              <c:f>Sheet1!$A$2:$A$143</c:f>
               <c:strCache>
-                <c:ptCount val="319"/>
+                <c:ptCount val="142"/>
                 <c:pt idx="0">
-                  <c:v>Jan 2000</c:v>
+                  <c:v>1991</c:v>
                 </c:pt>
                 <c:pt idx="1">
-                  <c:v>Feb 2000</c:v>
+                  <c:v>1991 Q2</c:v>
                 </c:pt>
                 <c:pt idx="2">
-                  <c:v>Mar 2000</c:v>
+                  <c:v>1991 Q3</c:v>
                 </c:pt>
                 <c:pt idx="3">
-                  <c:v>Apr 2000</c:v>
+                  <c:v>1991 Q4</c:v>
                 </c:pt>
                 <c:pt idx="4">
-                  <c:v>May 2000</c:v>
+                  <c:v>1992</c:v>
                 </c:pt>
                 <c:pt idx="5">
-                  <c:v>Jun 2000</c:v>
+                  <c:v>1992 Q2</c:v>
                 </c:pt>
                 <c:pt idx="6">
-                  <c:v>Jul 2000</c:v>
+                  <c:v>1992 Q3</c:v>
                 </c:pt>
                 <c:pt idx="7">
-                  <c:v>Aug 2000</c:v>
+                  <c:v>1992 Q4</c:v>
                 </c:pt>
                 <c:pt idx="8">
-                  <c:v>Sep 2000</c:v>
+                  <c:v>1993</c:v>
                 </c:pt>
                 <c:pt idx="9">
-                  <c:v>Oct 2000</c:v>
+                  <c:v>1993 Q2</c:v>
                 </c:pt>
                 <c:pt idx="10">
-                  <c:v>Nov 2000</c:v>
+                  <c:v>1993 Q3</c:v>
                 </c:pt>
                 <c:pt idx="11">
-                  <c:v>Dec 2000</c:v>
+                  <c:v>1993 Q4</c:v>
                 </c:pt>
                 <c:pt idx="12">
-                  <c:v>Jan 2001</c:v>
+                  <c:v>1994</c:v>
                 </c:pt>
                 <c:pt idx="13">
-                  <c:v>Feb 2001</c:v>
+                  <c:v>1994 Q2</c:v>
                 </c:pt>
                 <c:pt idx="14">
-                  <c:v>Mar 2001</c:v>
+                  <c:v>1994 Q3</c:v>
                 </c:pt>
                 <c:pt idx="15">
-                  <c:v>Apr 2001</c:v>
+                  <c:v>1994 Q4</c:v>
                 </c:pt>
                 <c:pt idx="16">
-                  <c:v>May 2001</c:v>
+                  <c:v>1995</c:v>
                 </c:pt>
                 <c:pt idx="17">
-                  <c:v>Jun 2001</c:v>
+                  <c:v>1995 Q2</c:v>
                 </c:pt>
                 <c:pt idx="18">
-                  <c:v>Jul 2001</c:v>
+                  <c:v>1995 Q3</c:v>
                 </c:pt>
                 <c:pt idx="19">
-                  <c:v>Aug 2001</c:v>
+                  <c:v>1995 Q4</c:v>
                 </c:pt>
                 <c:pt idx="20">
-                  <c:v>Sep 2001</c:v>
+                  <c:v>1996</c:v>
                 </c:pt>
                 <c:pt idx="21">
-                  <c:v>Oct 2001</c:v>
+                  <c:v>1996 Q2</c:v>
                 </c:pt>
                 <c:pt idx="22">
-                  <c:v>Nov 2001</c:v>
+                  <c:v>1996 Q3</c:v>
                 </c:pt>
                 <c:pt idx="23">
-                  <c:v>Dec 2001</c:v>
+                  <c:v>1996 Q4</c:v>
                 </c:pt>
                 <c:pt idx="24">
-                  <c:v>Jan 2002</c:v>
+                  <c:v>1997</c:v>
                 </c:pt>
                 <c:pt idx="25">
-                  <c:v>Feb 2002</c:v>
+                  <c:v>1997 Q2</c:v>
                 </c:pt>
                 <c:pt idx="26">
-                  <c:v>Mar 2002</c:v>
+                  <c:v>1997 Q3</c:v>
                 </c:pt>
                 <c:pt idx="27">
-                  <c:v>Apr 2002</c:v>
+                  <c:v>1997 Q4</c:v>
                 </c:pt>
                 <c:pt idx="28">
-                  <c:v>May 2002</c:v>
+                  <c:v>1998</c:v>
                 </c:pt>
                 <c:pt idx="29">
-                  <c:v>Jun 2002</c:v>
+                  <c:v>1998 Q2</c:v>
                 </c:pt>
                 <c:pt idx="30">
-                  <c:v>Jul 2002</c:v>
+                  <c:v>1998 Q3</c:v>
                 </c:pt>
                 <c:pt idx="31">
-                  <c:v>Aug 2002</c:v>
+                  <c:v>1998 Q4</c:v>
                 </c:pt>
                 <c:pt idx="32">
-                  <c:v>Sep 2002</c:v>
+                  <c:v>1999</c:v>
                 </c:pt>
                 <c:pt idx="33">
-                  <c:v>Oct 2002</c:v>
+                  <c:v>1999 Q2</c:v>
                 </c:pt>
                 <c:pt idx="34">
-                  <c:v>Nov 2002</c:v>
+                  <c:v>1999 Q3</c:v>
                 </c:pt>
                 <c:pt idx="35">
-                  <c:v>Dec 2002</c:v>
+                  <c:v>1999 Q4</c:v>
                 </c:pt>
                 <c:pt idx="36">
-                  <c:v>Jan 2003</c:v>
+                  <c:v>2000</c:v>
                 </c:pt>
                 <c:pt idx="37">
-                  <c:v>Feb 2003</c:v>
+                  <c:v>2000 Q2</c:v>
                 </c:pt>
                 <c:pt idx="38">
-                  <c:v>Mar 2003</c:v>
+                  <c:v>2000 Q3</c:v>
                 </c:pt>
                 <c:pt idx="39">
-                  <c:v>Apr 2003</c:v>
+                  <c:v>2000 Q4</c:v>
                 </c:pt>
                 <c:pt idx="40">
-                  <c:v>May 2003</c:v>
+                  <c:v>2001</c:v>
                 </c:pt>
                 <c:pt idx="41">
-                  <c:v>Jun 2003</c:v>
+                  <c:v>2001 Q2</c:v>
                 </c:pt>
                 <c:pt idx="42">
-                  <c:v>Jul 2003</c:v>
+                  <c:v>2001 Q3</c:v>
                 </c:pt>
                 <c:pt idx="43">
-                  <c:v>Aug 2003</c:v>
+                  <c:v>2001 Q4</c:v>
                 </c:pt>
                 <c:pt idx="44">
-                  <c:v>Sep 2003</c:v>
+                  <c:v>2002</c:v>
                 </c:pt>
                 <c:pt idx="45">
-                  <c:v>Oct 2003</c:v>
+                  <c:v>2002 Q2</c:v>
                 </c:pt>
                 <c:pt idx="46">
-                  <c:v>Nov 2003</c:v>
+                  <c:v>2002 Q3</c:v>
                 </c:pt>
                 <c:pt idx="47">
-                  <c:v>Dec 2003</c:v>
+                  <c:v>2002 Q4</c:v>
                 </c:pt>
                 <c:pt idx="48">
-                  <c:v>Jan 2004</c:v>
+                  <c:v>2003</c:v>
                 </c:pt>
                 <c:pt idx="49">
-                  <c:v>Feb 2004</c:v>
+                  <c:v>2003 Q2</c:v>
                 </c:pt>
                 <c:pt idx="50">
-                  <c:v>Mar 2004</c:v>
+                  <c:v>2003 Q3</c:v>
                 </c:pt>
                 <c:pt idx="51">
-                  <c:v>Apr 2004</c:v>
+                  <c:v>2003 Q4</c:v>
                 </c:pt>
                 <c:pt idx="52">
-                  <c:v>May 2004</c:v>
+                  <c:v>2004</c:v>
                 </c:pt>
                 <c:pt idx="53">
-                  <c:v>Jun 2004</c:v>
+                  <c:v>2004 Q2</c:v>
                 </c:pt>
                 <c:pt idx="54">
-                  <c:v>Jul 2004</c:v>
+                  <c:v>2004 Q3</c:v>
                 </c:pt>
                 <c:pt idx="55">
-                  <c:v>Aug 2004</c:v>
+                  <c:v>2004 Q4</c:v>
                 </c:pt>
                 <c:pt idx="56">
-                  <c:v>Sep 2004</c:v>
+                  <c:v>2005</c:v>
                 </c:pt>
                 <c:pt idx="57">
-                  <c:v>Oct 2004</c:v>
+                  <c:v>2005 Q2</c:v>
                 </c:pt>
                 <c:pt idx="58">
-                  <c:v>Nov 2004</c:v>
+                  <c:v>2005 Q3</c:v>
                 </c:pt>
                 <c:pt idx="59">
-                  <c:v>Dec 2004</c:v>
+                  <c:v>2005 Q4</c:v>
                 </c:pt>
                 <c:pt idx="60">
-                  <c:v>Jan 2005</c:v>
+                  <c:v>2006</c:v>
                 </c:pt>
                 <c:pt idx="61">
-                  <c:v>Feb 2005</c:v>
+                  <c:v>2006 Q2</c:v>
                 </c:pt>
                 <c:pt idx="62">
-                  <c:v>Mar 2005</c:v>
+                  <c:v>2006 Q3</c:v>
                 </c:pt>
                 <c:pt idx="63">
-                  <c:v>Apr 2005</c:v>
+                  <c:v>2006 Q4</c:v>
                 </c:pt>
                 <c:pt idx="64">
-                  <c:v>May 2005</c:v>
+                  <c:v>2007</c:v>
                 </c:pt>
                 <c:pt idx="65">
-                  <c:v>Jun 2005</c:v>
+                  <c:v>2007 Q2</c:v>
                 </c:pt>
                 <c:pt idx="66">
-                  <c:v>Jul 2005</c:v>
+                  <c:v>2007 Q3</c:v>
                 </c:pt>
                 <c:pt idx="67">
-                  <c:v>Aug 2005</c:v>
+                  <c:v>2007 Q4</c:v>
                 </c:pt>
                 <c:pt idx="68">
-                  <c:v>Sep 2005</c:v>
+                  <c:v>2008</c:v>
                 </c:pt>
                 <c:pt idx="69">
-                  <c:v>Oct 2005</c:v>
+                  <c:v>2008 Q2</c:v>
                 </c:pt>
                 <c:pt idx="70">
-                  <c:v>Nov 2005</c:v>
+                  <c:v>2008 Q3</c:v>
                 </c:pt>
                 <c:pt idx="71">
-                  <c:v>Dec 2005</c:v>
+                  <c:v>2008 Q4</c:v>
                 </c:pt>
                 <c:pt idx="72">
-                  <c:v>Jan 2006</c:v>
+                  <c:v>2009</c:v>
                 </c:pt>
                 <c:pt idx="73">
-                  <c:v>Feb 2006</c:v>
+                  <c:v>2009 Q2</c:v>
                 </c:pt>
                 <c:pt idx="74">
-                  <c:v>Mar 2006</c:v>
+                  <c:v>2009 Q3</c:v>
                 </c:pt>
                 <c:pt idx="75">
-                  <c:v>Apr 2006</c:v>
+                  <c:v>2009 Q4</c:v>
                 </c:pt>
                 <c:pt idx="76">
-                  <c:v>May 2006</c:v>
+                  <c:v>2010</c:v>
                 </c:pt>
                 <c:pt idx="77">
-                  <c:v>Jun 2006</c:v>
+                  <c:v>2010 Q2</c:v>
                 </c:pt>
                 <c:pt idx="78">
-                  <c:v>Jul 2006</c:v>
+                  <c:v>2010 Q3</c:v>
                 </c:pt>
                 <c:pt idx="79">
-                  <c:v>Aug 2006</c:v>
+                  <c:v>2010 Q4</c:v>
                 </c:pt>
                 <c:pt idx="80">
-                  <c:v>Sep 2006</c:v>
+                  <c:v>2011</c:v>
                 </c:pt>
                 <c:pt idx="81">
-                  <c:v>Oct 2006</c:v>
+                  <c:v>2011 Q2</c:v>
                 </c:pt>
                 <c:pt idx="82">
-                  <c:v>Nov 2006</c:v>
+                  <c:v>2011 Q3</c:v>
                 </c:pt>
                 <c:pt idx="83">
-                  <c:v>Dec 2006</c:v>
+                  <c:v>2011 Q4</c:v>
                 </c:pt>
                 <c:pt idx="84">
-                  <c:v>Jan 2007</c:v>
+                  <c:v>2012</c:v>
                 </c:pt>
                 <c:pt idx="85">
-                  <c:v>Feb 2007</c:v>
+                  <c:v>2012 Q2</c:v>
                 </c:pt>
                 <c:pt idx="86">
-                  <c:v>Mar 2007</c:v>
+                  <c:v>2012 Q3</c:v>
                 </c:pt>
                 <c:pt idx="87">
-                  <c:v>Apr 2007</c:v>
+                  <c:v>2012 Q4</c:v>
                 </c:pt>
                 <c:pt idx="88">
-                  <c:v>May 2007</c:v>
+                  <c:v>2013</c:v>
                 </c:pt>
                 <c:pt idx="89">
-                  <c:v>Jun 2007</c:v>
+                  <c:v>2013 Q2</c:v>
                 </c:pt>
                 <c:pt idx="90">
-                  <c:v>Jul 2007</c:v>
+                  <c:v>2013 Q3</c:v>
                 </c:pt>
                 <c:pt idx="91">
-                  <c:v>Aug 2007</c:v>
+                  <c:v>2013 Q4</c:v>
                 </c:pt>
                 <c:pt idx="92">
-                  <c:v>Sep 2007</c:v>
+                  <c:v>2014</c:v>
                 </c:pt>
                 <c:pt idx="93">
-                  <c:v>Oct 2007</c:v>
+                  <c:v>2014 Q2</c:v>
                 </c:pt>
                 <c:pt idx="94">
-                  <c:v>Nov 2007</c:v>
+                  <c:v>2014 Q3</c:v>
                 </c:pt>
                 <c:pt idx="95">
-                  <c:v>Dec 2007</c:v>
+                  <c:v>2014 Q4</c:v>
                 </c:pt>
                 <c:pt idx="96">
-                  <c:v>Jan 2008</c:v>
+                  <c:v>2015</c:v>
                 </c:pt>
                 <c:pt idx="97">
-                  <c:v>Feb 2008</c:v>
+                  <c:v>2015 Q2</c:v>
                 </c:pt>
                 <c:pt idx="98">
-                  <c:v>Mar 2008</c:v>
+                  <c:v>2015 Q3</c:v>
                 </c:pt>
                 <c:pt idx="99">
-                  <c:v>Apr 2008</c:v>
+                  <c:v>2015 Q4</c:v>
                 </c:pt>
                 <c:pt idx="100">
-                  <c:v>May 2008</c:v>
+                  <c:v>2016</c:v>
                 </c:pt>
                 <c:pt idx="101">
-                  <c:v>Jun 2008</c:v>
+                  <c:v>2016 Q2</c:v>
                 </c:pt>
                 <c:pt idx="102">
-                  <c:v>Jul 2008</c:v>
+                  <c:v>2016 Q3</c:v>
                 </c:pt>
                 <c:pt idx="103">
-                  <c:v>Aug 2008</c:v>
+                  <c:v>2016 Q4</c:v>
                 </c:pt>
                 <c:pt idx="104">
-                  <c:v>Sep 2008</c:v>
+                  <c:v>2017</c:v>
                 </c:pt>
                 <c:pt idx="105">
-                  <c:v>Oct 2008</c:v>
+                  <c:v>2017 Q2</c:v>
                 </c:pt>
                 <c:pt idx="106">
-                  <c:v>Nov 2008</c:v>
+                  <c:v>2017 Q3</c:v>
                 </c:pt>
                 <c:pt idx="107">
-                  <c:v>Dec 2008</c:v>
+                  <c:v>2017 Q4</c:v>
                 </c:pt>
                 <c:pt idx="108">
-                  <c:v>Jan 2009</c:v>
+                  <c:v>2018</c:v>
                 </c:pt>
                 <c:pt idx="109">
-                  <c:v>Feb 2009</c:v>
+                  <c:v>2018 Q2</c:v>
                 </c:pt>
                 <c:pt idx="110">
-                  <c:v>Mar 2009</c:v>
+                  <c:v>2018 Q3</c:v>
                 </c:pt>
                 <c:pt idx="111">
-                  <c:v>Apr 2009</c:v>
+                  <c:v>2018 Q4</c:v>
                 </c:pt>
                 <c:pt idx="112">
-                  <c:v>May 2009</c:v>
+                  <c:v>2019</c:v>
                 </c:pt>
                 <c:pt idx="113">
-                  <c:v>Jun 2009</c:v>
+                  <c:v>2019 Q2</c:v>
                 </c:pt>
                 <c:pt idx="114">
-                  <c:v>Jul 2009</c:v>
+                  <c:v>2019 Q3</c:v>
                 </c:pt>
                 <c:pt idx="115">
-                  <c:v>Aug 2009</c:v>
+                  <c:v>2019 Q4</c:v>
                 </c:pt>
                 <c:pt idx="116">
-                  <c:v>Sep 2009</c:v>
+                  <c:v>2020</c:v>
                 </c:pt>
                 <c:pt idx="117">
-                  <c:v>Oct 2009</c:v>
+                  <c:v>2020 Q2</c:v>
                 </c:pt>
                 <c:pt idx="118">
-                  <c:v>Nov 2009</c:v>
+                  <c:v>2020 Q3</c:v>
                 </c:pt>
                 <c:pt idx="119">
-                  <c:v>Dec 2009</c:v>
+                  <c:v>2020 Q4</c:v>
                 </c:pt>
                 <c:pt idx="120">
-                  <c:v>Jan 2010</c:v>
+                  <c:v>2021</c:v>
                 </c:pt>
                 <c:pt idx="121">
-                  <c:v>Feb 2010</c:v>
+                  <c:v>2021 Q2</c:v>
                 </c:pt>
                 <c:pt idx="122">
-                  <c:v>Mar 2010</c:v>
+                  <c:v>2021 Q3</c:v>
                 </c:pt>
                 <c:pt idx="123">
-                  <c:v>Apr 2010</c:v>
+                  <c:v>2021 Q4</c:v>
                 </c:pt>
                 <c:pt idx="124">
-                  <c:v>May 2010</c:v>
+                  <c:v>2022</c:v>
                 </c:pt>
                 <c:pt idx="125">
-                  <c:v>Jun 2010</c:v>
+                  <c:v>2022 Q2</c:v>
                 </c:pt>
                 <c:pt idx="126">
-                  <c:v>Jul 2010</c:v>
+                  <c:v>2022 Q3</c:v>
                 </c:pt>
                 <c:pt idx="127">
-                  <c:v>Aug 2010</c:v>
+                  <c:v>2022 Q4</c:v>
                 </c:pt>
                 <c:pt idx="128">
-                  <c:v>Sep 2010</c:v>
+                  <c:v>2023</c:v>
                 </c:pt>
                 <c:pt idx="129">
-                  <c:v>Oct 2010</c:v>
+                  <c:v>2023 Q2</c:v>
                 </c:pt>
                 <c:pt idx="130">
-                  <c:v>Nov 2010</c:v>
+                  <c:v>2023 Q3</c:v>
                 </c:pt>
                 <c:pt idx="131">
-                  <c:v>Dec 2010</c:v>
+                  <c:v>2023 Q4</c:v>
                 </c:pt>
                 <c:pt idx="132">
-                  <c:v>Jan 2011</c:v>
+                  <c:v>2024</c:v>
                 </c:pt>
                 <c:pt idx="133">
-                  <c:v>Feb 2011</c:v>
+                  <c:v>2024 Q2</c:v>
                 </c:pt>
                 <c:pt idx="134">
-                  <c:v>Mar 2011</c:v>
+                  <c:v>2024 Q3</c:v>
                 </c:pt>
                 <c:pt idx="135">
-                  <c:v>Apr 2011</c:v>
+                  <c:v>2024 Q4</c:v>
                 </c:pt>
                 <c:pt idx="136">
-                  <c:v>May 2011</c:v>
+                  <c:v>2025</c:v>
                 </c:pt>
                 <c:pt idx="137">
-                  <c:v>Jun 2011</c:v>
+                  <c:v>2025 Q2</c:v>
                 </c:pt>
                 <c:pt idx="138">
-                  <c:v>Jul 2011</c:v>
+                  <c:v>2025 Q3</c:v>
                 </c:pt>
                 <c:pt idx="139">
-                  <c:v>Aug 2011</c:v>
+                  <c:v>2025 Q4</c:v>
                 </c:pt>
                 <c:pt idx="140">
-                  <c:v>Sep 2011</c:v>
+                  <c:v>2026</c:v>
                 </c:pt>
                 <c:pt idx="141">
-                  <c:v>Oct 2011</c:v>
-                </c:pt>
-                <c:pt idx="142">
-                  <c:v>Nov 2011</c:v>
-                </c:pt>
-                <c:pt idx="143">
-                  <c:v>Dec 2011</c:v>
-                </c:pt>
-                <c:pt idx="144">
-                  <c:v>Jan 2012</c:v>
-                </c:pt>
-                <c:pt idx="145">
-                  <c:v>Feb 2012</c:v>
-                </c:pt>
-                <c:pt idx="146">
-                  <c:v>Mar 2012</c:v>
-                </c:pt>
-                <c:pt idx="147">
-                  <c:v>Apr 2012</c:v>
-                </c:pt>
-                <c:pt idx="148">
-                  <c:v>May 2012</c:v>
-                </c:pt>
-                <c:pt idx="149">
-                  <c:v>Jun 2012</c:v>
-                </c:pt>
-                <c:pt idx="150">
-                  <c:v>Jul 2012</c:v>
-                </c:pt>
-                <c:pt idx="151">
-                  <c:v>Aug 2012</c:v>
-                </c:pt>
-                <c:pt idx="152">
-                  <c:v>Sep 2012</c:v>
-                </c:pt>
-                <c:pt idx="153">
-                  <c:v>Oct 2012</c:v>
-                </c:pt>
-                <c:pt idx="154">
-                  <c:v>Nov 2012</c:v>
-                </c:pt>
-                <c:pt idx="155">
-                  <c:v>Dec 2012</c:v>
-                </c:pt>
-                <c:pt idx="156">
-                  <c:v>Jan 2013</c:v>
-                </c:pt>
-                <c:pt idx="157">
-                  <c:v>Feb 2013</c:v>
-                </c:pt>
-                <c:pt idx="158">
-                  <c:v>Mar 2013</c:v>
-                </c:pt>
-                <c:pt idx="159">
-                  <c:v>Apr 2013</c:v>
-                </c:pt>
-                <c:pt idx="160">
-                  <c:v>May 2013</c:v>
-                </c:pt>
-                <c:pt idx="161">
-                  <c:v>Jun 2013</c:v>
-                </c:pt>
-                <c:pt idx="162">
-                  <c:v>Jul 2013</c:v>
-                </c:pt>
-                <c:pt idx="163">
-                  <c:v>Aug 2013</c:v>
-                </c:pt>
-                <c:pt idx="164">
-                  <c:v>Sep 2013</c:v>
-                </c:pt>
-                <c:pt idx="165">
-                  <c:v>Oct 2013</c:v>
-                </c:pt>
-                <c:pt idx="166">
-                  <c:v>Nov 2013</c:v>
-                </c:pt>
-                <c:pt idx="167">
-                  <c:v>Dec 2013</c:v>
-                </c:pt>
-                <c:pt idx="168">
-                  <c:v>Jan 2014</c:v>
-                </c:pt>
-                <c:pt idx="169">
-                  <c:v>Feb 2014</c:v>
-                </c:pt>
-                <c:pt idx="170">
-                  <c:v>Mar 2014</c:v>
-                </c:pt>
-                <c:pt idx="171">
-                  <c:v>Apr 2014</c:v>
-                </c:pt>
-                <c:pt idx="172">
-                  <c:v>May 2014</c:v>
-                </c:pt>
-                <c:pt idx="173">
-                  <c:v>Jun 2014</c:v>
-                </c:pt>
-                <c:pt idx="174">
-                  <c:v>Jul 2014</c:v>
-                </c:pt>
-                <c:pt idx="175">
-                  <c:v>Aug 2014</c:v>
-                </c:pt>
-                <c:pt idx="176">
-                  <c:v>Sep 2014</c:v>
-                </c:pt>
-                <c:pt idx="177">
-                  <c:v>Oct 2014</c:v>
-                </c:pt>
-                <c:pt idx="178">
-                  <c:v>Nov 2014</c:v>
-                </c:pt>
-                <c:pt idx="179">
-                  <c:v>Dec 2014</c:v>
-                </c:pt>
-                <c:pt idx="180">
-                  <c:v>Jan 2015</c:v>
-                </c:pt>
-                <c:pt idx="181">
-                  <c:v>Feb 2015</c:v>
-                </c:pt>
-                <c:pt idx="182">
-                  <c:v>Mar 2015</c:v>
-                </c:pt>
-                <c:pt idx="183">
-                  <c:v>Apr 2015</c:v>
-                </c:pt>
-                <c:pt idx="184">
-                  <c:v>May 2015</c:v>
-                </c:pt>
-                <c:pt idx="185">
-                  <c:v>Jun 2015</c:v>
-                </c:pt>
-                <c:pt idx="186">
-                  <c:v>Jul 2015</c:v>
-                </c:pt>
-                <c:pt idx="187">
-                  <c:v>Aug 2015</c:v>
-                </c:pt>
-                <c:pt idx="188">
-                  <c:v>Sep 2015</c:v>
-                </c:pt>
-                <c:pt idx="189">
-                  <c:v>Oct 2015</c:v>
-                </c:pt>
-                <c:pt idx="190">
-                  <c:v>Nov 2015</c:v>
-                </c:pt>
-                <c:pt idx="191">
-                  <c:v>Dec 2015</c:v>
-                </c:pt>
-                <c:pt idx="192">
-                  <c:v>Jan 2016</c:v>
-                </c:pt>
-                <c:pt idx="193">
-                  <c:v>Feb 2016</c:v>
-                </c:pt>
-                <c:pt idx="194">
-                  <c:v>Mar 2016</c:v>
-                </c:pt>
-                <c:pt idx="195">
-                  <c:v>Apr 2016</c:v>
-                </c:pt>
-                <c:pt idx="196">
-                  <c:v>May 2016</c:v>
-                </c:pt>
-                <c:pt idx="197">
-                  <c:v>Jun 2016</c:v>
-                </c:pt>
-                <c:pt idx="198">
-                  <c:v>Jul 2016</c:v>
-                </c:pt>
-                <c:pt idx="199">
-                  <c:v>Aug 2016</c:v>
-                </c:pt>
-                <c:pt idx="200">
-                  <c:v>Sep 2016</c:v>
-                </c:pt>
-                <c:pt idx="201">
-                  <c:v>Oct 2016</c:v>
-                </c:pt>
-                <c:pt idx="202">
-                  <c:v>Nov 2016</c:v>
-                </c:pt>
-                <c:pt idx="203">
-                  <c:v>Dec 2016</c:v>
-                </c:pt>
-                <c:pt idx="204">
-                  <c:v>Jan 2017</c:v>
-                </c:pt>
-                <c:pt idx="205">
-                  <c:v>Feb 2017</c:v>
-                </c:pt>
-                <c:pt idx="206">
-                  <c:v>Mar 2017</c:v>
-                </c:pt>
-                <c:pt idx="207">
-                  <c:v>Apr 2017</c:v>
-                </c:pt>
-                <c:pt idx="208">
-                  <c:v>May 2017</c:v>
-                </c:pt>
-                <c:pt idx="209">
-                  <c:v>Jun 2017</c:v>
-                </c:pt>
-                <c:pt idx="210">
-                  <c:v>Jul 2017</c:v>
-                </c:pt>
-                <c:pt idx="211">
-                  <c:v>Aug 2017</c:v>
-                </c:pt>
-                <c:pt idx="212">
-                  <c:v>Sep 2017</c:v>
-                </c:pt>
-                <c:pt idx="213">
-                  <c:v>Oct 2017</c:v>
-                </c:pt>
-                <c:pt idx="214">
-                  <c:v>Nov 2017</c:v>
-                </c:pt>
-                <c:pt idx="215">
-                  <c:v>Dec 2017</c:v>
-                </c:pt>
-                <c:pt idx="216">
-                  <c:v>Jan 2018</c:v>
-                </c:pt>
-                <c:pt idx="217">
-                  <c:v>Feb 2018</c:v>
-                </c:pt>
-                <c:pt idx="218">
-                  <c:v>Mar 2018</c:v>
-                </c:pt>
-                <c:pt idx="219">
-                  <c:v>Apr 2018</c:v>
-                </c:pt>
-                <c:pt idx="220">
-                  <c:v>May 2018</c:v>
-                </c:pt>
-                <c:pt idx="221">
-                  <c:v>Jun 2018</c:v>
-                </c:pt>
-                <c:pt idx="222">
-                  <c:v>Jul 2018</c:v>
-                </c:pt>
-                <c:pt idx="223">
-                  <c:v>Aug 2018</c:v>
-                </c:pt>
-                <c:pt idx="224">
-                  <c:v>Sep 2018</c:v>
-                </c:pt>
-                <c:pt idx="225">
-                  <c:v>Oct 2018</c:v>
-                </c:pt>
-                <c:pt idx="226">
-                  <c:v>Nov 2018</c:v>
-                </c:pt>
-                <c:pt idx="227">
-                  <c:v>Dec 2018</c:v>
-                </c:pt>
-                <c:pt idx="228">
-                  <c:v>Jan 2019</c:v>
-                </c:pt>
-                <c:pt idx="229">
-                  <c:v>Feb 2019</c:v>
-                </c:pt>
-                <c:pt idx="230">
-                  <c:v>Mar 2019</c:v>
-                </c:pt>
-                <c:pt idx="231">
-                  <c:v>Apr 2019</c:v>
-                </c:pt>
-                <c:pt idx="232">
-                  <c:v>May 2019</c:v>
-                </c:pt>
-                <c:pt idx="233">
-                  <c:v>Jun 2019</c:v>
-                </c:pt>
-                <c:pt idx="234">
-                  <c:v>Jul 2019</c:v>
-                </c:pt>
-                <c:pt idx="235">
-                  <c:v>Aug 2019</c:v>
-                </c:pt>
-                <c:pt idx="236">
-                  <c:v>Sep 2019</c:v>
-                </c:pt>
-                <c:pt idx="237">
-                  <c:v>Oct 2019</c:v>
-                </c:pt>
-                <c:pt idx="238">
-                  <c:v>Nov 2019</c:v>
-                </c:pt>
-                <c:pt idx="239">
-                  <c:v>Dec 2019</c:v>
-                </c:pt>
-                <c:pt idx="240">
-                  <c:v>Jan 2020</c:v>
-                </c:pt>
-                <c:pt idx="241">
-                  <c:v>Feb 2020</c:v>
-                </c:pt>
-                <c:pt idx="242">
-                  <c:v>Mar 2020</c:v>
-                </c:pt>
-                <c:pt idx="243">
-                  <c:v>Apr 2020</c:v>
-                </c:pt>
-                <c:pt idx="244">
-                  <c:v>May 2020</c:v>
-                </c:pt>
-                <c:pt idx="245">
-                  <c:v>Jun 2020</c:v>
-                </c:pt>
-                <c:pt idx="246">
-                  <c:v>Jul 2020</c:v>
-                </c:pt>
-                <c:pt idx="247">
-                  <c:v>Aug 2020</c:v>
-                </c:pt>
-                <c:pt idx="248">
-                  <c:v>Sep 2020</c:v>
-                </c:pt>
-                <c:pt idx="249">
-                  <c:v>Oct 2020</c:v>
-                </c:pt>
-                <c:pt idx="250">
-                  <c:v>Nov 2020</c:v>
-                </c:pt>
-                <c:pt idx="251">
-                  <c:v>Dec 2020</c:v>
-                </c:pt>
-                <c:pt idx="252">
-                  <c:v>Jan 2021</c:v>
-                </c:pt>
-                <c:pt idx="253">
-                  <c:v>Feb 2021</c:v>
-                </c:pt>
-                <c:pt idx="254">
-                  <c:v>Mar 2021</c:v>
-                </c:pt>
-                <c:pt idx="255">
-                  <c:v>Apr 2021</c:v>
-                </c:pt>
-                <c:pt idx="256">
-                  <c:v>May 2021</c:v>
-                </c:pt>
-                <c:pt idx="257">
-                  <c:v>Jun 2021</c:v>
-                </c:pt>
-                <c:pt idx="258">
-                  <c:v>Jul 2021</c:v>
-                </c:pt>
-                <c:pt idx="259">
-                  <c:v>Aug 2021</c:v>
-                </c:pt>
-                <c:pt idx="260">
-                  <c:v>Sep 2021</c:v>
-                </c:pt>
-                <c:pt idx="261">
-                  <c:v>Oct 2021</c:v>
-                </c:pt>
-                <c:pt idx="262">
-                  <c:v>Nov 2021</c:v>
-                </c:pt>
-                <c:pt idx="263">
-                  <c:v>Dec 2021</c:v>
-                </c:pt>
-                <c:pt idx="264">
-                  <c:v>Jan 2022</c:v>
-                </c:pt>
-                <c:pt idx="265">
-                  <c:v>Feb 2022</c:v>
-                </c:pt>
-                <c:pt idx="266">
-                  <c:v>Mar 2022</c:v>
-                </c:pt>
-                <c:pt idx="267">
-                  <c:v>Apr 2022</c:v>
-                </c:pt>
-                <c:pt idx="268">
-                  <c:v>May 2022</c:v>
-                </c:pt>
-                <c:pt idx="269">
-                  <c:v>Jun 2022</c:v>
-                </c:pt>
-                <c:pt idx="270">
-                  <c:v>Jul 2022</c:v>
-                </c:pt>
-                <c:pt idx="271">
-                  <c:v>Aug 2022</c:v>
-                </c:pt>
-                <c:pt idx="272">
-                  <c:v>Sep 2022</c:v>
-                </c:pt>
-                <c:pt idx="273">
-                  <c:v>Oct 2022</c:v>
-                </c:pt>
-                <c:pt idx="274">
-                  <c:v>Nov 2022</c:v>
-                </c:pt>
-                <c:pt idx="275">
-                  <c:v>Dec 2022</c:v>
-                </c:pt>
-                <c:pt idx="276">
-                  <c:v>Jan 2023</c:v>
-                </c:pt>
-                <c:pt idx="277">
-                  <c:v>Feb 2023</c:v>
-                </c:pt>
-                <c:pt idx="278">
-                  <c:v>Mar 2023</c:v>
-                </c:pt>
-                <c:pt idx="279">
-                  <c:v>Apr 2023</c:v>
-                </c:pt>
-                <c:pt idx="280">
-                  <c:v>May 2023</c:v>
-                </c:pt>
-                <c:pt idx="281">
-                  <c:v>Jun 2023</c:v>
-                </c:pt>
-                <c:pt idx="282">
-                  <c:v>Jul 2023</c:v>
-                </c:pt>
-                <c:pt idx="283">
-                  <c:v>Aug 2023</c:v>
-                </c:pt>
-                <c:pt idx="284">
-                  <c:v>Sep 2023</c:v>
-                </c:pt>
-                <c:pt idx="285">
-                  <c:v>Oct 2023</c:v>
-                </c:pt>
-                <c:pt idx="286">
-                  <c:v>Nov 2023</c:v>
-                </c:pt>
-                <c:pt idx="287">
-                  <c:v>Dec 2023</c:v>
-                </c:pt>
-                <c:pt idx="288">
-                  <c:v>Jan 2024</c:v>
-                </c:pt>
-                <c:pt idx="289">
-                  <c:v>Feb 2024</c:v>
-                </c:pt>
-                <c:pt idx="290">
-                  <c:v>Mar 2024</c:v>
-                </c:pt>
-                <c:pt idx="291">
-                  <c:v>Apr 2024</c:v>
-                </c:pt>
-                <c:pt idx="292">
-                  <c:v>May 2024</c:v>
-                </c:pt>
-                <c:pt idx="293">
-                  <c:v>Jun 2024</c:v>
-                </c:pt>
-                <c:pt idx="294">
-                  <c:v>Jul 2024</c:v>
-                </c:pt>
-                <c:pt idx="295">
-                  <c:v>Aug 2024</c:v>
-                </c:pt>
-                <c:pt idx="296">
-                  <c:v>Sep 2024</c:v>
-                </c:pt>
-                <c:pt idx="297">
-                  <c:v>Oct 2024</c:v>
-                </c:pt>
-                <c:pt idx="298">
-                  <c:v>Nov 2024</c:v>
-                </c:pt>
-                <c:pt idx="299">
-                  <c:v>Dec 2024</c:v>
-                </c:pt>
-                <c:pt idx="300">
-                  <c:v>Jan 2025</c:v>
-                </c:pt>
-                <c:pt idx="301">
-                  <c:v>Feb 2025</c:v>
-                </c:pt>
-                <c:pt idx="302">
-                  <c:v>Mar 2025</c:v>
-                </c:pt>
-                <c:pt idx="303">
-                  <c:v>Apr 2025</c:v>
-                </c:pt>
-                <c:pt idx="304">
-                  <c:v>May 2025</c:v>
-                </c:pt>
-                <c:pt idx="305">
-                  <c:v>Jun 2025</c:v>
-                </c:pt>
-                <c:pt idx="306">
-                  <c:v>Jul 2025</c:v>
-                </c:pt>
-                <c:pt idx="307">
-                  <c:v>Aug 2025</c:v>
-                </c:pt>
-                <c:pt idx="308">
-                  <c:v>Sep 2025</c:v>
-                </c:pt>
-                <c:pt idx="309">
-                  <c:v>Oct 2025</c:v>
-                </c:pt>
-                <c:pt idx="310">
-                  <c:v>Nov 2025</c:v>
-                </c:pt>
-                <c:pt idx="311">
-                  <c:v>Dec 2025</c:v>
-                </c:pt>
-                <c:pt idx="312">
-                  <c:v>Jan 2026</c:v>
-                </c:pt>
-                <c:pt idx="313">
-                  <c:v>Feb 2026</c:v>
-                </c:pt>
-                <c:pt idx="314">
-                  <c:v>Mar 2026</c:v>
-                </c:pt>
-                <c:pt idx="315">
-                  <c:v>Apr 2026</c:v>
-                </c:pt>
-                <c:pt idx="316">
-                  <c:v>May 2026</c:v>
-                </c:pt>
-                <c:pt idx="317">
-                  <c:v>Jun 2026</c:v>
-                </c:pt>
-                <c:pt idx="318">
-                  <c:v>Jul 2026</c:v>
+                  <c:v>2026 Q2</c:v>
                 </c:pt>
               </c:strCache>
             </c:strRef>
           </c:cat>
           <c:val>
             <c:numRef>
-              <c:f>Sheet1!$B$2:$B$320</c:f>
+              <c:f>Sheet1!$B$2:$B$143</c:f>
               <c:numCache>
                 <c:formatCode>General</c:formatCode>
-                <c:ptCount val="319"/>
+                <c:ptCount val="142"/>
                 <c:pt idx="0">
-                  <c:v>136.9</c:v>
+                  <c:v>100.3</c:v>
                 </c:pt>
                 <c:pt idx="1">
-                  <c:v>136.7</c:v>
+                  <c:v>101.0</c:v>
                 </c:pt>
                 <c:pt idx="2">
-                  <c:v>137.8</c:v>
+                  <c:v>101.3</c:v>
                 </c:pt>
                 <c:pt idx="3">
-                  <c:v>138.7</c:v>
+                  <c:v>101.9</c:v>
                 </c:pt>
                 <c:pt idx="4">
-                  <c:v>139.3</c:v>
+                  <c:v>102.7</c:v>
                 </c:pt>
                 <c:pt idx="5">
-                  <c:v>140.2</c:v>
+                  <c:v>103.1</c:v>
                 </c:pt>
                 <c:pt idx="6">
-                  <c:v>141.0</c:v>
+                  <c:v>104.1</c:v>
                 </c:pt>
                 <c:pt idx="7">
-                  <c:v>141.5</c:v>
+                  <c:v>104.7</c:v>
                 </c:pt>
                 <c:pt idx="8">
-                  <c:v>142.4</c:v>
+                  <c:v>104.2</c:v>
                 </c:pt>
                 <c:pt idx="9">
-                  <c:v>143.2</c:v>
+                  <c:v>105.9</c:v>
                 </c:pt>
                 <c:pt idx="10">
-                  <c:v>144.1</c:v>
+                  <c:v>106.9</c:v>
                 </c:pt>
                 <c:pt idx="11">
-                  <c:v>144.9</c:v>
+                  <c:v>107.5</c:v>
                 </c:pt>
                 <c:pt idx="12">
-                  <c:v>145.8</c:v>
+                  <c:v>108.0</c:v>
                 </c:pt>
                 <c:pt idx="13">
-                  <c:v>146.8</c:v>
+                  <c:v>109.6</c:v>
                 </c:pt>
                 <c:pt idx="14">
-                  <c:v>147.6</c:v>
+                  <c:v>110.5</c:v>
                 </c:pt>
                 <c:pt idx="15">
-                  <c:v>148.5</c:v>
+                  <c:v>110.6</c:v>
                 </c:pt>
                 <c:pt idx="16">
-                  <c:v>149.1</c:v>
+                  <c:v>110.8</c:v>
                 </c:pt>
                 <c:pt idx="17">
-                  <c:v>149.8</c:v>
+                  <c:v>112.2</c:v>
                 </c:pt>
                 <c:pt idx="18">
-                  <c:v>150.7</c:v>
+                  <c:v>113.5</c:v>
                 </c:pt>
                 <c:pt idx="19">
-                  <c:v>151.4</c:v>
+                  <c:v>113.6</c:v>
                 </c:pt>
                 <c:pt idx="20">
-                  <c:v>152.2</c:v>
+                  <c:v>114.1</c:v>
                 </c:pt>
                 <c:pt idx="21">
+                  <c:v>115.8</c:v>
+                </c:pt>
+                <c:pt idx="22">
+                  <c:v>116.7</c:v>
+                </c:pt>
+                <c:pt idx="23">
+                  <c:v>116.7</c:v>
+                </c:pt>
+                <c:pt idx="24">
+                  <c:v>117.0</c:v>
+                </c:pt>
+                <c:pt idx="25">
+                  <c:v>118.9</c:v>
+                </c:pt>
+                <c:pt idx="26">
+                  <c:v>120.0</c:v>
+                </c:pt>
+                <c:pt idx="27">
+                  <c:v>120.5</c:v>
+                </c:pt>
+                <c:pt idx="28">
+                  <c:v>121.6</c:v>
+                </c:pt>
+                <c:pt idx="29">
+                  <c:v>124.3</c:v>
+                </c:pt>
+                <c:pt idx="30">
+                  <c:v>126.2</c:v>
+                </c:pt>
+                <c:pt idx="31">
+                  <c:v>127.4</c:v>
+                </c:pt>
+                <c:pt idx="32">
+                  <c:v>128.8</c:v>
+                </c:pt>
+                <c:pt idx="33">
+                  <c:v>131.8</c:v>
+                </c:pt>
+                <c:pt idx="34">
+                  <c:v>134.1</c:v>
+                </c:pt>
+                <c:pt idx="35">
+                  <c:v>135.1</c:v>
+                </c:pt>
+                <c:pt idx="36">
+                  <c:v>137.1</c:v>
+                </c:pt>
+                <c:pt idx="37">
+                  <c:v>140.6</c:v>
+                </c:pt>
+                <c:pt idx="38">
+                  <c:v>143.1</c:v>
+                </c:pt>
+                <c:pt idx="39">
+                  <c:v>144.6</c:v>
+                </c:pt>
+                <c:pt idx="40">
+                  <c:v>146.7</c:v>
+                </c:pt>
+                <c:pt idx="41">
+                  <c:v>150.4</c:v>
+                </c:pt>
+                <c:pt idx="42">
                   <c:v>153.1</c:v>
                 </c:pt>
-                <c:pt idx="22">
-                  <c:v>153.6</c:v>
-                </c:pt>
-                <c:pt idx="23">
-                  <c:v>154.6</c:v>
-                </c:pt>
-                <c:pt idx="24">
-                  <c:v>155.4</c:v>
-                </c:pt>
-                <c:pt idx="25">
-                  <c:v>156.4</c:v>
-                </c:pt>
-                <c:pt idx="26">
-                  <c:v>157.3</c:v>
-                </c:pt>
-                <c:pt idx="27">
-                  <c:v>158.2</c:v>
-                </c:pt>
-                <c:pt idx="28">
-                  <c:v>159.2</c:v>
-                </c:pt>
-                <c:pt idx="29">
-                  <c:v>160.2</c:v>
-                </c:pt>
-                <c:pt idx="30">
-                  <c:v>161.2</c:v>
-                </c:pt>
-                <c:pt idx="31">
-                  <c:v>162.3</c:v>
-                </c:pt>
-                <c:pt idx="32">
-                  <c:v>163.3</c:v>
-                </c:pt>
-                <c:pt idx="33">
-                  <c:v>164.4</c:v>
-                </c:pt>
-                <c:pt idx="34">
-                  <c:v>165.4</c:v>
-                </c:pt>
-                <c:pt idx="35">
-                  <c:v>166.6</c:v>
-                </c:pt>
-                <c:pt idx="36">
-                  <c:v>167.6</c:v>
-                </c:pt>
-                <c:pt idx="37">
-                  <c:v>168.6</c:v>
-                </c:pt>
-                <c:pt idx="38">
-                  <c:v>169.2</c:v>
-                </c:pt>
-                <c:pt idx="39">
-                  <c:v>170.2</c:v>
-                </c:pt>
-                <c:pt idx="40">
-                  <c:v>171.1</c:v>
-                </c:pt>
-                <c:pt idx="41">
-                  <c:v>171.9</c:v>
-                </c:pt>
-                <c:pt idx="42">
-                  <c:v>173.2</c:v>
-                </c:pt>
                 <c:pt idx="43">
-                  <c:v>174.5</c:v>
+                  <c:v>154.3</c:v>
                 </c:pt>
                 <c:pt idx="44">
-                  <c:v>175.9</c:v>
+                  <c:v>156.3</c:v>
                 </c:pt>
                 <c:pt idx="45">
-                  <c:v>176.9</c:v>
+                  <c:v>160.6</c:v>
                 </c:pt>
                 <c:pt idx="46">
+                  <c:v>164.1</c:v>
+                </c:pt>
+                <c:pt idx="47">
+                  <c:v>166.1</c:v>
+                </c:pt>
+                <c:pt idx="48">
+                  <c:v>168.3</c:v>
+                </c:pt>
+                <c:pt idx="49">
+                  <c:v>172.6</c:v>
+                </c:pt>
+                <c:pt idx="50">
+                  <c:v>176.6</c:v>
+                </c:pt>
+                <c:pt idx="51">
+                  <c:v>179.0</c:v>
+                </c:pt>
+                <c:pt idx="52">
+                  <c:v>182.0</c:v>
+                </c:pt>
+                <c:pt idx="53">
+                  <c:v>188.7</c:v>
+                </c:pt>
+                <c:pt idx="54">
+                  <c:v>194.1</c:v>
+                </c:pt>
+                <c:pt idx="55">
+                  <c:v>197.1</c:v>
+                </c:pt>
+                <c:pt idx="56">
+                  <c:v>200.8</c:v>
+                </c:pt>
+                <c:pt idx="57">
+                  <c:v>208.6</c:v>
+                </c:pt>
+                <c:pt idx="58">
+                  <c:v>214.7</c:v>
+                </c:pt>
+                <c:pt idx="59">
+                  <c:v>217.1</c:v>
+                </c:pt>
+                <c:pt idx="60">
+                  <c:v>219.2</c:v>
+                </c:pt>
+                <c:pt idx="61">
+                  <c:v>223.5</c:v>
+                </c:pt>
+                <c:pt idx="62">
+                  <c:v>224.4</c:v>
+                </c:pt>
+                <c:pt idx="63">
+                  <c:v>223.1</c:v>
+                </c:pt>
+                <c:pt idx="64">
+                  <c:v>223.2</c:v>
+                </c:pt>
+                <c:pt idx="65">
+                  <c:v>225.9</c:v>
+                </c:pt>
+                <c:pt idx="66">
+                  <c:v>223.3</c:v>
+                </c:pt>
+                <c:pt idx="67">
+                  <c:v>216.9</c:v>
+                </c:pt>
+                <c:pt idx="68">
+                  <c:v>210.9</c:v>
+                </c:pt>
+                <c:pt idx="69">
+                  <c:v>208.1</c:v>
+                </c:pt>
+                <c:pt idx="70">
+                  <c:v>203.0</c:v>
+                </c:pt>
+                <c:pt idx="71">
+                  <c:v>194.7</c:v>
+                </c:pt>
+                <c:pt idx="72">
+                  <c:v>192.6</c:v>
+                </c:pt>
+                <c:pt idx="73">
+                  <c:v>193.2</c:v>
+                </c:pt>
+                <c:pt idx="74">
+                  <c:v>192.7</c:v>
+                </c:pt>
+                <c:pt idx="75">
+                  <c:v>190.4</c:v>
+                </c:pt>
+                <c:pt idx="76">
+                  <c:v>187.1</c:v>
+                </c:pt>
+                <c:pt idx="77">
+                  <c:v>189.9</c:v>
+                </c:pt>
+                <c:pt idx="78">
+                  <c:v>187.2</c:v>
+                </c:pt>
+                <c:pt idx="79">
+                  <c:v>183.1</c:v>
+                </c:pt>
+                <c:pt idx="80">
+                  <c:v>177.3</c:v>
+                </c:pt>
+                <c:pt idx="81">
+                  <c:v>179.5</c:v>
+                </c:pt>
+                <c:pt idx="82">
+                  <c:v>180.6</c:v>
+                </c:pt>
+                <c:pt idx="83">
                   <c:v>178.3</c:v>
                 </c:pt>
-                <c:pt idx="47">
-                  <c:v>179.8</c:v>
-                </c:pt>
-                <c:pt idx="48">
-                  <c:v>180.9</c:v>
-                </c:pt>
-                <c:pt idx="49">
-                  <c:v>182.3</c:v>
-                </c:pt>
-                <c:pt idx="50">
-                  <c:v>183.6</c:v>
-                </c:pt>
-                <c:pt idx="51">
-                  <c:v>185.2</c:v>
-                </c:pt>
-                <c:pt idx="52">
+                <c:pt idx="84">
+                  <c:v>177.1</c:v>
+                </c:pt>
+                <c:pt idx="85">
+                  <c:v>184.2</c:v>
+                </c:pt>
+                <c:pt idx="86">
+                  <c:v>187.0</c:v>
+                </c:pt>
+                <c:pt idx="87">
                   <c:v>186.9</c:v>
                 </c:pt>
-                <c:pt idx="53">
+                <c:pt idx="88">
                   <c:v>188.8</c:v>
                 </c:pt>
-                <c:pt idx="54">
-                  <c:v>190.4</c:v>
-                </c:pt>
-                <c:pt idx="55">
-                  <c:v>191.8</c:v>
-                </c:pt>
-                <c:pt idx="56">
-                  <c:v>193.2</c:v>
-                </c:pt>
-                <c:pt idx="57">
-                  <c:v>194.7</c:v>
-                </c:pt>
-                <c:pt idx="58">
-                  <c:v>196.5</c:v>
-                </c:pt>
-                <c:pt idx="59">
-                  <c:v>198.1</c:v>
-                </c:pt>
-                <c:pt idx="60">
+                <c:pt idx="89">
+                  <c:v>197.2</c:v>
+                </c:pt>
+                <c:pt idx="90">
+                  <c:v>200.7</c:v>
+                </c:pt>
+                <c:pt idx="91">
                   <c:v>199.5</c:v>
                 </c:pt>
-                <c:pt idx="61">
-                  <c:v>201.1</c:v>
-                </c:pt>
-                <c:pt idx="62">
-                  <c:v>203.1</c:v>
-                </c:pt>
-                <c:pt idx="63">
-                  <c:v>204.8</c:v>
-                </c:pt>
-                <c:pt idx="64">
-                  <c:v>206.5</c:v>
-                </c:pt>
-                <c:pt idx="65">
-                  <c:v>208.3</c:v>
-                </c:pt>
-                <c:pt idx="66">
-                  <c:v>210.4</c:v>
-                </c:pt>
-                <c:pt idx="67">
-                  <c:v>211.9</c:v>
-                </c:pt>
-                <c:pt idx="68">
-                  <c:v>213.9</c:v>
-                </c:pt>
-                <c:pt idx="69">
-                  <c:v>215.1</c:v>
-                </c:pt>
-                <c:pt idx="70">
-                  <c:v>216.5</c:v>
-                </c:pt>
-                <c:pt idx="71">
-                  <c:v>217.8</c:v>
-                </c:pt>
-                <c:pt idx="72">
-                  <c:v>219.1</c:v>
-                </c:pt>
-                <c:pt idx="73">
-                  <c:v>219.6</c:v>
-                </c:pt>
-                <c:pt idx="74">
-                  <c:v>220.4</c:v>
-                </c:pt>
-                <c:pt idx="75">
-                  <c:v>220.8</c:v>
-                </c:pt>
-                <c:pt idx="76">
-                  <c:v>221.4</c:v>
-                </c:pt>
-                <c:pt idx="77">
-                  <c:v>221.3</c:v>
-                </c:pt>
-                <c:pt idx="78">
+                <c:pt idx="92">
+                  <c:v>200.1</c:v>
+                </c:pt>
+                <c:pt idx="93">
+                  <c:v>206.7</c:v>
+                </c:pt>
+                <c:pt idx="94">
+                  <c:v>209.2</c:v>
+                </c:pt>
+                <c:pt idx="95">
+                  <c:v>208.5</c:v>
+                </c:pt>
+                <c:pt idx="96">
+                  <c:v>209.8</c:v>
+                </c:pt>
+                <c:pt idx="97">
+                  <c:v>217.4</c:v>
+                </c:pt>
+                <c:pt idx="98">
+                  <c:v>220.1</c:v>
+                </c:pt>
+                <c:pt idx="99">
+                  <c:v>219.8</c:v>
+                </c:pt>
+                <c:pt idx="100">
                   <c:v>221.2</c:v>
                 </c:pt>
-                <c:pt idx="79">
-                  <c:v>221.8</c:v>
-                </c:pt>
-                <c:pt idx="80">
-                  <c:v>221.7</c:v>
-                </c:pt>
-                <c:pt idx="81">
-                  <c:v>222.0</c:v>
-                </c:pt>
-                <c:pt idx="82">
-                  <c:v>222.7</c:v>
-                </c:pt>
-                <c:pt idx="83">
-                  <c:v>222.7</c:v>
-                </c:pt>
-                <c:pt idx="84">
-                  <c:v>223.5</c:v>
-                </c:pt>
-                <c:pt idx="85">
-                  <c:v>223.6</c:v>
-                </c:pt>
-                <c:pt idx="86">
-                  <c:v>224.4</c:v>
-                </c:pt>
-                <c:pt idx="87">
-                  <c:v>224.5</c:v>
-                </c:pt>
-                <c:pt idx="88">
-                  <c:v>223.3</c:v>
-                </c:pt>
-                <c:pt idx="89">
-                  <c:v>222.5</c:v>
-                </c:pt>
-                <c:pt idx="90">
-                  <c:v>221.3</c:v>
-                </c:pt>
-                <c:pt idx="91">
-                  <c:v>220.3</c:v>
-                </c:pt>
-                <c:pt idx="92">
-                  <c:v>219.4</c:v>
-                </c:pt>
-                <c:pt idx="93">
-                  <c:v>217.6</c:v>
-                </c:pt>
-                <c:pt idx="94">
-                  <c:v>216.2</c:v>
-                </c:pt>
-                <c:pt idx="95">
-                  <c:v>215.1</c:v>
-                </c:pt>
-                <c:pt idx="96">
-                  <c:v>213.3</c:v>
-                </c:pt>
-                <c:pt idx="97">
-                  <c:v>211.9</c:v>
-                </c:pt>
-                <c:pt idx="98">
-                  <c:v>210.1</c:v>
-                </c:pt>
-                <c:pt idx="99">
-                  <c:v>207.8</c:v>
-                </c:pt>
-                <c:pt idx="100">
-                  <c:v>205.4</c:v>
-                </c:pt>
                 <c:pt idx="101">
-                  <c:v>204.1</c:v>
+                  <c:v>229.2</c:v>
                 </c:pt>
                 <c:pt idx="102">
-                  <c:v>202.2</c:v>
+                  <c:v>232.6</c:v>
                 </c:pt>
                 <c:pt idx="103">
-                  <c:v>200.2</c:v>
+                  <c:v>232.7</c:v>
                 </c:pt>
                 <c:pt idx="104">
-                  <c:v>198.3</c:v>
+                  <c:v>234.6</c:v>
                 </c:pt>
                 <c:pt idx="105">
-                  <c:v>196.6</c:v>
+                  <c:v>243.4</c:v>
                 </c:pt>
                 <c:pt idx="106">
-                  <c:v>193.1</c:v>
+                  <c:v>246.9</c:v>
                 </c:pt>
                 <c:pt idx="107">
-                  <c:v>192.6</c:v>
+                  <c:v>247.1</c:v>
                 </c:pt>
                 <c:pt idx="108">
-                  <c:v>194.2</c:v>
+                  <c:v>250.9</c:v>
                 </c:pt>
                 <c:pt idx="109">
-                  <c:v>194.4</c:v>
+                  <c:v>258.5</c:v>
                 </c:pt>
                 <c:pt idx="110">
-                  <c:v>192.0</c:v>
+                  <c:v>261.4</c:v>
                 </c:pt>
                 <c:pt idx="111">
-                  <c:v>190.8</c:v>
+                  <c:v>260.6</c:v>
                 </c:pt>
                 <c:pt idx="112">
-                  <c:v>190.8</c:v>
+                  <c:v>263.2</c:v>
                 </c:pt>
                 <c:pt idx="113">
-                  <c:v>190.7</c:v>
+                  <c:v>271.3</c:v>
                 </c:pt>
                 <c:pt idx="114">
-                  <c:v>190.1</c:v>
+                  <c:v>274.1</c:v>
                 </c:pt>
                 <c:pt idx="115">
-                  <c:v>189.8</c:v>
+                  <c:v>275.0</c:v>
                 </c:pt>
                 <c:pt idx="116">
-                  <c:v>189.6</c:v>
+                  <c:v>279.6</c:v>
                 </c:pt>
                 <c:pt idx="117">
-                  <c:v>189.9</c:v>
+                  <c:v>286.6</c:v>
                 </c:pt>
                 <c:pt idx="118">
-                  <c:v>190.5</c:v>
+                  <c:v>296.6</c:v>
                 </c:pt>
                 <c:pt idx="119">
-                  <c:v>188.8</c:v>
+                  <c:v>305.5</c:v>
                 </c:pt>
                 <c:pt idx="120">
-                  <c:v>188.9</c:v>
+                  <c:v>316.0</c:v>
                 </c:pt>
                 <c:pt idx="121">
-                  <c:v>188.1</c:v>
+                  <c:v>336.8</c:v>
                 </c:pt>
                 <c:pt idx="122">
-                  <c:v>187.8</c:v>
+                  <c:v>350.4</c:v>
                 </c:pt>
                 <c:pt idx="123">
-                  <c:v>188.1</c:v>
+                  <c:v>358.3</c:v>
                 </c:pt>
                 <c:pt idx="124">
-                  <c:v>188.0</c:v>
+                  <c:v>373.3</c:v>
                 </c:pt>
                 <c:pt idx="125">
-                  <c:v>186.1</c:v>
+                  <c:v>393.3</c:v>
                 </c:pt>
                 <c:pt idx="126">
-                  <c:v>184.9</c:v>
+                  <c:v>390.5</c:v>
                 </c:pt>
                 <c:pt idx="127">
-                  <c:v>184.8</c:v>
+                  <c:v>385.3</c:v>
                 </c:pt>
                 <c:pt idx="128">
-                  <c:v>183.1</c:v>
+                  <c:v>388.6</c:v>
                 </c:pt>
                 <c:pt idx="129">
-                  <c:v>183.3</c:v>
+                  <c:v>404.4</c:v>
                 </c:pt>
                 <c:pt idx="130">
-                  <c:v>182.6</c:v>
+                  <c:v>410.5</c:v>
                 </c:pt>
                 <c:pt idx="131">
-                  <c:v>181.3</c:v>
+                  <c:v>409.4</c:v>
                 </c:pt>
                 <c:pt idx="132">
-                  <c:v>180.2</c:v>
+                  <c:v>414.1</c:v>
                 </c:pt>
                 <c:pt idx="133">
-                  <c:v>178.6</c:v>
+                  <c:v>427.8</c:v>
                 </c:pt>
                 <c:pt idx="134">
-                  <c:v>176.7</c:v>
+                  <c:v>429.1</c:v>
                 </c:pt>
                 <c:pt idx="135">
-                  <c:v>177.2</c:v>
+                  <c:v>428.8</c:v>
                 </c:pt>
                 <c:pt idx="136">
-                  <c:v>176.7</c:v>
+                  <c:v>432.6</c:v>
                 </c:pt>
                 <c:pt idx="137">
-                  <c:v>177.1</c:v>
+                  <c:v>441.0</c:v>
                 </c:pt>
                 <c:pt idx="138">
-                  <c:v>177.4</c:v>
+                  <c:v>439.5</c:v>
                 </c:pt>
                 <c:pt idx="139">
-                  <c:v>177.1</c:v>
+                  <c:v>437.9</c:v>
                 </c:pt>
                 <c:pt idx="140">
-                  <c:v>178.0</c:v>
+                  <c:v>441.2</c:v>
                 </c:pt>
                 <c:pt idx="141">
-                  <c:v>177.2</c:v>
-                </c:pt>
-                <c:pt idx="142">
-                  <c:v>177.8</c:v>
-                </c:pt>
-                <c:pt idx="143">
-                  <c:v>178.2</c:v>
-                </c:pt>
-                <c:pt idx="144">
-                  <c:v>177.6</c:v>
-                </c:pt>
-                <c:pt idx="145">
-                  <c:v>178.2</c:v>
-                </c:pt>
-                <c:pt idx="146">
-                  <c:v>179.6</c:v>
-                </c:pt>
-                <c:pt idx="147">
-                  <c:v>180.5</c:v>
-                </c:pt>
-                <c:pt idx="148">
-                  <c:v>181.6</c:v>
-                </c:pt>
-                <c:pt idx="149">
-                  <c:v>182.3</c:v>
-                </c:pt>
-                <c:pt idx="150">
-                  <c:v>182.6</c:v>
-                </c:pt>
-                <c:pt idx="151">
-                  <c:v>183.9</c:v>
-                </c:pt>
-                <c:pt idx="152">
-                  <c:v>184.5</c:v>
-                </c:pt>
-                <c:pt idx="153">
-                  <c:v>185.5</c:v>
-                </c:pt>
-                <c:pt idx="154">
-                  <c:v>186.4</c:v>
-                </c:pt>
-                <c:pt idx="155">
-                  <c:v>187.3</c:v>
-                </c:pt>
-                <c:pt idx="156">
-                  <c:v>188.8</c:v>
-                </c:pt>
-                <c:pt idx="157">
-                  <c:v>189.9</c:v>
-                </c:pt>
-                <c:pt idx="158">
-                  <c:v>191.8</c:v>
-                </c:pt>
-                <c:pt idx="159">
-                  <c:v>192.7</c:v>
-                </c:pt>
-                <c:pt idx="160">
-                  <c:v>194.2</c:v>
-                </c:pt>
-                <c:pt idx="161">
-                  <c:v>195.4</c:v>
-                </c:pt>
-                <c:pt idx="162">
-                  <c:v>196.4</c:v>
-                </c:pt>
-                <c:pt idx="163">
-                  <c:v>197.0</c:v>
-                </c:pt>
-                <c:pt idx="164">
-                  <c:v>198.0</c:v>
-                </c:pt>
-                <c:pt idx="165">
-                  <c:v>198.6</c:v>
-                </c:pt>
-                <c:pt idx="166">
-                  <c:v>198.7</c:v>
-                </c:pt>
-                <c:pt idx="167">
-                  <c:v>199.9</c:v>
-                </c:pt>
-                <c:pt idx="168">
-                  <c:v>200.8</c:v>
-                </c:pt>
-                <c:pt idx="169">
-                  <c:v>201.5</c:v>
-                </c:pt>
-                <c:pt idx="170">
-                  <c:v>202.0</c:v>
-                </c:pt>
-                <c:pt idx="171">
-                  <c:v>202.7</c:v>
-                </c:pt>
-                <c:pt idx="172">
-                  <c:v>203.1</c:v>
-                </c:pt>
-                <c:pt idx="173">
-                  <c:v>204.1</c:v>
-                </c:pt>
-                <c:pt idx="174">
-                  <c:v>204.9</c:v>
-                </c:pt>
-                <c:pt idx="175">
-                  <c:v>205.7</c:v>
-                </c:pt>
-                <c:pt idx="176">
-                  <c:v>205.9</c:v>
-                </c:pt>
-                <c:pt idx="177">
-                  <c:v>207.0</c:v>
-                </c:pt>
-                <c:pt idx="178">
-                  <c:v>208.1</c:v>
-                </c:pt>
-                <c:pt idx="179">
-                  <c:v>209.3</c:v>
-                </c:pt>
-                <c:pt idx="180">
-                  <c:v>209.8</c:v>
-                </c:pt>
-                <c:pt idx="181">
-                  <c:v>211.2</c:v>
-                </c:pt>
-                <c:pt idx="182">
-                  <c:v>211.8</c:v>
-                </c:pt>
-                <c:pt idx="183">
-                  <c:v>212.7</c:v>
-                </c:pt>
-                <c:pt idx="184">
-                  <c:v>213.8</c:v>
-                </c:pt>
-                <c:pt idx="185">
-                  <c:v>214.7</c:v>
-                </c:pt>
-                <c:pt idx="186">
-                  <c:v>215.7</c:v>
-                </c:pt>
-                <c:pt idx="187">
-                  <c:v>216.2</c:v>
-                </c:pt>
-                <c:pt idx="188">
-                  <c:v>217.2</c:v>
-                </c:pt>
-                <c:pt idx="189">
-                  <c:v>218.4</c:v>
-                </c:pt>
-                <c:pt idx="190">
-                  <c:v>219.5</c:v>
-                </c:pt>
-                <c:pt idx="191">
-                  <c:v>220.4</c:v>
-                </c:pt>
-                <c:pt idx="192">
-                  <c:v>221.6</c:v>
-                </c:pt>
-                <c:pt idx="193">
-                  <c:v>221.6</c:v>
-                </c:pt>
-                <c:pt idx="194">
-                  <c:v>223.2</c:v>
-                </c:pt>
-                <c:pt idx="195">
-                  <c:v>224.3</c:v>
-                </c:pt>
-                <c:pt idx="196">
-                  <c:v>225.3</c:v>
-                </c:pt>
-                <c:pt idx="197">
-                  <c:v>226.5</c:v>
-                </c:pt>
-                <c:pt idx="198">
-                  <c:v>227.7</c:v>
-                </c:pt>
-                <c:pt idx="199">
-                  <c:v>228.8</c:v>
-                </c:pt>
-                <c:pt idx="200">
-                  <c:v>230.1</c:v>
-                </c:pt>
-                <c:pt idx="201">
-                  <c:v>231.3</c:v>
-                </c:pt>
-                <c:pt idx="202">
-                  <c:v>232.2</c:v>
-                </c:pt>
-                <c:pt idx="203">
-                  <c:v>233.7</c:v>
-                </c:pt>
-                <c:pt idx="204">
-                  <c:v>234.0</c:v>
-                </c:pt>
-                <c:pt idx="205">
-                  <c:v>235.2</c:v>
-                </c:pt>
-                <c:pt idx="206">
-                  <c:v>236.6</c:v>
-                </c:pt>
-                <c:pt idx="207">
-                  <c:v>238.3</c:v>
-                </c:pt>
-                <c:pt idx="208">
-                  <c:v>239.5</c:v>
-                </c:pt>
-                <c:pt idx="209">
-                  <c:v>240.4</c:v>
-                </c:pt>
-                <c:pt idx="210">
-                  <c:v>241.6</c:v>
-                </c:pt>
-                <c:pt idx="211">
-                  <c:v>243.2</c:v>
-                </c:pt>
-                <c:pt idx="212">
-                  <c:v>244.3</c:v>
-                </c:pt>
-                <c:pt idx="213">
-                  <c:v>245.3</c:v>
-                </c:pt>
-                <c:pt idx="214">
-                  <c:v>247.0</c:v>
-                </c:pt>
-                <c:pt idx="215">
-                  <c:v>248.1</c:v>
-                </c:pt>
-                <c:pt idx="216">
-                  <c:v>250.0</c:v>
-                </c:pt>
-                <c:pt idx="217">
-                  <c:v>251.6</c:v>
-                </c:pt>
-                <c:pt idx="218">
-                  <c:v>252.4</c:v>
-                </c:pt>
-                <c:pt idx="219">
-                  <c:v>253.2</c:v>
-                </c:pt>
-                <c:pt idx="220">
-                  <c:v>254.3</c:v>
-                </c:pt>
-                <c:pt idx="221">
-                  <c:v>255.4</c:v>
-                </c:pt>
-                <c:pt idx="222">
-                  <c:v>256.4</c:v>
-                </c:pt>
-                <c:pt idx="223">
-                  <c:v>257.7</c:v>
-                </c:pt>
-                <c:pt idx="224">
-                  <c:v>258.2</c:v>
-                </c:pt>
-                <c:pt idx="225">
-                  <c:v>259.0</c:v>
-                </c:pt>
-                <c:pt idx="226">
-                  <c:v>260.5</c:v>
-                </c:pt>
-                <c:pt idx="227">
-                  <c:v>261.3</c:v>
-                </c:pt>
-                <c:pt idx="228">
-                  <c:v>262.8</c:v>
-                </c:pt>
-                <c:pt idx="229">
-                  <c:v>263.4</c:v>
-                </c:pt>
-                <c:pt idx="230">
-                  <c:v>264.4</c:v>
-                </c:pt>
-                <c:pt idx="231">
-                  <c:v>265.6</c:v>
-                </c:pt>
-                <c:pt idx="232">
-                  <c:v>266.8</c:v>
-                </c:pt>
-                <c:pt idx="233">
-                  <c:v>267.8</c:v>
-                </c:pt>
-                <c:pt idx="234">
-                  <c:v>268.8</c:v>
-                </c:pt>
-                <c:pt idx="235">
-                  <c:v>269.9</c:v>
-                </c:pt>
-                <c:pt idx="236">
-                  <c:v>271.4</c:v>
-                </c:pt>
-                <c:pt idx="237">
-                  <c:v>272.9</c:v>
-                </c:pt>
-                <c:pt idx="238">
-                  <c:v>274.4</c:v>
-                </c:pt>
-                <c:pt idx="239">
-                  <c:v>276.8</c:v>
-                </c:pt>
-                <c:pt idx="240">
-                  <c:v>278.4</c:v>
-                </c:pt>
-                <c:pt idx="241">
-                  <c:v>280.4</c:v>
-                </c:pt>
-                <c:pt idx="242">
-                  <c:v>280.8</c:v>
-                </c:pt>
-                <c:pt idx="243">
-                  <c:v>281.2</c:v>
-                </c:pt>
-                <c:pt idx="244">
-                  <c:v>280.2</c:v>
-                </c:pt>
-                <c:pt idx="245">
-                  <c:v>283.2</c:v>
-                </c:pt>
-                <c:pt idx="246">
-                  <c:v>287.3</c:v>
-                </c:pt>
-                <c:pt idx="247">
-                  <c:v>292.3</c:v>
-                </c:pt>
-                <c:pt idx="248">
-                  <c:v>297.1</c:v>
-                </c:pt>
-                <c:pt idx="249">
-                  <c:v>301.6</c:v>
-                </c:pt>
-                <c:pt idx="250">
-                  <c:v>305.2</c:v>
-                </c:pt>
-                <c:pt idx="251">
-                  <c:v>309.2</c:v>
-                </c:pt>
-                <c:pt idx="252">
-                  <c:v>312.9</c:v>
-                </c:pt>
-                <c:pt idx="253">
-                  <c:v>315.6</c:v>
-                </c:pt>
-                <c:pt idx="254">
-                  <c:v>320.2</c:v>
-                </c:pt>
-                <c:pt idx="255">
-                  <c:v>325.0</c:v>
-                </c:pt>
-                <c:pt idx="256">
-                  <c:v>330.4</c:v>
-                </c:pt>
-                <c:pt idx="257">
-                  <c:v>336.4</c:v>
-                </c:pt>
-                <c:pt idx="258">
-                  <c:v>341.5</c:v>
-                </c:pt>
-                <c:pt idx="259">
-                  <c:v>345.5</c:v>
-                </c:pt>
-                <c:pt idx="260">
-                  <c:v>349.1</c:v>
-                </c:pt>
-                <c:pt idx="261">
-                  <c:v>353.4</c:v>
-                </c:pt>
-                <c:pt idx="262">
-                  <c:v>358.3</c:v>
-                </c:pt>
-                <c:pt idx="263">
-                  <c:v>363.3</c:v>
-                </c:pt>
-                <c:pt idx="264">
-                  <c:v>368.7</c:v>
-                </c:pt>
-                <c:pt idx="265">
-                  <c:v>373.8</c:v>
-                </c:pt>
-                <c:pt idx="266">
-                  <c:v>378.4</c:v>
-                </c:pt>
-                <c:pt idx="267">
-                  <c:v>383.1</c:v>
-                </c:pt>
-                <c:pt idx="268">
-                  <c:v>386.6</c:v>
-                </c:pt>
-                <c:pt idx="269">
-                  <c:v>387.4</c:v>
-                </c:pt>
-                <c:pt idx="270">
-                  <c:v>385.7</c:v>
-                </c:pt>
-                <c:pt idx="271">
-                  <c:v>384.1</c:v>
-                </c:pt>
-                <c:pt idx="272">
-                  <c:v>385.0</c:v>
-                </c:pt>
-                <c:pt idx="273">
-                  <c:v>385.4</c:v>
-                </c:pt>
-                <c:pt idx="274">
-                  <c:v>385.4</c:v>
-                </c:pt>
-                <c:pt idx="275">
-                  <c:v>385.5</c:v>
-                </c:pt>
-                <c:pt idx="276">
-                  <c:v>386.8</c:v>
-                </c:pt>
-                <c:pt idx="277">
-                  <c:v>389.0</c:v>
-                </c:pt>
-                <c:pt idx="278">
-                  <c:v>391.0</c:v>
-                </c:pt>
-                <c:pt idx="279">
-                  <c:v>393.6</c:v>
-                </c:pt>
-                <c:pt idx="280">
-                  <c:v>396.4</c:v>
-                </c:pt>
-                <c:pt idx="281">
-                  <c:v>398.9</c:v>
-                </c:pt>
-                <c:pt idx="282">
-                  <c:v>402.4</c:v>
-                </c:pt>
-                <c:pt idx="283">
-                  <c:v>404.9</c:v>
-                </c:pt>
-                <c:pt idx="284">
-                  <c:v>407.1</c:v>
-                </c:pt>
-                <c:pt idx="285">
-                  <c:v>408.5</c:v>
-                </c:pt>
-                <c:pt idx="286">
-                  <c:v>409.6</c:v>
-                </c:pt>
-                <c:pt idx="287">
-                  <c:v>410.6</c:v>
-                </c:pt>
-                <c:pt idx="288">
-                  <c:v>411.3</c:v>
-                </c:pt>
-                <c:pt idx="289">
-                  <c:v>415.5</c:v>
-                </c:pt>
-                <c:pt idx="290">
-                  <c:v>416.2</c:v>
-                </c:pt>
-                <c:pt idx="291">
-                  <c:v>418.5</c:v>
-                </c:pt>
-                <c:pt idx="292">
-                  <c:v>418.9</c:v>
-                </c:pt>
-                <c:pt idx="293">
-                  <c:v>420.0</c:v>
-                </c:pt>
-                <c:pt idx="294">
-                  <c:v>421.3</c:v>
-                </c:pt>
-                <c:pt idx="295">
-                  <c:v>422.8</c:v>
-                </c:pt>
-                <c:pt idx="296">
-                  <c:v>425.4</c:v>
-                </c:pt>
-                <c:pt idx="297">
-                  <c:v>427.2</c:v>
-                </c:pt>
-                <c:pt idx="298">
-                  <c:v>428.7</c:v>
-                </c:pt>
-                <c:pt idx="299">
-                  <c:v>430.6</c:v>
-                </c:pt>
-                <c:pt idx="300">
-                  <c:v>432.4</c:v>
-                </c:pt>
-                <c:pt idx="301">
-                  <c:v>432.3</c:v>
-                </c:pt>
-                <c:pt idx="302">
-                  <c:v>432.9</c:v>
-                </c:pt>
-                <c:pt idx="303">
-                  <c:v>432.0</c:v>
-                </c:pt>
-                <c:pt idx="304">
-                  <c:v>432.0</c:v>
-                </c:pt>
-                <c:pt idx="305">
-                  <c:v>432.2</c:v>
-                </c:pt>
-                <c:pt idx="306">
-                  <c:v>432.4</c:v>
-                </c:pt>
-                <c:pt idx="307">
-                  <c:v>434.0</c:v>
-                </c:pt>
-                <c:pt idx="308">
-                  <c:v>433.8</c:v>
-                </c:pt>
-                <c:pt idx="309">
-                  <c:v>435.6</c:v>
-                </c:pt>
-                <c:pt idx="310">
-                  <c:v>438.4</c:v>
-                </c:pt>
-                <c:pt idx="311">
-                  <c:v>439.6</c:v>
-                </c:pt>
-                <c:pt idx="312">
-                  <c:v>440.9</c:v>
-                </c:pt>
-                <c:pt idx="313">
-                  <c:v>440.6</c:v>
-                </c:pt>
-                <c:pt idx="314">
-                  <c:v>441.5</c:v>
-                </c:pt>
-                <c:pt idx="315">
-                  <c:v>440.9</c:v>
-                </c:pt>
-                <c:pt idx="316">
-                  <c:v>442.3</c:v>
-                </c:pt>
-                <c:pt idx="317">
-                  <c:v>442.3</c:v>
-                </c:pt>
-                <c:pt idx="318">
-                  <c:v>443.5</c:v>
+                  <c:v>450.9</c:v>
                 </c:pt>
               </c:numCache>
             </c:numRef>
@@ -2220,7 +1128,7 @@
                     </a:solidFill>
                     <a:latin typeface="Arial"/>
                   </a:rPr>
-                  <a:t>Month</a:t>
+                  <a:t>Year</a:t>
                 </a:r>
               </a:p>
             </c:rich>
@@ -2228,7 +1136,7 @@
           <c:layout/>
           <c:overlay val="0"/>
         </c:title>
-        <c:majorTickMark val="none"/>
+        <c:majorTickMark val="out"/>
         <c:minorTickMark val="none"/>
         <c:tickLblPos val="nextTo"/>
         <c:spPr>
@@ -2256,13 +1164,16 @@
         <c:auto val="1"/>
         <c:lblAlgn val="ctr"/>
         <c:lblOffset val="100"/>
-        <c:tickLblSkip val="36"/>
-        <c:tickMarkSkip val="36"/>
+        <c:tickLblSkip val="20"/>
+        <c:tickMarkSkip val="20"/>
         <c:noMultiLvlLbl val="0"/>
       </c:catAx>
       <c:valAx>
         <c:axId val="2140495176"/>
-        <c:scaling/>
+        <c:scaling>
+          <c:max val="600.0"/>
+          <c:min val="0.0"/>
+        </c:scaling>
         <c:delete val="0"/>
         <c:axPos val="l"/>
         <c:majorGridlines>
@@ -2287,7 +1198,7 @@
                     </a:solidFill>
                     <a:latin typeface="Arial"/>
                   </a:rPr>
-                  <a:t>Index (1991 Q1 = 100)</a:t>
+                  <a:t>Index level</a:t>
                 </a:r>
               </a:p>
             </c:rich>
@@ -2296,12 +1207,14 @@
           <c:overlay val="0"/>
         </c:title>
         <c:numFmt formatCode="0" sourceLinked="0"/>
-        <c:majorTickMark val="none"/>
+        <c:majorTickMark val="out"/>
         <c:minorTickMark val="none"/>
         <c:tickLblPos val="nextTo"/>
         <c:spPr>
           <a:ln>
-            <a:noFill/>
+            <a:solidFill>
+              <a:srgbClr val="30363D"/>
+            </a:solidFill>
           </a:ln>
         </c:spPr>
         <c:txPr>
@@ -2342,7 +1255,7 @@
     <a:lstStyle/>
     <a:p>
       <a:pPr>
-        <a:defRPr sz="1000">
+        <a:defRPr sz="1100">
           <a:solidFill>
             <a:srgbClr val="B1BAC4"/>
           </a:solidFill>
@@ -2362,28 +1275,7 @@
 <c:chartSpace xmlns:c="http://schemas.openxmlformats.org/drawingml/2006/chart" xmlns:a="http://schemas.openxmlformats.org/drawingml/2006/main" xmlns:r="http://schemas.openxmlformats.org/officeDocument/2006/relationships">
   <c:date1904 val="0"/>
   <c:chart>
-    <c:title>
-      <c:tx>
-        <c:rich>
-          <a:bodyPr/>
-          <a:lstStyle/>
-          <a:p>
-            <a:r>
-              <a:rPr sz="1200" b="1">
-                <a:solidFill>
-                  <a:srgbClr val="F0F6FC"/>
-                </a:solidFill>
-                <a:latin typeface="Arial"/>
-              </a:rPr>
-              <a:t>U.S. home prices: change from the same month one year earlier</a:t>
-            </a:r>
-          </a:p>
-        </c:rich>
-      </c:tx>
-      <c:layout/>
-      <c:overlay val="0"/>
-    </c:title>
-    <c:autoTitleDeleted val="0"/>
+    <c:autoTitleDeleted val="1"/>
     <c:plotArea>
       <c:barChart>
         <c:barDir val="col"/>
@@ -2397,7 +1289,7 @@
               <c:strCache>
                 <c:ptCount val="1"/>
                 <c:pt idx="0">
-                  <c:v>Year-over-year change</c:v>
+                  <c:v>Year-over-year change (%)</c:v>
                 </c:pt>
               </c:strCache>
             </c:strRef>
@@ -2406,40 +1298,43 @@
             <a:solidFill>
               <a:srgbClr val="58A6FF"/>
             </a:solidFill>
+            <a:ln>
+              <a:noFill/>
+            </a:ln>
           </c:spPr>
-          <c:invertIfNegative val="0"/>
           <c:dPt>
-            <c:idx val="66"/>
+            <c:idx val="14"/>
+            <c:invertIfNegative val="0"/>
             <c:spPr>
               <a:solidFill>
-                <a:srgbClr val="D29922"/>
+                <a:srgbClr val="F0883E"/>
               </a:solidFill>
             </c:spPr>
           </c:dPt>
           <c:dPt>
-            <c:idx val="126"/>
+            <c:idx val="33"/>
+            <c:invertIfNegative val="0"/>
             <c:spPr>
               <a:solidFill>
-                <a:srgbClr val="D29922"/>
+                <a:srgbClr val="F0883E"/>
               </a:solidFill>
             </c:spPr>
           </c:dPt>
           <c:dLbls>
             <c:dLbl>
-              <c:idx val="66"/>
+              <c:idx val="14"/>
               <c:tx>
                 <c:rich>
                   <a:bodyPr/>
                   <a:lstStyle/>
                   <a:p>
                     <a:r>
-                      <a:rPr sz="1000" b="1">
+                      <a:rPr sz="1100" b="1">
                         <a:solidFill>
                           <a:srgbClr val="F0F6FC"/>
                         </a:solidFill>
-                        <a:latin typeface="Arial"/>
                       </a:rPr>
-                      <a:t>+18.9%</a:t>
+                      <a:t>18.2%</a:t>
                     </a:r>
                   </a:p>
                 </c:rich>
@@ -2453,20 +1348,19 @@
               <c:showBubbleSize val="0"/>
             </c:dLbl>
             <c:dLbl>
-              <c:idx val="126"/>
+              <c:idx val="33"/>
               <c:tx>
                 <c:rich>
                   <a:bodyPr/>
                   <a:lstStyle/>
                   <a:p>
                     <a:r>
-                      <a:rPr sz="1000" b="1">
+                      <a:rPr sz="1100" b="1">
                         <a:solidFill>
                           <a:srgbClr val="F0F6FC"/>
                         </a:solidFill>
-                        <a:latin typeface="Arial"/>
                       </a:rPr>
-                      <a:t>+2.6%</a:t>
+                      <a:t>2.3%</a:t>
                     </a:r>
                   </a:p>
                 </c:rich>
@@ -2489,790 +1383,232 @@
           </c:dLbls>
           <c:cat>
             <c:strRef>
-              <c:f>Sheet1!$A$2:$A$128</c:f>
+              <c:f>Sheet1!$A$2:$A$35</c:f>
               <c:strCache>
-                <c:ptCount val="127"/>
+                <c:ptCount val="34"/>
                 <c:pt idx="0">
-                  <c:v>Jan 2016</c:v>
+                  <c:v>2018 Q1</c:v>
                 </c:pt>
                 <c:pt idx="1">
-                  <c:v>Feb 2016</c:v>
+                  <c:v>2018 Q2</c:v>
                 </c:pt>
                 <c:pt idx="2">
-                  <c:v>Mar 2016</c:v>
+                  <c:v>2018 Q3</c:v>
                 </c:pt>
                 <c:pt idx="3">
-                  <c:v>Apr 2016</c:v>
+                  <c:v>2018 Q4</c:v>
                 </c:pt>
                 <c:pt idx="4">
-                  <c:v>May 2016</c:v>
+                  <c:v>2019 Q1</c:v>
                 </c:pt>
                 <c:pt idx="5">
-                  <c:v>Jun 2016</c:v>
+                  <c:v>2019 Q2</c:v>
                 </c:pt>
                 <c:pt idx="6">
-                  <c:v>Jul 2016</c:v>
+                  <c:v>2019 Q3</c:v>
                 </c:pt>
                 <c:pt idx="7">
-                  <c:v>Aug 2016</c:v>
+                  <c:v>2019 Q4</c:v>
                 </c:pt>
                 <c:pt idx="8">
-                  <c:v>Sep 2016</c:v>
+                  <c:v>2020 Q1</c:v>
                 </c:pt>
                 <c:pt idx="9">
-                  <c:v>Oct 2016</c:v>
+                  <c:v>2020 Q2</c:v>
                 </c:pt>
                 <c:pt idx="10">
-                  <c:v>Nov 2016</c:v>
+                  <c:v>2020 Q3</c:v>
                 </c:pt>
                 <c:pt idx="11">
-                  <c:v>Dec 2016</c:v>
+                  <c:v>2020 Q4</c:v>
                 </c:pt>
                 <c:pt idx="12">
-                  <c:v>Jan 2017</c:v>
+                  <c:v>2021 Q1</c:v>
                 </c:pt>
                 <c:pt idx="13">
-                  <c:v>Feb 2017</c:v>
+                  <c:v>2021 Q2</c:v>
                 </c:pt>
                 <c:pt idx="14">
-                  <c:v>Mar 2017</c:v>
+                  <c:v>2021 Q3</c:v>
                 </c:pt>
                 <c:pt idx="15">
-                  <c:v>Apr 2017</c:v>
+                  <c:v>2021 Q4</c:v>
                 </c:pt>
                 <c:pt idx="16">
-                  <c:v>May 2017</c:v>
+                  <c:v>2022 Q1</c:v>
                 </c:pt>
                 <c:pt idx="17">
-                  <c:v>Jun 2017</c:v>
+                  <c:v>2022 Q2</c:v>
                 </c:pt>
                 <c:pt idx="18">
-                  <c:v>Jul 2017</c:v>
+                  <c:v>2022 Q3</c:v>
                 </c:pt>
                 <c:pt idx="19">
-                  <c:v>Aug 2017</c:v>
+                  <c:v>2022 Q4</c:v>
                 </c:pt>
                 <c:pt idx="20">
-                  <c:v>Sep 2017</c:v>
+                  <c:v>2023 Q1</c:v>
                 </c:pt>
                 <c:pt idx="21">
-                  <c:v>Oct 2017</c:v>
+                  <c:v>2023 Q2</c:v>
                 </c:pt>
                 <c:pt idx="22">
-                  <c:v>Nov 2017</c:v>
+                  <c:v>2023 Q3</c:v>
                 </c:pt>
                 <c:pt idx="23">
-                  <c:v>Dec 2017</c:v>
+                  <c:v>2023 Q4</c:v>
                 </c:pt>
                 <c:pt idx="24">
-                  <c:v>Jan 2018</c:v>
+                  <c:v>2024 Q1</c:v>
                 </c:pt>
                 <c:pt idx="25">
-                  <c:v>Feb 2018</c:v>
+                  <c:v>2024 Q2</c:v>
                 </c:pt>
                 <c:pt idx="26">
-                  <c:v>Mar 2018</c:v>
+                  <c:v>2024 Q3</c:v>
                 </c:pt>
                 <c:pt idx="27">
-                  <c:v>Apr 2018</c:v>
+                  <c:v>2024 Q4</c:v>
                 </c:pt>
                 <c:pt idx="28">
-                  <c:v>May 2018</c:v>
+                  <c:v>2025 Q1</c:v>
                 </c:pt>
                 <c:pt idx="29">
-                  <c:v>Jun 2018</c:v>
+                  <c:v>2025 Q2</c:v>
                 </c:pt>
                 <c:pt idx="30">
-                  <c:v>Jul 2018</c:v>
+                  <c:v>2025 Q3</c:v>
                 </c:pt>
                 <c:pt idx="31">
-                  <c:v>Aug 2018</c:v>
+                  <c:v>2025 Q4</c:v>
                 </c:pt>
                 <c:pt idx="32">
-                  <c:v>Sep 2018</c:v>
+                  <c:v>2026 Q1</c:v>
                 </c:pt>
                 <c:pt idx="33">
-                  <c:v>Oct 2018</c:v>
-                </c:pt>
-                <c:pt idx="34">
-                  <c:v>Nov 2018</c:v>
-                </c:pt>
-                <c:pt idx="35">
-                  <c:v>Dec 2018</c:v>
-                </c:pt>
-                <c:pt idx="36">
-                  <c:v>Jan 2019</c:v>
-                </c:pt>
-                <c:pt idx="37">
-                  <c:v>Feb 2019</c:v>
-                </c:pt>
-                <c:pt idx="38">
-                  <c:v>Mar 2019</c:v>
-                </c:pt>
-                <c:pt idx="39">
-                  <c:v>Apr 2019</c:v>
-                </c:pt>
-                <c:pt idx="40">
-                  <c:v>May 2019</c:v>
-                </c:pt>
-                <c:pt idx="41">
-                  <c:v>Jun 2019</c:v>
-                </c:pt>
-                <c:pt idx="42">
-                  <c:v>Jul 2019</c:v>
-                </c:pt>
-                <c:pt idx="43">
-                  <c:v>Aug 2019</c:v>
-                </c:pt>
-                <c:pt idx="44">
-                  <c:v>Sep 2019</c:v>
-                </c:pt>
-                <c:pt idx="45">
-                  <c:v>Oct 2019</c:v>
-                </c:pt>
-                <c:pt idx="46">
-                  <c:v>Nov 2019</c:v>
-                </c:pt>
-                <c:pt idx="47">
-                  <c:v>Dec 2019</c:v>
-                </c:pt>
-                <c:pt idx="48">
-                  <c:v>Jan 2020</c:v>
-                </c:pt>
-                <c:pt idx="49">
-                  <c:v>Feb 2020</c:v>
-                </c:pt>
-                <c:pt idx="50">
-                  <c:v>Mar 2020</c:v>
-                </c:pt>
-                <c:pt idx="51">
-                  <c:v>Apr 2020</c:v>
-                </c:pt>
-                <c:pt idx="52">
-                  <c:v>May 2020</c:v>
-                </c:pt>
-                <c:pt idx="53">
-                  <c:v>Jun 2020</c:v>
-                </c:pt>
-                <c:pt idx="54">
-                  <c:v>Jul 2020</c:v>
-                </c:pt>
-                <c:pt idx="55">
-                  <c:v>Aug 2020</c:v>
-                </c:pt>
-                <c:pt idx="56">
-                  <c:v>Sep 2020</c:v>
-                </c:pt>
-                <c:pt idx="57">
-                  <c:v>Oct 2020</c:v>
-                </c:pt>
-                <c:pt idx="58">
-                  <c:v>Nov 2020</c:v>
-                </c:pt>
-                <c:pt idx="59">
-                  <c:v>Dec 2020</c:v>
-                </c:pt>
-                <c:pt idx="60">
-                  <c:v>Jan 2021</c:v>
-                </c:pt>
-                <c:pt idx="61">
-                  <c:v>Feb 2021</c:v>
-                </c:pt>
-                <c:pt idx="62">
-                  <c:v>Mar 2021</c:v>
-                </c:pt>
-                <c:pt idx="63">
-                  <c:v>Apr 2021</c:v>
-                </c:pt>
-                <c:pt idx="64">
-                  <c:v>May 2021</c:v>
-                </c:pt>
-                <c:pt idx="65">
-                  <c:v>Jun 2021</c:v>
-                </c:pt>
-                <c:pt idx="66">
-                  <c:v>Jul 2021</c:v>
-                </c:pt>
-                <c:pt idx="67">
-                  <c:v>Aug 2021</c:v>
-                </c:pt>
-                <c:pt idx="68">
-                  <c:v>Sep 2021</c:v>
-                </c:pt>
-                <c:pt idx="69">
-                  <c:v>Oct 2021</c:v>
-                </c:pt>
-                <c:pt idx="70">
-                  <c:v>Nov 2021</c:v>
-                </c:pt>
-                <c:pt idx="71">
-                  <c:v>Dec 2021</c:v>
-                </c:pt>
-                <c:pt idx="72">
-                  <c:v>Jan 2022</c:v>
-                </c:pt>
-                <c:pt idx="73">
-                  <c:v>Feb 2022</c:v>
-                </c:pt>
-                <c:pt idx="74">
-                  <c:v>Mar 2022</c:v>
-                </c:pt>
-                <c:pt idx="75">
-                  <c:v>Apr 2022</c:v>
-                </c:pt>
-                <c:pt idx="76">
-                  <c:v>May 2022</c:v>
-                </c:pt>
-                <c:pt idx="77">
-                  <c:v>Jun 2022</c:v>
-                </c:pt>
-                <c:pt idx="78">
-                  <c:v>Jul 2022</c:v>
-                </c:pt>
-                <c:pt idx="79">
-                  <c:v>Aug 2022</c:v>
-                </c:pt>
-                <c:pt idx="80">
-                  <c:v>Sep 2022</c:v>
-                </c:pt>
-                <c:pt idx="81">
-                  <c:v>Oct 2022</c:v>
-                </c:pt>
-                <c:pt idx="82">
-                  <c:v>Nov 2022</c:v>
-                </c:pt>
-                <c:pt idx="83">
-                  <c:v>Dec 2022</c:v>
-                </c:pt>
-                <c:pt idx="84">
-                  <c:v>Jan 2023</c:v>
-                </c:pt>
-                <c:pt idx="85">
-                  <c:v>Feb 2023</c:v>
-                </c:pt>
-                <c:pt idx="86">
-                  <c:v>Mar 2023</c:v>
-                </c:pt>
-                <c:pt idx="87">
-                  <c:v>Apr 2023</c:v>
-                </c:pt>
-                <c:pt idx="88">
-                  <c:v>May 2023</c:v>
-                </c:pt>
-                <c:pt idx="89">
-                  <c:v>Jun 2023</c:v>
-                </c:pt>
-                <c:pt idx="90">
-                  <c:v>Jul 2023</c:v>
-                </c:pt>
-                <c:pt idx="91">
-                  <c:v>Aug 2023</c:v>
-                </c:pt>
-                <c:pt idx="92">
-                  <c:v>Sep 2023</c:v>
-                </c:pt>
-                <c:pt idx="93">
-                  <c:v>Oct 2023</c:v>
-                </c:pt>
-                <c:pt idx="94">
-                  <c:v>Nov 2023</c:v>
-                </c:pt>
-                <c:pt idx="95">
-                  <c:v>Dec 2023</c:v>
-                </c:pt>
-                <c:pt idx="96">
-                  <c:v>Jan 2024</c:v>
-                </c:pt>
-                <c:pt idx="97">
-                  <c:v>Feb 2024</c:v>
-                </c:pt>
-                <c:pt idx="98">
-                  <c:v>Mar 2024</c:v>
-                </c:pt>
-                <c:pt idx="99">
-                  <c:v>Apr 2024</c:v>
-                </c:pt>
-                <c:pt idx="100">
-                  <c:v>May 2024</c:v>
-                </c:pt>
-                <c:pt idx="101">
-                  <c:v>Jun 2024</c:v>
-                </c:pt>
-                <c:pt idx="102">
-                  <c:v>Jul 2024</c:v>
-                </c:pt>
-                <c:pt idx="103">
-                  <c:v>Aug 2024</c:v>
-                </c:pt>
-                <c:pt idx="104">
-                  <c:v>Sep 2024</c:v>
-                </c:pt>
-                <c:pt idx="105">
-                  <c:v>Oct 2024</c:v>
-                </c:pt>
-                <c:pt idx="106">
-                  <c:v>Nov 2024</c:v>
-                </c:pt>
-                <c:pt idx="107">
-                  <c:v>Dec 2024</c:v>
-                </c:pt>
-                <c:pt idx="108">
-                  <c:v>Jan 2025</c:v>
-                </c:pt>
-                <c:pt idx="109">
-                  <c:v>Feb 2025</c:v>
-                </c:pt>
-                <c:pt idx="110">
-                  <c:v>Mar 2025</c:v>
-                </c:pt>
-                <c:pt idx="111">
-                  <c:v>Apr 2025</c:v>
-                </c:pt>
-                <c:pt idx="112">
-                  <c:v>May 2025</c:v>
-                </c:pt>
-                <c:pt idx="113">
-                  <c:v>Jun 2025</c:v>
-                </c:pt>
-                <c:pt idx="114">
-                  <c:v>Jul 2025</c:v>
-                </c:pt>
-                <c:pt idx="115">
-                  <c:v>Aug 2025</c:v>
-                </c:pt>
-                <c:pt idx="116">
-                  <c:v>Sep 2025</c:v>
-                </c:pt>
-                <c:pt idx="117">
-                  <c:v>Oct 2025</c:v>
-                </c:pt>
-                <c:pt idx="118">
-                  <c:v>Nov 2025</c:v>
-                </c:pt>
-                <c:pt idx="119">
-                  <c:v>Dec 2025</c:v>
-                </c:pt>
-                <c:pt idx="120">
-                  <c:v>Jan 2026</c:v>
-                </c:pt>
-                <c:pt idx="121">
-                  <c:v>Feb 2026</c:v>
-                </c:pt>
-                <c:pt idx="122">
-                  <c:v>Mar 2026</c:v>
-                </c:pt>
-                <c:pt idx="123">
-                  <c:v>Apr 2026</c:v>
-                </c:pt>
-                <c:pt idx="124">
-                  <c:v>May 2026</c:v>
-                </c:pt>
-                <c:pt idx="125">
-                  <c:v>Jun 2026</c:v>
-                </c:pt>
-                <c:pt idx="126">
-                  <c:v>Jul 2026</c:v>
+                  <c:v>2026 Q2</c:v>
                 </c:pt>
               </c:strCache>
             </c:strRef>
           </c:cat>
           <c:val>
             <c:numRef>
-              <c:f>Sheet1!$B$2:$B$128</c:f>
+              <c:f>Sheet1!$B$2:$B$35</c:f>
               <c:numCache>
                 <c:formatCode>General</c:formatCode>
-                <c:ptCount val="127"/>
+                <c:ptCount val="34"/>
                 <c:pt idx="0">
-                  <c:v>0.057104</c:v>
+                  <c:v>6.9</c:v>
                 </c:pt>
                 <c:pt idx="1">
-                  <c:v>0.05083</c:v>
+                  <c:v>6.2</c:v>
                 </c:pt>
                 <c:pt idx="2">
-                  <c:v>0.054985</c:v>
+                  <c:v>5.9</c:v>
                 </c:pt>
                 <c:pt idx="3">
-                  <c:v>0.05555</c:v>
+                  <c:v>5.5</c:v>
                 </c:pt>
                 <c:pt idx="4">
-                  <c:v>0.054017</c:v>
+                  <c:v>4.9</c:v>
                 </c:pt>
                 <c:pt idx="5">
-                  <c:v>0.054087</c:v>
+                  <c:v>4.9</c:v>
                 </c:pt>
                 <c:pt idx="6">
-                  <c:v>0.054901</c:v>
+                  <c:v>4.9</c:v>
                 </c:pt>
                 <c:pt idx="7">
-                  <c:v>0.05789</c:v>
+                  <c:v>5.5</c:v>
                 </c:pt>
                 <c:pt idx="8">
-                  <c:v>0.058807</c:v>
+                  <c:v>6.2</c:v>
                 </c:pt>
                 <c:pt idx="9">
-                  <c:v>0.058671</c:v>
+                  <c:v>5.6</c:v>
                 </c:pt>
                 <c:pt idx="10">
-                  <c:v>0.058147</c:v>
+                  <c:v>8.2</c:v>
                 </c:pt>
                 <c:pt idx="11">
-                  <c:v>0.060058</c:v>
+                  <c:v>11.1</c:v>
                 </c:pt>
                 <c:pt idx="12">
-                  <c:v>0.056889</c:v>
+                  <c:v>13.0</c:v>
                 </c:pt>
                 <c:pt idx="13">
-                  <c:v>0.063088</c:v>
+                  <c:v>17.5</c:v>
                 </c:pt>
                 <c:pt idx="14">
-                  <c:v>0.061275</c:v>
+                  <c:v>18.2</c:v>
                 </c:pt>
                 <c:pt idx="15">
-                  <c:v>0.063179</c:v>
+                  <c:v>17.3</c:v>
                 </c:pt>
                 <c:pt idx="16">
-                  <c:v>0.06271</c:v>
+                  <c:v>18.1</c:v>
                 </c:pt>
                 <c:pt idx="17">
-                  <c:v>0.059943</c:v>
+                  <c:v>16.8</c:v>
                 </c:pt>
                 <c:pt idx="18">
-                  <c:v>0.059779</c:v>
+                  <c:v>11.4</c:v>
                 </c:pt>
                 <c:pt idx="19">
-                  <c:v>0.06246</c:v>
+                  <c:v>7.5</c:v>
                 </c:pt>
                 <c:pt idx="20">
-                  <c:v>0.061689</c:v>
+                  <c:v>4.1</c:v>
                 </c:pt>
                 <c:pt idx="21">
-                  <c:v>0.060751</c:v>
+                  <c:v>2.8</c:v>
                 </c:pt>
                 <c:pt idx="22">
-                  <c:v>0.063416</c:v>
+                  <c:v>5.1</c:v>
                 </c:pt>
                 <c:pt idx="23">
-                  <c:v>0.061853</c:v>
+                  <c:v>6.3</c:v>
                 </c:pt>
                 <c:pt idx="24">
-                  <c:v>0.069083</c:v>
+                  <c:v>6.6</c:v>
                 </c:pt>
                 <c:pt idx="25">
-                  <c:v>0.071307</c:v>
+                  <c:v>5.8</c:v>
                 </c:pt>
                 <c:pt idx="26">
-                  <c:v>0.067963</c:v>
+                  <c:v>4.5</c:v>
                 </c:pt>
                 <c:pt idx="27">
-                  <c:v>0.063079</c:v>
+                  <c:v>4.7</c:v>
                 </c:pt>
                 <c:pt idx="28">
-                  <c:v>0.061798</c:v>
+                  <c:v>4.5</c:v>
                 </c:pt>
                 <c:pt idx="29">
-                  <c:v>0.061398</c:v>
+                  <c:v>3.1</c:v>
                 </c:pt>
                 <c:pt idx="30">
-                  <c:v>0.06026</c:v>
+                  <c:v>2.4</c:v>
                 </c:pt>
                 <c:pt idx="31">
-                  <c:v>0.059031</c:v>
+                  <c:v>2.1</c:v>
                 </c:pt>
                 <c:pt idx="32">
-                  <c:v>0.056647</c:v>
+                  <c:v>2.0</c:v>
                 </c:pt>
                 <c:pt idx="33">
-                  <c:v>0.056137</c:v>
-                </c:pt>
-                <c:pt idx="34">
-                  <c:v>0.054543</c:v>
-                </c:pt>
-                <c:pt idx="35">
-                  <c:v>0.05287</c:v>
-                </c:pt>
-                <c:pt idx="36">
-                  <c:v>0.051719</c:v>
-                </c:pt>
-                <c:pt idx="37">
-                  <c:v>0.048056</c:v>
-                </c:pt>
-                <c:pt idx="38">
-                  <c:v>0.047876</c:v>
-                </c:pt>
-                <c:pt idx="39">
-                  <c:v>0.050273</c:v>
-                </c:pt>
-                <c:pt idx="40">
-                  <c:v>0.04928</c:v>
-                </c:pt>
-                <c:pt idx="41">
-                  <c:v>0.048257</c:v>
-                </c:pt>
-                <c:pt idx="42">
-                  <c:v>0.047885</c:v>
-                </c:pt>
-                <c:pt idx="43">
-                  <c:v>0.046877</c:v>
-                </c:pt>
-                <c:pt idx="44">
-                  <c:v>0.051349</c:v>
-                </c:pt>
-                <c:pt idx="45">
-                  <c:v>0.053728</c:v>
-                </c:pt>
-                <c:pt idx="46">
-                  <c:v>0.05314</c:v>
-                </c:pt>
-                <c:pt idx="47">
-                  <c:v>0.058399</c:v>
-                </c:pt>
-                <c:pt idx="48">
-                  <c:v>0.059256</c:v>
-                </c:pt>
-                <c:pt idx="49">
-                  <c:v>0.064992</c:v>
-                </c:pt>
-                <c:pt idx="50">
-                  <c:v>0.062723</c:v>
-                </c:pt>
-                <c:pt idx="51">
-                  <c:v>0.05988</c:v>
-                </c:pt>
-                <c:pt idx="52">
-                  <c:v>0.051088</c:v>
-                </c:pt>
-                <c:pt idx="53">
-                  <c:v>0.058257</c:v>
-                </c:pt>
-                <c:pt idx="54">
-                  <c:v>0.06891</c:v>
-                </c:pt>
-                <c:pt idx="55">
-                  <c:v>0.082585</c:v>
-                </c:pt>
-                <c:pt idx="56">
-                  <c:v>0.094183</c:v>
-                </c:pt>
-                <c:pt idx="57">
-                  <c:v>0.10511</c:v>
-                </c:pt>
-                <c:pt idx="58">
-                  <c:v>0.111321</c:v>
-                </c:pt>
-                <c:pt idx="59">
-                  <c:v>0.116379</c:v>
-                </c:pt>
-                <c:pt idx="60">
-                  <c:v>0.123317</c:v>
-                </c:pt>
-                <c:pt idx="61">
-                  <c:v>0.125911</c:v>
-                </c:pt>
-                <c:pt idx="62">
-                  <c:v>0.140724</c:v>
-                </c:pt>
-                <c:pt idx="63">
-                  <c:v>0.157069</c:v>
-                </c:pt>
-                <c:pt idx="64">
-                  <c:v>0.180411</c:v>
-                </c:pt>
-                <c:pt idx="65">
-                  <c:v>0.188457</c:v>
-                </c:pt>
-                <c:pt idx="66">
-                  <c:v>0.188588</c:v>
-                </c:pt>
-                <c:pt idx="67">
-                  <c:v>0.18119</c:v>
-                </c:pt>
-                <c:pt idx="68">
-                  <c:v>0.174917</c:v>
-                </c:pt>
-                <c:pt idx="69">
-                  <c:v>0.171736</c:v>
-                </c:pt>
-                <c:pt idx="70">
-                  <c:v>0.173268</c:v>
-                </c:pt>
-                <c:pt idx="71">
-                  <c:v>0.173994</c:v>
-                </c:pt>
-                <c:pt idx="72">
-                  <c:v>0.177458</c:v>
-                </c:pt>
-                <c:pt idx="73">
-                  <c:v>0.184565</c:v>
-                </c:pt>
-                <c:pt idx="74">
-                  <c:v>0.181897</c:v>
-                </c:pt>
-                <c:pt idx="75">
-                  <c:v>0.179935</c:v>
-                </c:pt>
-                <c:pt idx="76">
-                  <c:v>0.171319</c:v>
-                </c:pt>
-                <c:pt idx="77">
-                  <c:v>0.152638</c:v>
-                </c:pt>
-                <c:pt idx="78">
-                  <c:v>0.129679</c:v>
-                </c:pt>
-                <c:pt idx="79">
-                  <c:v>0.111416</c:v>
-                </c:pt>
-                <c:pt idx="80">
-                  <c:v>0.102549</c:v>
-                </c:pt>
-                <c:pt idx="81">
-                  <c:v>0.090257</c:v>
-                </c:pt>
-                <c:pt idx="82">
-                  <c:v>0.075082</c:v>
-                </c:pt>
-                <c:pt idx="83">
-                  <c:v>0.06074</c:v>
-                </c:pt>
-                <c:pt idx="84">
-                  <c:v>0.048532</c:v>
-                </c:pt>
-                <c:pt idx="85">
-                  <c:v>0.041176</c:v>
-                </c:pt>
-                <c:pt idx="86">
-                  <c:v>0.033856</c:v>
-                </c:pt>
-                <c:pt idx="87">
-                  <c:v>0.028016</c:v>
-                </c:pt>
-                <c:pt idx="88">
-                  <c:v>0.026289</c:v>
-                </c:pt>
-                <c:pt idx="89">
-                  <c:v>0.029938</c:v>
-                </c:pt>
-                <c:pt idx="90">
-                  <c:v>0.042952</c:v>
-                </c:pt>
-                <c:pt idx="91">
-                  <c:v>0.053487</c:v>
-                </c:pt>
-                <c:pt idx="92">
-                  <c:v>0.057164</c:v>
-                </c:pt>
-                <c:pt idx="93">
-                  <c:v>0.059696</c:v>
-                </c:pt>
-                <c:pt idx="94">
-                  <c:v>0.062727</c:v>
-                </c:pt>
-                <c:pt idx="95">
-                  <c:v>0.065356</c:v>
-                </c:pt>
-                <c:pt idx="96">
-                  <c:v>0.063454</c:v>
-                </c:pt>
-                <c:pt idx="97">
-                  <c:v>0.068571</c:v>
-                </c:pt>
-                <c:pt idx="98">
-                  <c:v>0.065039</c:v>
-                </c:pt>
-                <c:pt idx="99">
-                  <c:v>0.063481</c:v>
-                </c:pt>
-                <c:pt idx="100">
-                  <c:v>0.057228</c:v>
-                </c:pt>
-                <c:pt idx="101">
-                  <c:v>0.052719</c:v>
-                </c:pt>
-                <c:pt idx="102">
-                  <c:v>0.046596</c:v>
-                </c:pt>
-                <c:pt idx="103">
-                  <c:v>0.04402</c:v>
-                </c:pt>
-                <c:pt idx="104">
-                  <c:v>0.045024</c:v>
-                </c:pt>
-                <c:pt idx="105">
-                  <c:v>0.045622</c:v>
-                </c:pt>
-                <c:pt idx="106">
-                  <c:v>0.04701</c:v>
-                </c:pt>
-                <c:pt idx="107">
-                  <c:v>0.049116</c:v>
-                </c:pt>
-                <c:pt idx="108">
-                  <c:v>0.051743</c:v>
-                </c:pt>
-                <c:pt idx="109">
-                  <c:v>0.041464</c:v>
-                </c:pt>
-                <c:pt idx="110">
-                  <c:v>0.040568</c:v>
-                </c:pt>
-                <c:pt idx="111">
-                  <c:v>0.032303</c:v>
-                </c:pt>
-                <c:pt idx="112">
-                  <c:v>0.031465</c:v>
-                </c:pt>
-                <c:pt idx="113">
-                  <c:v>0.028823</c:v>
-                </c:pt>
-                <c:pt idx="114">
-                  <c:v>0.02586</c:v>
-                </c:pt>
-                <c:pt idx="115">
-                  <c:v>0.026872</c:v>
-                </c:pt>
-                <c:pt idx="116">
-                  <c:v>0.020041</c:v>
-                </c:pt>
-                <c:pt idx="117">
-                  <c:v>0.01986</c:v>
-                </c:pt>
-                <c:pt idx="118">
-                  <c:v>0.022881</c:v>
-                </c:pt>
-                <c:pt idx="119">
-                  <c:v>0.021469</c:v>
-                </c:pt>
-                <c:pt idx="120">
-                  <c:v>0.019945</c:v>
-                </c:pt>
-                <c:pt idx="121">
-                  <c:v>0.019652</c:v>
-                </c:pt>
-                <c:pt idx="122">
-                  <c:v>0.020295</c:v>
-                </c:pt>
-                <c:pt idx="123">
-                  <c:v>0.020702</c:v>
-                </c:pt>
-                <c:pt idx="124">
-                  <c:v>0.023829</c:v>
-                </c:pt>
-                <c:pt idx="125">
-                  <c:v>0.023308</c:v>
-                </c:pt>
-                <c:pt idx="126">
-                  <c:v>0.025594</c:v>
+                  <c:v>2.3</c:v>
                 </c:pt>
               </c:numCache>
             </c:numRef>
           </c:val>
         </c:ser>
         <c:gapWidth val="40"/>
-        <c:axId val="-2068027336"/>
-        <c:axId val="-2113994440"/>
+        <c:axId val="2068027336"/>
+        <c:axId val="2113994440"/>
       </c:barChart>
       <c:catAx>
-        <c:axId val="-2068027336"/>
+        <c:axId val="2068027336"/>
         <c:scaling>
           <c:orientation val="minMax"/>
         </c:scaling>
@@ -3291,7 +1627,7 @@
                     </a:solidFill>
                     <a:latin typeface="Arial"/>
                   </a:rPr>
-                  <a:t>Month</a:t>
+                  <a:t>Quarter</a:t>
                 </a:r>
               </a:p>
             </c:rich>
@@ -3299,9 +1635,9 @@
           <c:layout/>
           <c:overlay val="0"/>
         </c:title>
-        <c:majorTickMark val="none"/>
+        <c:majorTickMark val="out"/>
         <c:minorTickMark val="none"/>
-        <c:tickLblPos val="low"/>
+        <c:tickLblPos val="nextTo"/>
         <c:spPr>
           <a:ln>
             <a:solidFill>
@@ -3322,19 +1658,19 @@
             </a:pPr>
           </a:p>
         </c:txPr>
-        <c:crossAx val="-2113994440"/>
+        <c:crossAx val="2113994440"/>
         <c:crosses val="autoZero"/>
         <c:auto val="1"/>
         <c:lblAlgn val="ctr"/>
         <c:lblOffset val="100"/>
-        <c:tickLblSkip val="12"/>
-        <c:tickMarkSkip val="12"/>
+        <c:tickLblSkip val="4"/>
+        <c:tickMarkSkip val="4"/>
         <c:noMultiLvlLbl val="0"/>
       </c:catAx>
       <c:valAx>
-        <c:axId val="-2113994440"/>
+        <c:axId val="2113994440"/>
         <c:scaling>
-          <c:max val="0.24"/>
+          <c:max val="22.0"/>
           <c:min val="0.0"/>
         </c:scaling>
         <c:delete val="0"/>
@@ -3361,7 +1697,7 @@
                     </a:solidFill>
                     <a:latin typeface="Arial"/>
                   </a:rPr>
-                  <a:t>Year-over-year change</a:t>
+                  <a:t>Change (%)</a:t>
                 </a:r>
               </a:p>
             </c:rich>
@@ -3369,13 +1705,15 @@
           <c:layout/>
           <c:overlay val="0"/>
         </c:title>
-        <c:numFmt formatCode="0%" sourceLinked="0"/>
-        <c:majorTickMark val="none"/>
+        <c:numFmt formatCode="0&quot;%&quot;" sourceLinked="0"/>
+        <c:majorTickMark val="out"/>
         <c:minorTickMark val="none"/>
         <c:tickLblPos val="nextTo"/>
         <c:spPr>
           <a:ln>
-            <a:noFill/>
+            <a:solidFill>
+              <a:srgbClr val="30363D"/>
+            </a:solidFill>
           </a:ln>
         </c:spPr>
         <c:txPr>
@@ -3391,9 +1729,8 @@
             </a:pPr>
           </a:p>
         </c:txPr>
-        <c:crossAx val="-2068027336"/>
+        <c:crossAx val="2068027336"/>
         <c:crosses val="autoZero"/>
-        <c:majorUnit val="0.04"/>
       </c:valAx>
       <c:spPr>
         <a:noFill/>
@@ -3415,7 +1752,7 @@
     <a:lstStyle/>
     <a:p>
       <a:pPr>
-        <a:defRPr sz="1000">
+        <a:defRPr sz="1100">
           <a:solidFill>
             <a:srgbClr val="B1BAC4"/>
           </a:solidFill>
@@ -3435,28 +1772,7 @@
 <c:chartSpace xmlns:c="http://schemas.openxmlformats.org/drawingml/2006/chart" xmlns:a="http://schemas.openxmlformats.org/drawingml/2006/main" xmlns:r="http://schemas.openxmlformats.org/officeDocument/2006/relationships">
   <c:date1904 val="0"/>
   <c:chart>
-    <c:title>
-      <c:tx>
-        <c:rich>
-          <a:bodyPr/>
-          <a:lstStyle/>
-          <a:p>
-            <a:r>
-              <a:rPr sz="1200" b="1">
-                <a:solidFill>
-                  <a:srgbClr val="F0F6FC"/>
-                </a:solidFill>
-                <a:latin typeface="Arial"/>
-              </a:rPr>
-              <a:t>States: 5 fastest and 5 slowest annual price change, Q2 2026</a:t>
-            </a:r>
-          </a:p>
-        </c:rich>
-      </c:tx>
-      <c:layout/>
-      <c:overlay val="0"/>
-    </c:title>
-    <c:autoTitleDeleted val="0"/>
+    <c:autoTitleDeleted val="1"/>
     <c:plotArea>
       <c:barChart>
         <c:barDir val="bar"/>
@@ -3470,7 +1786,7 @@
               <c:strCache>
                 <c:ptCount val="1"/>
                 <c:pt idx="0">
-                  <c:v>5 fastest</c:v>
+                  <c:v>Year-over-year change (%)</c:v>
                 </c:pt>
               </c:strCache>
             </c:strRef>
@@ -3479,8 +1795,47 @@
             <a:solidFill>
               <a:srgbClr val="58A6FF"/>
             </a:solidFill>
+            <a:ln>
+              <a:noFill/>
+            </a:ln>
           </c:spPr>
           <c:invertIfNegative val="0"/>
+          <c:dPt>
+            <c:idx val="0"/>
+            <c:invertIfNegative val="0"/>
+            <c:spPr>
+              <a:solidFill>
+                <a:srgbClr val="F0883E"/>
+              </a:solidFill>
+            </c:spPr>
+          </c:dPt>
+          <c:dPt>
+            <c:idx val="1"/>
+            <c:invertIfNegative val="0"/>
+            <c:spPr>
+              <a:solidFill>
+                <a:srgbClr val="F0883E"/>
+              </a:solidFill>
+            </c:spPr>
+          </c:dPt>
+          <c:dPt>
+            <c:idx val="2"/>
+            <c:invertIfNegative val="0"/>
+            <c:spPr>
+              <a:solidFill>
+                <a:srgbClr val="F0883E"/>
+              </a:solidFill>
+            </c:spPr>
+          </c:dPt>
+          <c:dPt>
+            <c:idx val="3"/>
+            <c:invertIfNegative val="0"/>
+            <c:spPr>
+              <a:solidFill>
+                <a:srgbClr val="F0883E"/>
+              </a:solidFill>
+            </c:spPr>
+          </c:dPt>
           <c:cat>
             <c:strRef>
               <c:f>Sheet1!$A$2:$A$11</c:f>
@@ -3525,110 +1880,42 @@
               <c:numCache>
                 <c:formatCode>General</c:formatCode>
                 <c:ptCount val="10"/>
+                <c:pt idx="0">
+                  <c:v>-1.2</c:v>
+                </c:pt>
+                <c:pt idx="1">
+                  <c:v>-1.0</c:v>
+                </c:pt>
+                <c:pt idx="2">
+                  <c:v>-0.6</c:v>
+                </c:pt>
+                <c:pt idx="3">
+                  <c:v>-0.3</c:v>
+                </c:pt>
+                <c:pt idx="4">
+                  <c:v>0.2</c:v>
+                </c:pt>
                 <c:pt idx="5">
-                  <c:v>0.055425</c:v>
+                  <c:v>5.5</c:v>
                 </c:pt>
                 <c:pt idx="6">
-                  <c:v>0.056915</c:v>
+                  <c:v>5.7</c:v>
                 </c:pt>
                 <c:pt idx="7">
-                  <c:v>0.05935</c:v>
+                  <c:v>5.9</c:v>
                 </c:pt>
                 <c:pt idx="8">
-                  <c:v>0.071611</c:v>
+                  <c:v>7.2</c:v>
                 </c:pt>
                 <c:pt idx="9">
-                  <c:v>0.08276</c:v>
-                </c:pt>
-              </c:numCache>
-            </c:numRef>
-          </c:val>
-        </c:ser>
-        <c:ser>
-          <c:idx val="1"/>
-          <c:order val="1"/>
-          <c:tx>
-            <c:strRef>
-              <c:f>Sheet1!$C$1</c:f>
-              <c:strCache>
-                <c:ptCount val="1"/>
-                <c:pt idx="0">
-                  <c:v>5 slowest</c:v>
-                </c:pt>
-              </c:strCache>
-            </c:strRef>
-          </c:tx>
-          <c:spPr>
-            <a:solidFill>
-              <a:srgbClr val="D29922"/>
-            </a:solidFill>
-          </c:spPr>
-          <c:invertIfNegative val="0"/>
-          <c:cat>
-            <c:strRef>
-              <c:f>Sheet1!$A$2:$A$11</c:f>
-              <c:strCache>
-                <c:ptCount val="10"/>
-                <c:pt idx="0">
-                  <c:v>New Mexico</c:v>
-                </c:pt>
-                <c:pt idx="1">
-                  <c:v>Washington</c:v>
-                </c:pt>
-                <c:pt idx="2">
-                  <c:v>Colorado</c:v>
-                </c:pt>
-                <c:pt idx="3">
-                  <c:v>California</c:v>
-                </c:pt>
-                <c:pt idx="4">
-                  <c:v>Oregon</c:v>
-                </c:pt>
-                <c:pt idx="5">
-                  <c:v>Illinois</c:v>
-                </c:pt>
-                <c:pt idx="6">
-                  <c:v>West Virginia</c:v>
-                </c:pt>
-                <c:pt idx="7">
-                  <c:v>Hawaii</c:v>
-                </c:pt>
-                <c:pt idx="8">
-                  <c:v>Vermont</c:v>
-                </c:pt>
-                <c:pt idx="9">
-                  <c:v>Alaska</c:v>
-                </c:pt>
-              </c:strCache>
-            </c:strRef>
-          </c:cat>
-          <c:val>
-            <c:numRef>
-              <c:f>Sheet1!$C$2:$C$11</c:f>
-              <c:numCache>
-                <c:formatCode>General</c:formatCode>
-                <c:ptCount val="10"/>
-                <c:pt idx="0">
-                  <c:v>-0.011704</c:v>
-                </c:pt>
-                <c:pt idx="1">
-                  <c:v>-0.009998</c:v>
-                </c:pt>
-                <c:pt idx="2">
-                  <c:v>-0.006073</c:v>
-                </c:pt>
-                <c:pt idx="3">
-                  <c:v>-0.002896</c:v>
-                </c:pt>
-                <c:pt idx="4">
-                  <c:v>0.002396</c:v>
+                  <c:v>8.3</c:v>
                 </c:pt>
               </c:numCache>
             </c:numRef>
           </c:val>
         </c:ser>
         <c:dLbls>
-          <c:numFmt formatCode="+0.0%;-0.0%;0.0%" sourceLinked="0"/>
+          <c:numFmt formatCode="+0.0&quot;%&quot;;-0.0&quot;%&quot;" sourceLinked="0"/>
           <c:txPr>
             <a:bodyPr/>
             <a:lstStyle/>
@@ -3636,7 +1923,7 @@
               <a:pPr>
                 <a:defRPr sz="900">
                   <a:solidFill>
-                    <a:srgbClr val="B1BAC4"/>
+                    <a:srgbClr val="F0F6FC"/>
                   </a:solidFill>
                 </a:defRPr>
               </a:pPr>
@@ -3651,40 +1938,18 @@
           <c:showBubbleSize val="0"/>
           <c:showLeaderLines val="1"/>
         </c:dLbls>
-        <c:gapWidth val="40"/>
-        <c:overlap val="100"/>
-        <c:axId val="-2068027336"/>
-        <c:axId val="-2113994440"/>
+        <c:gapWidth val="35"/>
+        <c:axId val="2068027336"/>
+        <c:axId val="2113994440"/>
       </c:barChart>
       <c:catAx>
-        <c:axId val="-2068027336"/>
+        <c:axId val="2068027336"/>
         <c:scaling>
           <c:orientation val="minMax"/>
         </c:scaling>
         <c:delete val="0"/>
         <c:axPos val="l"/>
-        <c:title>
-          <c:tx>
-            <c:rich>
-              <a:bodyPr/>
-              <a:lstStyle/>
-              <a:p>
-                <a:r>
-                  <a:rPr sz="1000" b="0">
-                    <a:solidFill>
-                      <a:srgbClr val="8B949E"/>
-                    </a:solidFill>
-                    <a:latin typeface="Arial"/>
-                  </a:rPr>
-                  <a:t>State</a:t>
-                </a:r>
-              </a:p>
-            </c:rich>
-          </c:tx>
-          <c:layout/>
-          <c:overlay val="0"/>
-        </c:title>
-        <c:majorTickMark val="none"/>
+        <c:majorTickMark val="out"/>
         <c:minorTickMark val="none"/>
         <c:tickLblPos val="low"/>
         <c:spPr>
@@ -3699,7 +1964,7 @@
           <a:lstStyle/>
           <a:p>
             <a:pPr>
-              <a:defRPr sz="1000">
+              <a:defRPr sz="900">
                 <a:solidFill>
                   <a:srgbClr val="B1BAC4"/>
                 </a:solidFill>
@@ -3707,16 +1972,21 @@
             </a:pPr>
           </a:p>
         </c:txPr>
-        <c:crossAx val="-2113994440"/>
+        <c:crossAx val="2113994440"/>
         <c:crosses val="autoZero"/>
         <c:auto val="1"/>
         <c:lblAlgn val="ctr"/>
         <c:lblOffset val="100"/>
+        <c:tickLblSkip val="1"/>
+        <c:tickMarkSkip val="1"/>
         <c:noMultiLvlLbl val="0"/>
       </c:catAx>
       <c:valAx>
-        <c:axId val="-2113994440"/>
-        <c:scaling/>
+        <c:axId val="2113994440"/>
+        <c:scaling>
+          <c:max val="12.0"/>
+          <c:min val="-4.0"/>
+        </c:scaling>
         <c:delete val="0"/>
         <c:axPos val="b"/>
         <c:majorGridlines>
@@ -3741,7 +2011,7 @@
                     </a:solidFill>
                     <a:latin typeface="Arial"/>
                   </a:rPr>
-                  <a:t>Year-over-year change</a:t>
+                  <a:t>Change from 2025 Q2 to 2026 Q2 (%)</a:t>
                 </a:r>
               </a:p>
             </c:rich>
@@ -3749,13 +2019,15 @@
           <c:layout/>
           <c:overlay val="0"/>
         </c:title>
-        <c:numFmt formatCode="0%" sourceLinked="0"/>
-        <c:majorTickMark val="none"/>
+        <c:numFmt formatCode="0&quot;%&quot;" sourceLinked="0"/>
+        <c:majorTickMark val="out"/>
         <c:minorTickMark val="none"/>
         <c:tickLblPos val="nextTo"/>
         <c:spPr>
           <a:ln>
-            <a:noFill/>
+            <a:solidFill>
+              <a:srgbClr val="30363D"/>
+            </a:solidFill>
           </a:ln>
         </c:spPr>
         <c:txPr>
@@ -3771,8 +2043,9 @@
             </a:pPr>
           </a:p>
         </c:txPr>
-        <c:crossAx val="-2068027336"/>
+        <c:crossAx val="2068027336"/>
         <c:crosses val="autoZero"/>
+        <c:majorUnit val="2.0"/>
       </c:valAx>
       <c:spPr>
         <a:noFill/>
@@ -3781,23 +2054,6 @@
         </a:ln>
       </c:spPr>
     </c:plotArea>
-    <c:legend>
-      <c:legendPos val="t"/>
-      <c:overlay val="0"/>
-      <c:txPr>
-        <a:bodyPr/>
-        <a:lstStyle/>
-        <a:p>
-          <a:pPr>
-            <a:defRPr sz="1000">
-              <a:solidFill>
-                <a:srgbClr val="B1BAC4"/>
-              </a:solidFill>
-            </a:defRPr>
-          </a:pPr>
-        </a:p>
-      </c:txPr>
-    </c:legend>
     <c:dispBlanksAs val="gap"/>
   </c:chart>
   <c:spPr>
@@ -3811,7 +2067,7 @@
     <a:lstStyle/>
     <a:p>
       <a:pPr>
-        <a:defRPr sz="1000">
+        <a:defRPr sz="1100">
           <a:solidFill>
             <a:srgbClr val="B1BAC4"/>
           </a:solidFill>
@@ -3831,28 +2087,7 @@
 <c:chartSpace xmlns:c="http://schemas.openxmlformats.org/drawingml/2006/chart" xmlns:a="http://schemas.openxmlformats.org/drawingml/2006/main" xmlns:r="http://schemas.openxmlformats.org/officeDocument/2006/relationships">
   <c:date1904 val="0"/>
   <c:chart>
-    <c:title>
-      <c:tx>
-        <c:rich>
-          <a:bodyPr/>
-          <a:lstStyle/>
-          <a:p>
-            <a:r>
-              <a:rPr sz="1200" b="1">
-                <a:solidFill>
-                  <a:srgbClr val="F0F6FC"/>
-                </a:solidFill>
-                <a:latin typeface="Arial"/>
-              </a:rPr>
-              <a:t>Metros: 5 fastest and 5 slowest annual price change, Q2 2026</a:t>
-            </a:r>
-          </a:p>
-        </c:rich>
-      </c:tx>
-      <c:layout/>
-      <c:overlay val="0"/>
-    </c:title>
-    <c:autoTitleDeleted val="0"/>
+    <c:autoTitleDeleted val="1"/>
     <c:plotArea>
       <c:barChart>
         <c:barDir val="bar"/>
@@ -3866,7 +2101,7 @@
               <c:strCache>
                 <c:ptCount val="1"/>
                 <c:pt idx="0">
-                  <c:v>5 fastest</c:v>
+                  <c:v>Year-over-year change (%)</c:v>
                 </c:pt>
               </c:strCache>
             </c:strRef>
@@ -3875,8 +2110,56 @@
             <a:solidFill>
               <a:srgbClr val="58A6FF"/>
             </a:solidFill>
+            <a:ln>
+              <a:noFill/>
+            </a:ln>
           </c:spPr>
           <c:invertIfNegative val="0"/>
+          <c:dPt>
+            <c:idx val="0"/>
+            <c:invertIfNegative val="0"/>
+            <c:spPr>
+              <a:solidFill>
+                <a:srgbClr val="F0883E"/>
+              </a:solidFill>
+            </c:spPr>
+          </c:dPt>
+          <c:dPt>
+            <c:idx val="1"/>
+            <c:invertIfNegative val="0"/>
+            <c:spPr>
+              <a:solidFill>
+                <a:srgbClr val="F0883E"/>
+              </a:solidFill>
+            </c:spPr>
+          </c:dPt>
+          <c:dPt>
+            <c:idx val="2"/>
+            <c:invertIfNegative val="0"/>
+            <c:spPr>
+              <a:solidFill>
+                <a:srgbClr val="F0883E"/>
+              </a:solidFill>
+            </c:spPr>
+          </c:dPt>
+          <c:dPt>
+            <c:idx val="3"/>
+            <c:invertIfNegative val="0"/>
+            <c:spPr>
+              <a:solidFill>
+                <a:srgbClr val="F0883E"/>
+              </a:solidFill>
+            </c:spPr>
+          </c:dPt>
+          <c:dPt>
+            <c:idx val="4"/>
+            <c:invertIfNegative val="0"/>
+            <c:spPr>
+              <a:solidFill>
+                <a:srgbClr val="F0883E"/>
+              </a:solidFill>
+            </c:spPr>
+          </c:dPt>
           <c:cat>
             <c:strRef>
               <c:f>Sheet1!$A$2:$A$11</c:f>
@@ -3921,110 +2204,42 @@
               <c:numCache>
                 <c:formatCode>General</c:formatCode>
                 <c:ptCount val="10"/>
+                <c:pt idx="0">
+                  <c:v>-3.9</c:v>
+                </c:pt>
+                <c:pt idx="1">
+                  <c:v>-3.0</c:v>
+                </c:pt>
+                <c:pt idx="2">
+                  <c:v>-2.5</c:v>
+                </c:pt>
+                <c:pt idx="3">
+                  <c:v>-2.5</c:v>
+                </c:pt>
+                <c:pt idx="4">
+                  <c:v>-2.4</c:v>
+                </c:pt>
                 <c:pt idx="5">
-                  <c:v>0.062255</c:v>
+                  <c:v>6.2</c:v>
                 </c:pt>
                 <c:pt idx="6">
-                  <c:v>0.063554</c:v>
+                  <c:v>6.4</c:v>
                 </c:pt>
                 <c:pt idx="7">
-                  <c:v>0.065008</c:v>
+                  <c:v>6.5</c:v>
                 </c:pt>
                 <c:pt idx="8">
-                  <c:v>0.069307</c:v>
+                  <c:v>6.9</c:v>
                 </c:pt>
                 <c:pt idx="9">
-                  <c:v>0.075467</c:v>
-                </c:pt>
-              </c:numCache>
-            </c:numRef>
-          </c:val>
-        </c:ser>
-        <c:ser>
-          <c:idx val="1"/>
-          <c:order val="1"/>
-          <c:tx>
-            <c:strRef>
-              <c:f>Sheet1!$C$1</c:f>
-              <c:strCache>
-                <c:ptCount val="1"/>
-                <c:pt idx="0">
-                  <c:v>5 slowest</c:v>
-                </c:pt>
-              </c:strCache>
-            </c:strRef>
-          </c:tx>
-          <c:spPr>
-            <a:solidFill>
-              <a:srgbClr val="D29922"/>
-            </a:solidFill>
-          </c:spPr>
-          <c:invertIfNegative val="0"/>
-          <c:cat>
-            <c:strRef>
-              <c:f>Sheet1!$A$2:$A$11</c:f>
-              <c:strCache>
-                <c:ptCount val="10"/>
-                <c:pt idx="0">
-                  <c:v>Everett, WA</c:v>
-                </c:pt>
-                <c:pt idx="1">
-                  <c:v>San Antonio, TX</c:v>
-                </c:pt>
-                <c:pt idx="2">
-                  <c:v>Bakersfield, CA</c:v>
-                </c:pt>
-                <c:pt idx="3">
-                  <c:v>Seattle, WA</c:v>
-                </c:pt>
-                <c:pt idx="4">
-                  <c:v>Tucson, AZ</c:v>
-                </c:pt>
-                <c:pt idx="5">
-                  <c:v>El Paso, TX</c:v>
-                </c:pt>
-                <c:pt idx="6">
-                  <c:v>Charleston, SC</c:v>
-                </c:pt>
-                <c:pt idx="7">
-                  <c:v>Bridgeport, CT</c:v>
-                </c:pt>
-                <c:pt idx="8">
-                  <c:v>Allentown, PA</c:v>
-                </c:pt>
-                <c:pt idx="9">
-                  <c:v>Elgin, IL</c:v>
-                </c:pt>
-              </c:strCache>
-            </c:strRef>
-          </c:cat>
-          <c:val>
-            <c:numRef>
-              <c:f>Sheet1!$C$2:$C$11</c:f>
-              <c:numCache>
-                <c:formatCode>General</c:formatCode>
-                <c:ptCount val="10"/>
-                <c:pt idx="0">
-                  <c:v>-0.03878</c:v>
-                </c:pt>
-                <c:pt idx="1">
-                  <c:v>-0.029601</c:v>
-                </c:pt>
-                <c:pt idx="2">
-                  <c:v>-0.025402</c:v>
-                </c:pt>
-                <c:pt idx="3">
-                  <c:v>-0.025222</c:v>
-                </c:pt>
-                <c:pt idx="4">
-                  <c:v>-0.024443</c:v>
+                  <c:v>7.5</c:v>
                 </c:pt>
               </c:numCache>
             </c:numRef>
           </c:val>
         </c:ser>
         <c:dLbls>
-          <c:numFmt formatCode="+0.0%;-0.0%;0.0%" sourceLinked="0"/>
+          <c:numFmt formatCode="+0.0&quot;%&quot;;-0.0&quot;%&quot;" sourceLinked="0"/>
           <c:txPr>
             <a:bodyPr/>
             <a:lstStyle/>
@@ -4032,7 +2247,7 @@
               <a:pPr>
                 <a:defRPr sz="900">
                   <a:solidFill>
-                    <a:srgbClr val="B1BAC4"/>
+                    <a:srgbClr val="F0F6FC"/>
                   </a:solidFill>
                 </a:defRPr>
               </a:pPr>
@@ -4047,40 +2262,18 @@
           <c:showBubbleSize val="0"/>
           <c:showLeaderLines val="1"/>
         </c:dLbls>
-        <c:gapWidth val="40"/>
-        <c:overlap val="100"/>
-        <c:axId val="-2068027336"/>
-        <c:axId val="-2113994440"/>
+        <c:gapWidth val="35"/>
+        <c:axId val="2068027336"/>
+        <c:axId val="2113994440"/>
       </c:barChart>
       <c:catAx>
-        <c:axId val="-2068027336"/>
+        <c:axId val="2068027336"/>
         <c:scaling>
           <c:orientation val="minMax"/>
         </c:scaling>
         <c:delete val="0"/>
         <c:axPos val="l"/>
-        <c:title>
-          <c:tx>
-            <c:rich>
-              <a:bodyPr/>
-              <a:lstStyle/>
-              <a:p>
-                <a:r>
-                  <a:rPr sz="1000" b="0">
-                    <a:solidFill>
-                      <a:srgbClr val="8B949E"/>
-                    </a:solidFill>
-                    <a:latin typeface="Arial"/>
-                  </a:rPr>
-                  <a:t>Metro</a:t>
-                </a:r>
-              </a:p>
-            </c:rich>
-          </c:tx>
-          <c:layout/>
-          <c:overlay val="0"/>
-        </c:title>
-        <c:majorTickMark val="none"/>
+        <c:majorTickMark val="out"/>
         <c:minorTickMark val="none"/>
         <c:tickLblPos val="low"/>
         <c:spPr>
@@ -4095,7 +2288,7 @@
           <a:lstStyle/>
           <a:p>
             <a:pPr>
-              <a:defRPr sz="1000">
+              <a:defRPr sz="900">
                 <a:solidFill>
                   <a:srgbClr val="B1BAC4"/>
                 </a:solidFill>
@@ -4103,16 +2296,21 @@
             </a:pPr>
           </a:p>
         </c:txPr>
-        <c:crossAx val="-2113994440"/>
+        <c:crossAx val="2113994440"/>
         <c:crosses val="autoZero"/>
         <c:auto val="1"/>
         <c:lblAlgn val="ctr"/>
         <c:lblOffset val="100"/>
+        <c:tickLblSkip val="1"/>
+        <c:tickMarkSkip val="1"/>
         <c:noMultiLvlLbl val="0"/>
       </c:catAx>
       <c:valAx>
-        <c:axId val="-2113994440"/>
-        <c:scaling/>
+        <c:axId val="2113994440"/>
+        <c:scaling>
+          <c:max val="10.0"/>
+          <c:min val="-6.0"/>
+        </c:scaling>
         <c:delete val="0"/>
         <c:axPos val="b"/>
         <c:majorGridlines>
@@ -4137,7 +2335,7 @@
                     </a:solidFill>
                     <a:latin typeface="Arial"/>
                   </a:rPr>
-                  <a:t>Year-over-year change</a:t>
+                  <a:t>Change from 2025 Q2 to 2026 Q2 (%)</a:t>
                 </a:r>
               </a:p>
             </c:rich>
@@ -4145,13 +2343,15 @@
           <c:layout/>
           <c:overlay val="0"/>
         </c:title>
-        <c:numFmt formatCode="0%" sourceLinked="0"/>
-        <c:majorTickMark val="none"/>
+        <c:numFmt formatCode="0&quot;%&quot;" sourceLinked="0"/>
+        <c:majorTickMark val="out"/>
         <c:minorTickMark val="none"/>
         <c:tickLblPos val="nextTo"/>
         <c:spPr>
           <a:ln>
-            <a:noFill/>
+            <a:solidFill>
+              <a:srgbClr val="30363D"/>
+            </a:solidFill>
           </a:ln>
         </c:spPr>
         <c:txPr>
@@ -4167,8 +2367,9 @@
             </a:pPr>
           </a:p>
         </c:txPr>
-        <c:crossAx val="-2068027336"/>
+        <c:crossAx val="2068027336"/>
         <c:crosses val="autoZero"/>
+        <c:majorUnit val="2.0"/>
       </c:valAx>
       <c:spPr>
         <a:noFill/>
@@ -4177,23 +2378,6 @@
         </a:ln>
       </c:spPr>
     </c:plotArea>
-    <c:legend>
-      <c:legendPos val="t"/>
-      <c:overlay val="0"/>
-      <c:txPr>
-        <a:bodyPr/>
-        <a:lstStyle/>
-        <a:p>
-          <a:pPr>
-            <a:defRPr sz="1000">
-              <a:solidFill>
-                <a:srgbClr val="B1BAC4"/>
-              </a:solidFill>
-            </a:defRPr>
-          </a:pPr>
-        </a:p>
-      </c:txPr>
-    </c:legend>
     <c:dispBlanksAs val="gap"/>
   </c:chart>
   <c:spPr>
@@ -4207,7 +2391,7 @@
     <a:lstStyle/>
     <a:p>
       <a:pPr>
-        <a:defRPr sz="1000">
+        <a:defRPr sz="1100">
           <a:solidFill>
             <a:srgbClr val="B1BAC4"/>
           </a:solidFill>
@@ -4227,28 +2411,7 @@
 <c:chartSpace xmlns:c="http://schemas.openxmlformats.org/drawingml/2006/chart" xmlns:a="http://schemas.openxmlformats.org/drawingml/2006/main" xmlns:r="http://schemas.openxmlformats.org/officeDocument/2006/relationships">
   <c:date1904 val="0"/>
   <c:chart>
-    <c:title>
-      <c:tx>
-        <c:rich>
-          <a:bodyPr/>
-          <a:lstStyle/>
-          <a:p>
-            <a:r>
-              <a:rPr sz="1200" b="1">
-                <a:solidFill>
-                  <a:srgbClr val="F0F6FC"/>
-                </a:solidFill>
-                <a:latin typeface="Arial"/>
-              </a:rPr>
-              <a:t>Originated mortgage loans by purpose, 2018 to 2025</a:t>
-            </a:r>
-          </a:p>
-        </c:rich>
-      </c:tx>
-      <c:layout/>
-      <c:overlay val="0"/>
-    </c:title>
-    <c:autoTitleDeleted val="0"/>
+    <c:autoTitleDeleted val="1"/>
     <c:plotArea>
       <c:barChart>
         <c:barDir val="col"/>
@@ -4271,6 +2434,9 @@
             <a:solidFill>
               <a:srgbClr val="58A6FF"/>
             </a:solidFill>
+            <a:ln>
+              <a:noFill/>
+            </a:ln>
           </c:spPr>
           <c:cat>
             <c:strRef>
@@ -4311,28 +2477,28 @@
                 <c:formatCode>General</c:formatCode>
                 <c:ptCount val="8"/>
                 <c:pt idx="0">
-                  <c:v>4.336811</c:v>
+                  <c:v>4.34</c:v>
                 </c:pt>
                 <c:pt idx="1">
-                  <c:v>4.505104</c:v>
+                  <c:v>4.51</c:v>
                 </c:pt>
                 <c:pt idx="2">
-                  <c:v>4.910899</c:v>
+                  <c:v>4.91</c:v>
                 </c:pt>
                 <c:pt idx="3">
-                  <c:v>5.384274</c:v>
+                  <c:v>5.38</c:v>
                 </c:pt>
                 <c:pt idx="4">
-                  <c:v>4.365592</c:v>
+                  <c:v>4.37</c:v>
                 </c:pt>
                 <c:pt idx="5">
-                  <c:v>3.437711</c:v>
+                  <c:v>3.44</c:v>
                 </c:pt>
                 <c:pt idx="6">
-                  <c:v>3.519385</c:v>
+                  <c:v>3.52</c:v>
                 </c:pt>
                 <c:pt idx="7">
-                  <c:v>3.576617</c:v>
+                  <c:v>3.58</c:v>
                 </c:pt>
               </c:numCache>
             </c:numRef>
@@ -4347,15 +2513,18 @@
               <c:strCache>
                 <c:ptCount val="1"/>
                 <c:pt idx="0">
-                  <c:v>Refinance (incl. cash-out)</c:v>
+                  <c:v>Refinance</c:v>
                 </c:pt>
               </c:strCache>
             </c:strRef>
           </c:tx>
           <c:spPr>
             <a:solidFill>
-              <a:srgbClr val="D29922"/>
+              <a:srgbClr val="F0883E"/>
             </a:solidFill>
+            <a:ln>
+              <a:noFill/>
+            </a:ln>
           </c:spPr>
           <c:cat>
             <c:strRef>
@@ -4396,64 +2565,127 @@
                 <c:formatCode>General</c:formatCode>
                 <c:ptCount val="8"/>
                 <c:pt idx="0">
-                  <c:v>2.295767</c:v>
+                  <c:v>1.1</c:v>
                 </c:pt>
                 <c:pt idx="1">
-                  <c:v>3.779609</c:v>
+                  <c:v>2.28</c:v>
                 </c:pt>
                 <c:pt idx="2">
-                  <c:v>8.858603</c:v>
+                  <c:v>6.69</c:v>
                 </c:pt>
                 <c:pt idx="3">
-                  <c:v>8.70001</c:v>
+                  <c:v>5.7</c:v>
                 </c:pt>
                 <c:pt idx="4">
-                  <c:v>2.628887</c:v>
+                  <c:v>1.08</c:v>
                 </c:pt>
                 <c:pt idx="5">
-                  <c:v>1.082477</c:v>
+                  <c:v>0.43</c:v>
                 </c:pt>
                 <c:pt idx="6">
-                  <c:v>1.46632</c:v>
+                  <c:v>0.7</c:v>
                 </c:pt>
                 <c:pt idx="7">
-                  <c:v>1.992093</c:v>
+                  <c:v>1.04</c:v>
                 </c:pt>
               </c:numCache>
             </c:numRef>
           </c:val>
         </c:ser>
-        <c:dLbls>
-          <c:numFmt formatCode="0.0" sourceLinked="0"/>
-          <c:txPr>
-            <a:bodyPr/>
-            <a:lstStyle/>
-            <a:p>
-              <a:pPr>
-                <a:defRPr sz="900">
-                  <a:solidFill>
-                    <a:srgbClr val="B1BAC4"/>
-                  </a:solidFill>
-                </a:defRPr>
-              </a:pPr>
-            </a:p>
-          </c:txPr>
-          <c:dLblPos val="outEnd"/>
-          <c:showLegendKey val="0"/>
-          <c:showVal val="1"/>
-          <c:showCatName val="0"/>
-          <c:showSerName val="0"/>
-          <c:showPercent val="0"/>
-          <c:showBubbleSize val="0"/>
-          <c:showLeaderLines val="1"/>
-        </c:dLbls>
+        <c:ser>
+          <c:idx val="2"/>
+          <c:order val="2"/>
+          <c:tx>
+            <c:strRef>
+              <c:f>Sheet1!$D$1</c:f>
+              <c:strCache>
+                <c:ptCount val="1"/>
+                <c:pt idx="0">
+                  <c:v>Cash-out refinance</c:v>
+                </c:pt>
+              </c:strCache>
+            </c:strRef>
+          </c:tx>
+          <c:spPr>
+            <a:solidFill>
+              <a:srgbClr val="8B949E"/>
+            </a:solidFill>
+            <a:ln>
+              <a:noFill/>
+            </a:ln>
+          </c:spPr>
+          <c:cat>
+            <c:strRef>
+              <c:f>Sheet1!$A$2:$A$9</c:f>
+              <c:strCache>
+                <c:ptCount val="8"/>
+                <c:pt idx="0">
+                  <c:v>2018</c:v>
+                </c:pt>
+                <c:pt idx="1">
+                  <c:v>2019</c:v>
+                </c:pt>
+                <c:pt idx="2">
+                  <c:v>2020</c:v>
+                </c:pt>
+                <c:pt idx="3">
+                  <c:v>2021</c:v>
+                </c:pt>
+                <c:pt idx="4">
+                  <c:v>2022</c:v>
+                </c:pt>
+                <c:pt idx="5">
+                  <c:v>2023</c:v>
+                </c:pt>
+                <c:pt idx="6">
+                  <c:v>2024</c:v>
+                </c:pt>
+                <c:pt idx="7">
+                  <c:v>2025</c:v>
+                </c:pt>
+              </c:strCache>
+            </c:strRef>
+          </c:cat>
+          <c:val>
+            <c:numRef>
+              <c:f>Sheet1!$D$2:$D$9</c:f>
+              <c:numCache>
+                <c:formatCode>General</c:formatCode>
+                <c:ptCount val="8"/>
+                <c:pt idx="0">
+                  <c:v>1.2</c:v>
+                </c:pt>
+                <c:pt idx="1">
+                  <c:v>1.5</c:v>
+                </c:pt>
+                <c:pt idx="2">
+                  <c:v>2.17</c:v>
+                </c:pt>
+                <c:pt idx="3">
+                  <c:v>3.0</c:v>
+                </c:pt>
+                <c:pt idx="4">
+                  <c:v>1.55</c:v>
+                </c:pt>
+                <c:pt idx="5">
+                  <c:v>0.65</c:v>
+                </c:pt>
+                <c:pt idx="6">
+                  <c:v>0.77</c:v>
+                </c:pt>
+                <c:pt idx="7">
+                  <c:v>0.95</c:v>
+                </c:pt>
+              </c:numCache>
+            </c:numRef>
+          </c:val>
+        </c:ser>
         <c:gapWidth val="60"/>
-        <c:overlap val="-10"/>
-        <c:axId val="-2068027336"/>
-        <c:axId val="-2113994440"/>
+        <c:axId val="2068027336"/>
+        <c:axId val="2113994440"/>
       </c:barChart>
       <c:catAx>
-        <c:axId val="-2068027336"/>
+        <c:axId val="2068027336"/>
         <c:scaling>
           <c:orientation val="minMax"/>
         </c:scaling>
@@ -4472,7 +2704,7 @@
                     </a:solidFill>
                     <a:latin typeface="Arial"/>
                   </a:rPr>
-                  <a:t>Year</a:t>
+                  <a:t>HMDA reporting year</a:t>
                 </a:r>
               </a:p>
             </c:rich>
@@ -4480,7 +2712,7 @@
           <c:layout/>
           <c:overlay val="0"/>
         </c:title>
-        <c:majorTickMark val="none"/>
+        <c:majorTickMark val="out"/>
         <c:minorTickMark val="none"/>
         <c:tickLblPos val="nextTo"/>
         <c:spPr>
@@ -4503,7 +2735,7 @@
             </a:pPr>
           </a:p>
         </c:txPr>
-        <c:crossAx val="-2113994440"/>
+        <c:crossAx val="2113994440"/>
         <c:crosses val="autoZero"/>
         <c:auto val="1"/>
         <c:lblAlgn val="ctr"/>
@@ -4511,8 +2743,10 @@
         <c:noMultiLvlLbl val="0"/>
       </c:catAx>
       <c:valAx>
-        <c:axId val="-2113994440"/>
-        <c:scaling/>
+        <c:axId val="2113994440"/>
+        <c:scaling>
+          <c:min val="0.0"/>
+        </c:scaling>
         <c:delete val="0"/>
         <c:axPos val="l"/>
         <c:majorGridlines>
@@ -4546,12 +2780,14 @@
           <c:overlay val="0"/>
         </c:title>
         <c:numFmt formatCode="0.0" sourceLinked="0"/>
-        <c:majorTickMark val="none"/>
+        <c:majorTickMark val="out"/>
         <c:minorTickMark val="none"/>
         <c:tickLblPos val="nextTo"/>
         <c:spPr>
           <a:ln>
-            <a:noFill/>
+            <a:solidFill>
+              <a:srgbClr val="30363D"/>
+            </a:solidFill>
           </a:ln>
         </c:spPr>
         <c:txPr>
@@ -4567,7 +2803,7 @@
             </a:pPr>
           </a:p>
         </c:txPr>
-        <c:crossAx val="-2068027336"/>
+        <c:crossAx val="2068027336"/>
         <c:crosses val="autoZero"/>
       </c:valAx>
       <c:spPr>
@@ -4585,7 +2821,7 @@
         <a:lstStyle/>
         <a:p>
           <a:pPr>
-            <a:defRPr sz="1000">
+            <a:defRPr sz="1100">
               <a:solidFill>
                 <a:srgbClr val="B1BAC4"/>
               </a:solidFill>
@@ -4607,7 +2843,7 @@
     <a:lstStyle/>
     <a:p>
       <a:pPr>
-        <a:defRPr sz="1000">
+        <a:defRPr sz="1100">
           <a:solidFill>
             <a:srgbClr val="B1BAC4"/>
           </a:solidFill>
@@ -4624,7 +2860,7 @@
 </file>
 
 <file path=ppt/notesMasters/notesMaster1.xml><?xml version="1.0" encoding="utf-8"?>
-<p:notesMaster xmlns:a="http://schemas.openxmlformats.org/drawingml/2006/main" xmlns:p="http://schemas.openxmlformats.org/presentationml/2006/main" xmlns:r="http://schemas.openxmlformats.org/officeDocument/2006/relationships">
+<p:notesMaster xmlns:a="http://schemas.openxmlformats.org/drawingml/2006/main" xmlns:r="http://schemas.openxmlformats.org/officeDocument/2006/relationships" xmlns:p="http://schemas.openxmlformats.org/presentationml/2006/main">
   <p:cSld>
     <p:bg>
       <p:bgRef idx="1001">
@@ -4645,241 +2881,16 @@
           <a:chExt cx="0" cy="0"/>
         </a:xfrm>
       </p:grpSpPr>
-      <p:sp>
-        <p:nvSpPr>
-          <p:cNvPr id="2" name="Header Placeholder 1"/>
-          <p:cNvSpPr>
-            <a:spLocks noGrp="1"/>
-          </p:cNvSpPr>
-          <p:nvPr>
-            <p:ph type="hdr" sz="quarter"/>
-          </p:nvPr>
-        </p:nvSpPr>
-        <p:spPr>
-          <a:xfrm>
-            <a:off x="0" y="0"/>
-            <a:ext cx="2971800" cy="457200"/>
-          </a:xfrm>
-          <a:prstGeom prst="rect">
-            <a:avLst/>
-          </a:prstGeom>
-        </p:spPr>
-        <p:txBody>
-          <a:bodyPr vert="horz" lIns="91440" tIns="45720" rIns="91440" bIns="45720" rtlCol="0"/>
-          <a:lstStyle>
-            <a:lvl1pPr algn="l">
-              <a:defRPr sz="1200"/>
-            </a:lvl1pPr>
-          </a:lstStyle>
-          <a:p>
-            <a:endParaRPr lang="en-US"/>
-          </a:p>
-        </p:txBody>
-      </p:sp>
-      <p:sp>
-        <p:nvSpPr>
-          <p:cNvPr id="3" name="Date Placeholder 2"/>
-          <p:cNvSpPr>
-            <a:spLocks noGrp="1"/>
-          </p:cNvSpPr>
-          <p:nvPr>
-            <p:ph type="dt" idx="1"/>
-          </p:nvPr>
-        </p:nvSpPr>
-        <p:spPr>
-          <a:xfrm>
-            <a:off x="3884613" y="0"/>
-            <a:ext cx="2971800" cy="457200"/>
-          </a:xfrm>
-          <a:prstGeom prst="rect">
-            <a:avLst/>
-          </a:prstGeom>
-        </p:spPr>
-        <p:txBody>
-          <a:bodyPr vert="horz" lIns="91440" tIns="45720" rIns="91440" bIns="45720" rtlCol="0"/>
-          <a:lstStyle>
-            <a:lvl1pPr algn="r">
-              <a:defRPr sz="1200"/>
-            </a:lvl1pPr>
-          </a:lstStyle>
-          <a:p>
-            <a:fld id="{0F89C1C7-3DCD-1040-A9CF-14679D8B5DDD}" type="datetimeFigureOut">
-              <a:rPr lang="en-US" smtClean="0"/>
-              <a:t>10/17/16</a:t>
-            </a:fld>
-            <a:endParaRPr lang="en-US"/>
-          </a:p>
-        </p:txBody>
-      </p:sp>
-      <p:sp>
-        <p:nvSpPr>
-          <p:cNvPr id="4" name="Slide Image Placeholder 3"/>
-          <p:cNvSpPr>
-            <a:spLocks noGrp="1" noRot="1" noChangeAspect="1"/>
-          </p:cNvSpPr>
-          <p:nvPr>
-            <p:ph type="sldImg" idx="2"/>
-          </p:nvPr>
-        </p:nvSpPr>
-        <p:spPr>
-          <a:xfrm>
-            <a:off x="1143000" y="685800"/>
-            <a:ext cx="4572000" cy="3429000"/>
-          </a:xfrm>
-          <a:prstGeom prst="rect">
-            <a:avLst/>
-          </a:prstGeom>
-          <a:noFill/>
-          <a:ln w="12700">
-            <a:solidFill>
-              <a:prstClr val="black"/>
-            </a:solidFill>
-          </a:ln>
-        </p:spPr>
-        <p:txBody>
-          <a:bodyPr vert="horz" lIns="91440" tIns="45720" rIns="91440" bIns="45720" rtlCol="0" anchor="ctr"/>
-          <a:lstStyle/>
-          <a:p>
-            <a:endParaRPr lang="en-US"/>
-          </a:p>
-        </p:txBody>
-      </p:sp>
-      <p:sp>
-        <p:nvSpPr>
-          <p:cNvPr id="5" name="Notes Placeholder 4"/>
-          <p:cNvSpPr>
-            <a:spLocks noGrp="1"/>
-          </p:cNvSpPr>
-          <p:nvPr>
-            <p:ph type="body" sz="quarter" idx="3"/>
-          </p:nvPr>
-        </p:nvSpPr>
-        <p:spPr>
-          <a:xfrm>
-            <a:off x="685800" y="4343400"/>
-            <a:ext cx="5486400" cy="4114800"/>
-          </a:xfrm>
-          <a:prstGeom prst="rect">
-            <a:avLst/>
-          </a:prstGeom>
-        </p:spPr>
-        <p:txBody>
-          <a:bodyPr vert="horz" lIns="91440" tIns="45720" rIns="91440" bIns="45720" rtlCol="0"/>
-          <a:lstStyle/>
-          <a:p>
-            <a:pPr lvl="0"/>
-            <a:r>
-              <a:rPr lang="en-US" smtClean="0"/>
-              <a:t>Click to edit Master text styles</a:t>
-            </a:r>
-          </a:p>
-          <a:p>
-            <a:pPr lvl="1"/>
-            <a:r>
-              <a:rPr lang="en-US" smtClean="0"/>
-              <a:t>Second level</a:t>
-            </a:r>
-          </a:p>
-          <a:p>
-            <a:pPr lvl="2"/>
-            <a:r>
-              <a:rPr lang="en-US" smtClean="0"/>
-              <a:t>Third level</a:t>
-            </a:r>
-          </a:p>
-          <a:p>
-            <a:pPr lvl="3"/>
-            <a:r>
-              <a:rPr lang="en-US" smtClean="0"/>
-              <a:t>Fourth level</a:t>
-            </a:r>
-          </a:p>
-          <a:p>
-            <a:pPr lvl="4"/>
-            <a:r>
-              <a:rPr lang="en-US" smtClean="0"/>
-              <a:t>Fifth level</a:t>
-            </a:r>
-            <a:endParaRPr lang="en-US"/>
-          </a:p>
-        </p:txBody>
-      </p:sp>
-      <p:sp>
-        <p:nvSpPr>
-          <p:cNvPr id="6" name="Footer Placeholder 5"/>
-          <p:cNvSpPr>
-            <a:spLocks noGrp="1"/>
-          </p:cNvSpPr>
-          <p:nvPr>
-            <p:ph type="ftr" sz="quarter" idx="4"/>
-          </p:nvPr>
-        </p:nvSpPr>
-        <p:spPr>
-          <a:xfrm>
-            <a:off x="0" y="8685213"/>
-            <a:ext cx="2971800" cy="457200"/>
-          </a:xfrm>
-          <a:prstGeom prst="rect">
-            <a:avLst/>
-          </a:prstGeom>
-        </p:spPr>
-        <p:txBody>
-          <a:bodyPr vert="horz" lIns="91440" tIns="45720" rIns="91440" bIns="45720" rtlCol="0" anchor="b"/>
-          <a:lstStyle>
-            <a:lvl1pPr algn="l">
-              <a:defRPr sz="1200"/>
-            </a:lvl1pPr>
-          </a:lstStyle>
-          <a:p>
-            <a:endParaRPr lang="en-US"/>
-          </a:p>
-        </p:txBody>
-      </p:sp>
-      <p:sp>
-        <p:nvSpPr>
-          <p:cNvPr id="7" name="Slide Number Placeholder 6"/>
-          <p:cNvSpPr>
-            <a:spLocks noGrp="1"/>
-          </p:cNvSpPr>
-          <p:nvPr>
-            <p:ph type="sldNum" sz="quarter" idx="5"/>
-          </p:nvPr>
-        </p:nvSpPr>
-        <p:spPr>
-          <a:xfrm>
-            <a:off x="3884613" y="8685213"/>
-            <a:ext cx="2971800" cy="457200"/>
-          </a:xfrm>
-          <a:prstGeom prst="rect">
-            <a:avLst/>
-          </a:prstGeom>
-        </p:spPr>
-        <p:txBody>
-          <a:bodyPr vert="horz" lIns="91440" tIns="45720" rIns="91440" bIns="45720" rtlCol="0" anchor="b"/>
-          <a:lstStyle>
-            <a:lvl1pPr algn="r">
-              <a:defRPr sz="1200"/>
-            </a:lvl1pPr>
-          </a:lstStyle>
-          <a:p>
-            <a:fld id="{BB5E49A5-4136-284D-997B-48E1D791AD67}" type="slidenum">
-              <a:rPr lang="en-US" smtClean="0"/>
-              <a:t>‹#›</a:t>
-            </a:fld>
-            <a:endParaRPr lang="en-US"/>
-          </a:p>
-        </p:txBody>
-      </p:sp>
     </p:spTree>
     <p:extLst>
       <p:ext uri="{BB962C8B-B14F-4D97-AF65-F5344CB8AC3E}">
-        <p14:creationId xmlns:p14="http://schemas.microsoft.com/office/powerpoint/2010/main" val="2623252185"/>
+        <p14:creationId xmlns:p14="http://schemas.microsoft.com/office/powerpoint/2010/main" val="3793454810"/>
       </p:ext>
     </p:extLst>
   </p:cSld>
   <p:clrMap bg1="lt1" tx1="dk1" bg2="lt2" tx2="dk2" accent1="accent1" accent2="accent2" accent3="accent3" accent4="accent4" accent5="accent5" accent6="accent6" hlink="hlink" folHlink="folHlink"/>
   <p:notesStyle>
-    <a:lvl1pPr marL="0" algn="l" defTabSz="457200" rtl="0" eaLnBrk="1" latinLnBrk="0" hangingPunct="1">
+    <a:lvl1pPr marL="0" algn="l" defTabSz="914400" rtl="0" eaLnBrk="1" latinLnBrk="0" hangingPunct="1">
       <a:defRPr sz="1200" kern="1200">
         <a:solidFill>
           <a:schemeClr val="tx1"/>
@@ -4889,7 +2900,7 @@
         <a:cs typeface="+mn-cs"/>
       </a:defRPr>
     </a:lvl1pPr>
-    <a:lvl2pPr marL="457200" algn="l" defTabSz="457200" rtl="0" eaLnBrk="1" latinLnBrk="0" hangingPunct="1">
+    <a:lvl2pPr marL="457200" algn="l" defTabSz="914400" rtl="0" eaLnBrk="1" latinLnBrk="0" hangingPunct="1">
       <a:defRPr sz="1200" kern="1200">
         <a:solidFill>
           <a:schemeClr val="tx1"/>
@@ -4899,7 +2910,7 @@
         <a:cs typeface="+mn-cs"/>
       </a:defRPr>
     </a:lvl2pPr>
-    <a:lvl3pPr marL="914400" algn="l" defTabSz="457200" rtl="0" eaLnBrk="1" latinLnBrk="0" hangingPunct="1">
+    <a:lvl3pPr marL="914400" algn="l" defTabSz="914400" rtl="0" eaLnBrk="1" latinLnBrk="0" hangingPunct="1">
       <a:defRPr sz="1200" kern="1200">
         <a:solidFill>
           <a:schemeClr val="tx1"/>
@@ -4909,7 +2920,7 @@
         <a:cs typeface="+mn-cs"/>
       </a:defRPr>
     </a:lvl3pPr>
-    <a:lvl4pPr marL="1371600" algn="l" defTabSz="457200" rtl="0" eaLnBrk="1" latinLnBrk="0" hangingPunct="1">
+    <a:lvl4pPr marL="1371600" algn="l" defTabSz="914400" rtl="0" eaLnBrk="1" latinLnBrk="0" hangingPunct="1">
       <a:defRPr sz="1200" kern="1200">
         <a:solidFill>
           <a:schemeClr val="tx1"/>
@@ -4919,7 +2930,7 @@
         <a:cs typeface="+mn-cs"/>
       </a:defRPr>
     </a:lvl4pPr>
-    <a:lvl5pPr marL="1828800" algn="l" defTabSz="457200" rtl="0" eaLnBrk="1" latinLnBrk="0" hangingPunct="1">
+    <a:lvl5pPr marL="1828800" algn="l" defTabSz="914400" rtl="0" eaLnBrk="1" latinLnBrk="0" hangingPunct="1">
       <a:defRPr sz="1200" kern="1200">
         <a:solidFill>
           <a:schemeClr val="tx1"/>
@@ -4929,7 +2940,7 @@
         <a:cs typeface="+mn-cs"/>
       </a:defRPr>
     </a:lvl5pPr>
-    <a:lvl6pPr marL="2286000" algn="l" defTabSz="457200" rtl="0" eaLnBrk="1" latinLnBrk="0" hangingPunct="1">
+    <a:lvl6pPr marL="2286000" algn="l" defTabSz="914400" rtl="0" eaLnBrk="1" latinLnBrk="0" hangingPunct="1">
       <a:defRPr sz="1200" kern="1200">
         <a:solidFill>
           <a:schemeClr val="tx1"/>
@@ -4939,7 +2950,7 @@
         <a:cs typeface="+mn-cs"/>
       </a:defRPr>
     </a:lvl6pPr>
-    <a:lvl7pPr marL="2743200" algn="l" defTabSz="457200" rtl="0" eaLnBrk="1" latinLnBrk="0" hangingPunct="1">
+    <a:lvl7pPr marL="2743200" algn="l" defTabSz="914400" rtl="0" eaLnBrk="1" latinLnBrk="0" hangingPunct="1">
       <a:defRPr sz="1200" kern="1200">
         <a:solidFill>
           <a:schemeClr val="tx1"/>
@@ -4949,7 +2960,7 @@
         <a:cs typeface="+mn-cs"/>
       </a:defRPr>
     </a:lvl7pPr>
-    <a:lvl8pPr marL="3200400" algn="l" defTabSz="457200" rtl="0" eaLnBrk="1" latinLnBrk="0" hangingPunct="1">
+    <a:lvl8pPr marL="3200400" algn="l" defTabSz="914400" rtl="0" eaLnBrk="1" latinLnBrk="0" hangingPunct="1">
       <a:defRPr sz="1200" kern="1200">
         <a:solidFill>
           <a:schemeClr val="tx1"/>
@@ -4959,7 +2970,7 @@
         <a:cs typeface="+mn-cs"/>
       </a:defRPr>
     </a:lvl8pPr>
-    <a:lvl9pPr marL="3657600" algn="l" defTabSz="457200" rtl="0" eaLnBrk="1" latinLnBrk="0" hangingPunct="1">
+    <a:lvl9pPr marL="3657600" algn="l" defTabSz="914400" rtl="0" eaLnBrk="1" latinLnBrk="0" hangingPunct="1">
       <a:defRPr sz="1200" kern="1200">
         <a:solidFill>
           <a:schemeClr val="tx1"/>
@@ -4992,48 +3003,29 @@
       </p:grpSpPr>
       <p:sp>
         <p:nvSpPr>
-          <p:cNvPr id="2" name="Slide Image Placeholder 1"/>
+          <p:cNvPr id="2" name="Notes Placeholder"/>
           <p:cNvSpPr>
             <a:spLocks noGrp="1"/>
           </p:cNvSpPr>
           <p:nvPr>
-            <p:ph type="sldImg" idx="2"/>
+            <p:ph type="body" idx="1"/>
           </p:nvPr>
         </p:nvSpPr>
-        <p:spPr/>
-      </p:sp>
-      <p:sp>
-        <p:nvSpPr>
-          <p:cNvPr id="3" name="Notes Placeholder 2"/>
-          <p:cNvSpPr>
-            <a:spLocks noGrp="1"/>
-          </p:cNvSpPr>
-          <p:nvPr>
-            <p:ph type="body" idx="3" sz="quarter"/>
-          </p:nvPr>
-        </p:nvSpPr>
-        <p:spPr/>
+        <p:spPr>
+          <a:xfrm>
+            <a:off x="685800" y="4572000"/>
+            <a:ext cx="5486400" cy="4114800"/>
+          </a:xfrm>
+        </p:spPr>
         <p:txBody>
           <a:bodyPr/>
           <a:lstStyle/>
           <a:p>
             <a:r>
-              <a:t>This briefing uses public FHFA house price data through Jul 2026 and CFPB HMDA mortgage data for 2018 to 2025. The short story: U.S. home prices are at a record high and +59.3% above January 2020. But annual price growth slowed to +2.6%, down from +18.9% in Jul 2021. Refinance loans fell 77.5% from their 2020 peak. The next slides show the price level, the speed of change, the states and metros that lead and lag, mortgage originations, and three takeaways. All numbers are facts from the data, not forecasts.</a:t>
+              <a:t>This briefing uses public FHFA house price index data through 2026 Q2 and CFPB HMDA mortgage data for 2018 to 2025. The U.S. index is 450.9, where 1991 Q1 equals 100. The index shows price change, not dollar prices. Prices are 64.0% above 2019 Q4, the last quarter before the pandemic. Compared with 2025 Q2, they rose 2.3%. Each U.S. quarterly value is the average of the three monthly values.</a:t>
             </a:r>
           </a:p>
         </p:txBody>
-      </p:sp>
-      <p:sp>
-        <p:nvSpPr>
-          <p:cNvPr id="4" name="Slide Number Placeholder 3"/>
-          <p:cNvSpPr>
-            <a:spLocks noGrp="1"/>
-          </p:cNvSpPr>
-          <p:nvPr>
-            <p:ph type="sldNum" idx="5" sz="quarter"/>
-          </p:nvPr>
-        </p:nvSpPr>
-        <p:spPr/>
       </p:sp>
     </p:spTree>
   </p:cSld>
@@ -5062,48 +3054,29 @@
       </p:grpSpPr>
       <p:sp>
         <p:nvSpPr>
-          <p:cNvPr id="2" name="Slide Image Placeholder 1"/>
+          <p:cNvPr id="2" name="Notes Placeholder"/>
           <p:cNvSpPr>
             <a:spLocks noGrp="1"/>
           </p:cNvSpPr>
           <p:nvPr>
-            <p:ph type="sldImg" idx="2"/>
+            <p:ph type="body" idx="1"/>
           </p:nvPr>
         </p:nvSpPr>
-        <p:spPr/>
-      </p:sp>
-      <p:sp>
-        <p:nvSpPr>
-          <p:cNvPr id="3" name="Notes Placeholder 2"/>
-          <p:cNvSpPr>
-            <a:spLocks noGrp="1"/>
-          </p:cNvSpPr>
-          <p:nvPr>
-            <p:ph type="body" idx="3" sz="quarter"/>
-          </p:nvPr>
-        </p:nvSpPr>
-        <p:spPr/>
+        <p:spPr>
+          <a:xfrm>
+            <a:off x="685800" y="4572000"/>
+            <a:ext cx="5486400" cy="4114800"/>
+          </a:xfrm>
+        </p:spPr>
         <p:txBody>
           <a:bodyPr/>
           <a:lstStyle/>
           <a:p>
             <a:r>
-              <a:t>The FHFA index measures repeat sales of the same homes, so it tracks price change, not a dollar price. In Jul 2026 the seasonally adjusted U.S. index was 444, where 1991 Q1 equals 100. That is +59.3% above January 2020 and +97.6% above the Apr 2007 peak before the housing crash. For context, the index fell 21.3% from that peak to its May 2011 low. Today, prices are at a record high.</a:t>
+              <a:t>The line shows the U.S. purchase-only house price index since 1991. In 2019 Q4 the index was 275.0. In 2026 Q2 it is 450.9, an increase of 64.0%. The steepest climb was from 2020 to 2022. Since then the line continues to go up, but more slowly. This is an index of price change, not an average dollar price.</a:t>
             </a:r>
           </a:p>
         </p:txBody>
-      </p:sp>
-      <p:sp>
-        <p:nvSpPr>
-          <p:cNvPr id="4" name="Slide Number Placeholder 3"/>
-          <p:cNvSpPr>
-            <a:spLocks noGrp="1"/>
-          </p:cNvSpPr>
-          <p:nvPr>
-            <p:ph type="sldNum" idx="5" sz="quarter"/>
-          </p:nvPr>
-        </p:nvSpPr>
-        <p:spPr/>
       </p:sp>
     </p:spTree>
   </p:cSld>
@@ -5132,48 +3105,29 @@
       </p:grpSpPr>
       <p:sp>
         <p:nvSpPr>
-          <p:cNvPr id="2" name="Slide Image Placeholder 1"/>
+          <p:cNvPr id="2" name="Notes Placeholder"/>
           <p:cNvSpPr>
             <a:spLocks noGrp="1"/>
           </p:cNvSpPr>
           <p:nvPr>
-            <p:ph type="sldImg" idx="2"/>
+            <p:ph type="body" idx="1"/>
           </p:nvPr>
         </p:nvSpPr>
-        <p:spPr/>
-      </p:sp>
-      <p:sp>
-        <p:nvSpPr>
-          <p:cNvPr id="3" name="Notes Placeholder 2"/>
-          <p:cNvSpPr>
-            <a:spLocks noGrp="1"/>
-          </p:cNvSpPr>
-          <p:nvPr>
-            <p:ph type="body" idx="3" sz="quarter"/>
-          </p:nvPr>
-        </p:nvSpPr>
-        <p:spPr/>
+        <p:spPr>
+          <a:xfrm>
+            <a:off x="685800" y="4572000"/>
+            <a:ext cx="5486400" cy="4114800"/>
+          </a:xfrm>
+        </p:spPr>
         <p:txBody>
           <a:bodyPr/>
           <a:lstStyle/>
           <a:p>
             <a:r>
-              <a:t>This chart shows the change in prices from the same month one year earlier, using the non-seasonally adjusted index. From 2015 to 2019, annual growth averaged about +5.6%. Growth peaked at +18.9% in Jul 2021. In Jul 2026 it was +2.6%. A positive but smaller number means prices still rose, only more slowly. The data does not tell us what happens next.</a:t>
+              <a:t>Each bar shows how much U.S. prices changed compared with the same quarter one year earlier. Growth peaked at 18.2% in 2021 Q3. In 2026 Q2 it is 2.3%. The two orange bars mark the peak and the latest quarter. At the national level prices did not fall; the rate of increase became smaller.</a:t>
             </a:r>
           </a:p>
         </p:txBody>
-      </p:sp>
-      <p:sp>
-        <p:nvSpPr>
-          <p:cNvPr id="4" name="Slide Number Placeholder 3"/>
-          <p:cNvSpPr>
-            <a:spLocks noGrp="1"/>
-          </p:cNvSpPr>
-          <p:nvPr>
-            <p:ph type="sldNum" idx="5" sz="quarter"/>
-          </p:nvPr>
-        </p:nvSpPr>
-        <p:spPr/>
       </p:sp>
     </p:spTree>
   </p:cSld>
@@ -5202,48 +3156,29 @@
       </p:grpSpPr>
       <p:sp>
         <p:nvSpPr>
-          <p:cNvPr id="2" name="Slide Image Placeholder 1"/>
+          <p:cNvPr id="2" name="Notes Placeholder"/>
           <p:cNvSpPr>
             <a:spLocks noGrp="1"/>
           </p:cNvSpPr>
           <p:nvPr>
-            <p:ph type="sldImg" idx="2"/>
+            <p:ph type="body" idx="1"/>
           </p:nvPr>
         </p:nvSpPr>
-        <p:spPr/>
-      </p:sp>
-      <p:sp>
-        <p:nvSpPr>
-          <p:cNvPr id="3" name="Notes Placeholder 2"/>
-          <p:cNvSpPr>
-            <a:spLocks noGrp="1"/>
-          </p:cNvSpPr>
-          <p:nvPr>
-            <p:ph type="body" idx="3" sz="quarter"/>
-          </p:nvPr>
-        </p:nvSpPr>
-        <p:spPr/>
+        <p:spPr>
+          <a:xfrm>
+            <a:off x="685800" y="4572000"/>
+            <a:ext cx="5486400" cy="4114800"/>
+          </a:xfrm>
+        </p:spPr>
         <p:txBody>
           <a:bodyPr/>
           <a:lstStyle/>
           <a:p>
             <a:r>
-              <a:t>This chart ranks 51 states by the change in prices from Q2 2025 to Q2 2026. The five fastest were Alaska (+8.3%), Vermont (+7.2%), Hawaii (+5.9%), West Virginia (+5.7%), Illinois (+5.5%). The five slowest were New Mexico (-1.2%), Washington (-1.0%), Colorado (-0.6%), California (-0.3%), Oregon (+0.2%). 4 of 51 states had a price decline over the year. These are index changes for each area, not dollar prices.</a:t>
+              <a:t>These are the five states with the largest and the five with the smallest year-over-year change in 2026 Q2. Top five: Alaska +8.3%, Vermont +7.2%, Hawaii +5.9%, West Virginia +5.7%, Illinois +5.5%. Bottom five: New Mexico -1.2%, Washington -1.0%, Colorado -0.6%, California -0.3%, Oregon +0.2%. 4 of 51 states and DC had a decrease. Four of the five slowest states are in the West.</a:t>
             </a:r>
           </a:p>
         </p:txBody>
-      </p:sp>
-      <p:sp>
-        <p:nvSpPr>
-          <p:cNvPr id="4" name="Slide Number Placeholder 3"/>
-          <p:cNvSpPr>
-            <a:spLocks noGrp="1"/>
-          </p:cNvSpPr>
-          <p:nvPr>
-            <p:ph type="sldNum" idx="5" sz="quarter"/>
-          </p:nvPr>
-        </p:nvSpPr>
-        <p:spPr/>
       </p:sp>
     </p:spTree>
   </p:cSld>
@@ -5272,48 +3207,29 @@
       </p:grpSpPr>
       <p:sp>
         <p:nvSpPr>
-          <p:cNvPr id="2" name="Slide Image Placeholder 1"/>
+          <p:cNvPr id="2" name="Notes Placeholder"/>
           <p:cNvSpPr>
             <a:spLocks noGrp="1"/>
           </p:cNvSpPr>
           <p:nvPr>
-            <p:ph type="sldImg" idx="2"/>
+            <p:ph type="body" idx="1"/>
           </p:nvPr>
         </p:nvSpPr>
-        <p:spPr/>
-      </p:sp>
-      <p:sp>
-        <p:nvSpPr>
-          <p:cNvPr id="3" name="Notes Placeholder 2"/>
-          <p:cNvSpPr>
-            <a:spLocks noGrp="1"/>
-          </p:cNvSpPr>
-          <p:nvPr>
-            <p:ph type="body" idx="3" sz="quarter"/>
-          </p:nvPr>
-        </p:nvSpPr>
-        <p:spPr/>
+        <p:spPr>
+          <a:xfrm>
+            <a:off x="685800" y="4572000"/>
+            <a:ext cx="5486400" cy="4114800"/>
+          </a:xfrm>
+        </p:spPr>
         <p:txBody>
           <a:bodyPr/>
           <a:lstStyle/>
           <a:p>
             <a:r>
-              <a:t>This chart ranks 100 metros by the change in prices from Q2 2025 to Q2 2026. The five fastest were Elgin, IL (+7.5%), Allentown, PA (+6.9%), Bridgeport, CT (+6.5%), Charleston, SC (+6.4%), El Paso, TX (+6.2%). The five slowest were Everett, WA (-3.9%), San Antonio, TX (-3.0%), Bakersfield, CA (-2.5%), Seattle, WA (-2.5%), Tucson, AZ (-2.4%). 26 of 100 metros had a price decline over the year. These are index changes for each area, not dollar prices.</a:t>
+              <a:t>These are the five metros with the largest and the five with the smallest year-over-year change in 2026 Q2, out of the 100 largest metros in the FHFA file. Some are metro divisions. Labels use the first city name. Top five: Elgin, IL (MSAD) +7.5%, Allentown-Bethlehem-Easton, PA-NJ +6.9%, Bridgeport-Stamford-Danbury, CT +6.5%, Charleston-North Charleston, SC +6.4%, El Paso, TX +6.2%. Bottom five: Everett, WA (MSAD) -3.9%, San Antonio-New Braunfels, TX -3.0%, Bakersfield-Delano, CA -2.5%, Seattle-Bellevue-Kent, WA (MSAD) -2.5%, Tucson, AZ -2.4%. 26 of 100 metros had a decrease.</a:t>
             </a:r>
           </a:p>
         </p:txBody>
-      </p:sp>
-      <p:sp>
-        <p:nvSpPr>
-          <p:cNvPr id="4" name="Slide Number Placeholder 3"/>
-          <p:cNvSpPr>
-            <a:spLocks noGrp="1"/>
-          </p:cNvSpPr>
-          <p:nvPr>
-            <p:ph type="sldNum" idx="5" sz="quarter"/>
-          </p:nvPr>
-        </p:nvSpPr>
-        <p:spPr/>
       </p:sp>
     </p:spTree>
   </p:cSld>
@@ -5342,48 +3258,29 @@
       </p:grpSpPr>
       <p:sp>
         <p:nvSpPr>
-          <p:cNvPr id="2" name="Slide Image Placeholder 1"/>
+          <p:cNvPr id="2" name="Notes Placeholder"/>
           <p:cNvSpPr>
             <a:spLocks noGrp="1"/>
           </p:cNvSpPr>
           <p:nvPr>
-            <p:ph type="sldImg" idx="2"/>
+            <p:ph type="body" idx="1"/>
           </p:nvPr>
         </p:nvSpPr>
-        <p:spPr/>
-      </p:sp>
-      <p:sp>
-        <p:nvSpPr>
-          <p:cNvPr id="3" name="Notes Placeholder 2"/>
-          <p:cNvSpPr>
-            <a:spLocks noGrp="1"/>
-          </p:cNvSpPr>
-          <p:nvPr>
-            <p:ph type="body" idx="3" sz="quarter"/>
-          </p:nvPr>
-        </p:nvSpPr>
-        <p:spPr/>
+        <p:spPr>
+          <a:xfrm>
+            <a:off x="685800" y="4572000"/>
+            <a:ext cx="5486400" cy="4114800"/>
+          </a:xfrm>
+        </p:spPr>
         <p:txBody>
           <a:bodyPr/>
           <a:lstStyle/>
           <a:p>
             <a:r>
-              <a:t>These are counts of originated loans reported under HMDA, summed across all states. Refinance combines rate-and-term refinance and cash-out refinance. Refinance loans peaked at 8.9 million in 2020 and were 2.0 million in 2025, a change of -77.5%. Home purchase loans went from 4.3 million in 2018 to 3.6 million in 2025 (-17.5%). Purchase loans were 35.7% of originations in 2020 and 64.2% in 2025. The average home purchase loan grew from $284K to $405K.</a:t>
+              <a:t>This chart uses CFPB HMDA data for originated loans only. Home purchase loans: 4.34 million in 2018, a high of 5.38 million in 2021, and 3.58 million in 2025. Refinance plus cash-out refinance: 2.30 million in 2018, 8.86 million at the 2020 peak, 1.08 million at the low in 2023, and 1.99 million in 2025. In 2020 and 2021 there were more refinance loans than home purchase loans. Since 2022 home purchase loans are the larger group.</a:t>
             </a:r>
           </a:p>
         </p:txBody>
-      </p:sp>
-      <p:sp>
-        <p:nvSpPr>
-          <p:cNvPr id="4" name="Slide Number Placeholder 3"/>
-          <p:cNvSpPr>
-            <a:spLocks noGrp="1"/>
-          </p:cNvSpPr>
-          <p:nvPr>
-            <p:ph type="sldNum" idx="5" sz="quarter"/>
-          </p:nvPr>
-        </p:nvSpPr>
-        <p:spPr/>
       </p:sp>
     </p:spTree>
   </p:cSld>
@@ -5412,48 +3309,29 @@
       </p:grpSpPr>
       <p:sp>
         <p:nvSpPr>
-          <p:cNvPr id="2" name="Slide Image Placeholder 1"/>
+          <p:cNvPr id="2" name="Notes Placeholder"/>
           <p:cNvSpPr>
             <a:spLocks noGrp="1"/>
           </p:cNvSpPr>
           <p:nvPr>
-            <p:ph type="sldImg" idx="2"/>
+            <p:ph type="body" idx="1"/>
           </p:nvPr>
         </p:nvSpPr>
-        <p:spPr/>
-      </p:sp>
-      <p:sp>
-        <p:nvSpPr>
-          <p:cNvPr id="3" name="Notes Placeholder 2"/>
-          <p:cNvSpPr>
-            <a:spLocks noGrp="1"/>
-          </p:cNvSpPr>
-          <p:nvPr>
-            <p:ph type="body" idx="3" sz="quarter"/>
-          </p:nvPr>
-        </p:nvSpPr>
-        <p:spPr/>
+        <p:spPr>
+          <a:xfrm>
+            <a:off x="685800" y="4572000"/>
+            <a:ext cx="5486400" cy="4114800"/>
+          </a:xfrm>
+        </p:spPr>
         <p:txBody>
           <a:bodyPr/>
           <a:lstStyle/>
           <a:p>
             <a:r>
-              <a:t>Three facts to remember. One: prices are at a record high and +59.3% above January 2020. Two: annual growth slowed to +2.6%, and in Q2 2026 4 states and 26 large metros had price declines. Three: refinance loans are 77.5% below their 2020 peak, so home purchase loans were 64.2% of 2025 originations. These are facts from the data, not forecasts.</a:t>
+              <a:t>First, U.S. prices are 64.0% above 2019 Q4 and rose 2.3% in the last year. Second, the change is uneven: 4 states and 26 of the 100 largest metros show a decrease, while Alaska rose 8.3%. Third, refinance and cash-out refinance originations in 2025 were 78% below the 2020 peak, and home purchase originations were 18% below 2018. These are facts from the data, not forecasts.</a:t>
             </a:r>
           </a:p>
         </p:txBody>
-      </p:sp>
-      <p:sp>
-        <p:nvSpPr>
-          <p:cNvPr id="4" name="Slide Number Placeholder 3"/>
-          <p:cNvSpPr>
-            <a:spLocks noGrp="1"/>
-          </p:cNvSpPr>
-          <p:nvPr>
-            <p:ph type="sldNum" idx="5" sz="quarter"/>
-          </p:nvPr>
-        </p:nvSpPr>
-        <p:spPr/>
       </p:sp>
     </p:spTree>
   </p:cSld>
@@ -5795,20 +3673,191 @@
       <p:grpSpPr/>
       <p:sp>
         <p:nvSpPr>
-          <p:cNvPr id="2" name="Rectangle 1"/>
+          <p:cNvPr id="2" name="Rounded Rectangle 1"/>
           <p:cNvSpPr/>
           <p:nvPr/>
         </p:nvSpPr>
         <p:spPr>
           <a:xfrm>
-            <a:off x="411480" y="502920"/>
-            <a:ext cx="548640" cy="54864"/>
+            <a:off x="7004304" y="146304"/>
+            <a:ext cx="1536192" cy="283464"/>
+          </a:xfrm>
+          <a:prstGeom prst="roundRect">
+            <a:avLst>
+              <a:gd name="adj" fmla="val 19000"/>
+            </a:avLst>
+          </a:prstGeom>
+          <a:solidFill>
+            <a:srgbClr val="1A5D2A"/>
+          </a:solidFill>
+          <a:ln w="12700">
+            <a:solidFill>
+              <a:srgbClr val="2EA043"/>
+            </a:solidFill>
+          </a:ln>
+          <a:effectLst/>
+        </p:spPr>
+        <p:style>
+          <a:lnRef idx="1">
+            <a:schemeClr val="accent1"/>
+          </a:lnRef>
+          <a:fillRef idx="3">
+            <a:schemeClr val="accent1"/>
+          </a:fillRef>
+          <a:effectRef idx="2">
+            <a:schemeClr val="accent1"/>
+          </a:effectRef>
+          <a:fontRef idx="minor">
+            <a:schemeClr val="lt1"/>
+          </a:fontRef>
+        </p:style>
+        <p:txBody>
+          <a:bodyPr rtlCol="0" anchor="ctr"/>
+          <a:lstStyle/>
+          <a:p>
+            <a:pPr algn="ctr"/>
+          </a:p>
+        </p:txBody>
+      </p:sp>
+      <p:sp>
+        <p:nvSpPr>
+          <p:cNvPr id="3" name="TextBox 2"/>
+          <p:cNvSpPr txBox="1"/>
+          <p:nvPr/>
+        </p:nvSpPr>
+        <p:spPr>
+          <a:xfrm>
+            <a:off x="7004304" y="146304"/>
+            <a:ext cx="1536192" cy="283464"/>
           </a:xfrm>
           <a:prstGeom prst="rect">
             <a:avLst/>
           </a:prstGeom>
+          <a:noFill/>
+        </p:spPr>
+        <p:txBody>
+          <a:bodyPr wrap="square" lIns="0" rIns="0" tIns="0" bIns="0" anchor="ctr"/>
+          <a:lstStyle/>
+          <a:p>
+            <a:pPr algn="ctr"/>
+            <a:r>
+              <a:rPr sz="1000" b="1">
+                <a:solidFill>
+                  <a:srgbClr val="FFFFFF"/>
+                </a:solidFill>
+                <a:latin typeface="Arial"/>
+              </a:rPr>
+              <a:t>Data through 2026 Q2</a:t>
+            </a:r>
+          </a:p>
+        </p:txBody>
+      </p:sp>
+      <p:pic>
+        <p:nvPicPr>
+          <p:cNvPr id="4" name="Picture 3" descr=".logo.png"/>
+          <p:cNvPicPr>
+            <a:picLocks noChangeAspect="1"/>
+          </p:cNvPicPr>
+          <p:nvPr/>
+        </p:nvPicPr>
+        <p:blipFill>
+          <a:blip r:embed="rId2"/>
+          <a:stretch>
+            <a:fillRect/>
+          </a:stretch>
+        </p:blipFill>
+        <p:spPr>
+          <a:xfrm>
+            <a:off x="8668512" y="137160"/>
+            <a:ext cx="301752" cy="301752"/>
+          </a:xfrm>
+          <a:prstGeom prst="rect">
+            <a:avLst/>
+          </a:prstGeom>
+        </p:spPr>
+      </p:pic>
+      <p:sp>
+        <p:nvSpPr>
+          <p:cNvPr id="5" name="TextBox 4"/>
+          <p:cNvSpPr txBox="1"/>
+          <p:nvPr/>
+        </p:nvSpPr>
+        <p:spPr>
+          <a:xfrm>
+            <a:off x="484632" y="384048"/>
+            <a:ext cx="6400800" cy="182880"/>
+          </a:xfrm>
+          <a:prstGeom prst="rect">
+            <a:avLst/>
+          </a:prstGeom>
+          <a:noFill/>
+        </p:spPr>
+        <p:txBody>
+          <a:bodyPr wrap="square" lIns="0" rIns="0" tIns="0" bIns="0" anchor="t"/>
+          <a:lstStyle/>
+          <a:p>
+            <a:pPr algn="l"/>
+            <a:r>
+              <a:rPr sz="1100" b="1">
+                <a:solidFill>
+                  <a:srgbClr val="2EA043"/>
+                </a:solidFill>
+                <a:latin typeface="Arial"/>
+              </a:rPr>
+              <a:t>U.S. HOUSING MARKET BRIEFING</a:t>
+            </a:r>
+          </a:p>
+        </p:txBody>
+      </p:sp>
+      <p:sp>
+        <p:nvSpPr>
+          <p:cNvPr id="6" name="TextBox 5"/>
+          <p:cNvSpPr txBox="1"/>
+          <p:nvPr/>
+        </p:nvSpPr>
+        <p:spPr>
+          <a:xfrm>
+            <a:off x="484632" y="4791456"/>
+            <a:ext cx="8138160" cy="182880"/>
+          </a:xfrm>
+          <a:prstGeom prst="rect">
+            <a:avLst/>
+          </a:prstGeom>
+          <a:noFill/>
+        </p:spPr>
+        <p:txBody>
+          <a:bodyPr wrap="square" lIns="0" rIns="0" tIns="0" bIns="0" anchor="t"/>
+          <a:lstStyle/>
+          <a:p>
+            <a:pPr algn="l"/>
+            <a:r>
+              <a:rPr sz="800" b="0">
+                <a:solidFill>
+                  <a:srgbClr val="8B949E"/>
+                </a:solidFill>
+                <a:latin typeface="Arial"/>
+              </a:rPr>
+              <a:t>Built from public FHFA and CFPB data. Not an official Fannie Mae, FHFA, or CFPB product.</a:t>
+            </a:r>
+          </a:p>
+        </p:txBody>
+      </p:sp>
+      <p:sp>
+        <p:nvSpPr>
+          <p:cNvPr id="7" name="Rectangle 6"/>
+          <p:cNvSpPr/>
+          <p:nvPr/>
+        </p:nvSpPr>
+        <p:spPr>
+          <a:xfrm>
+            <a:off x="484632" y="914400"/>
+            <a:ext cx="713232" cy="64008"/>
+          </a:xfrm>
+          <a:prstGeom prst="rect">
+            <a:avLst/>
+          </a:prstGeom>
           <a:solidFill>
-            <a:srgbClr val="3FB950"/>
+            <a:srgbClr val="2EA043"/>
           </a:solidFill>
           <a:ln>
             <a:noFill/>
@@ -5839,14 +3888,14 @@
       </p:sp>
       <p:sp>
         <p:nvSpPr>
-          <p:cNvPr id="3" name="TextBox 2"/>
+          <p:cNvPr id="8" name="TextBox 7"/>
           <p:cNvSpPr txBox="1"/>
           <p:nvPr/>
         </p:nvSpPr>
         <p:spPr>
           <a:xfrm>
-            <a:off x="411480" y="274320"/>
-            <a:ext cx="8321040" cy="228600"/>
+            <a:off x="484632" y="1143000"/>
+            <a:ext cx="8138160" cy="914400"/>
           </a:xfrm>
           <a:prstGeom prst="rect">
             <a:avLst/>
@@ -5854,45 +3903,10 @@
           <a:noFill/>
         </p:spPr>
         <p:txBody>
-          <a:bodyPr wrap="square" anchor="t" lIns="0" rIns="0" tIns="0" bIns="0">
-            <a:spAutoFit/>
-          </a:bodyPr>
-          <a:lstStyle/>
-          <a:p>
-            <a:r>
-              <a:rPr sz="1050" b="1">
-                <a:solidFill>
-                  <a:srgbClr val="3FB950"/>
-                </a:solidFill>
-                <a:latin typeface="Arial"/>
-              </a:rPr>
-              <a:t>EXECUTIVE BRIEFING  |  U.S. HOUSING MARKET</a:t>
-            </a:r>
-          </a:p>
-        </p:txBody>
-      </p:sp>
-      <p:sp>
-        <p:nvSpPr>
-          <p:cNvPr id="4" name="TextBox 3"/>
-          <p:cNvSpPr txBox="1"/>
-          <p:nvPr/>
-        </p:nvSpPr>
-        <p:spPr>
-          <a:xfrm>
-            <a:off x="411480" y="731520"/>
-            <a:ext cx="8321040" cy="1143000"/>
-          </a:xfrm>
-          <a:prstGeom prst="rect">
-            <a:avLst/>
-          </a:prstGeom>
-          <a:noFill/>
-        </p:spPr>
-        <p:txBody>
-          <a:bodyPr wrap="square" anchor="t" lIns="0" rIns="0" tIns="0" bIns="0">
-            <a:spAutoFit/>
-          </a:bodyPr>
-          <a:lstStyle/>
-          <a:p>
+          <a:bodyPr wrap="square" lIns="0" rIns="0" tIns="0" bIns="0" anchor="t"/>
+          <a:lstStyle/>
+          <a:p>
+            <a:pPr algn="l"/>
             <a:r>
               <a:rPr sz="3000" b="1">
                 <a:solidFill>
@@ -5900,21 +3914,21 @@
                 </a:solidFill>
                 <a:latin typeface="Arial"/>
               </a:rPr>
-              <a:t>U.S. home prices are at a record high, but annual growth slowed to +2.6%</a:t>
+              <a:t>U.S. home prices are 64% above 2019 Q4, but annual growth has slowed to 2.3%</a:t>
             </a:r>
           </a:p>
         </p:txBody>
       </p:sp>
       <p:sp>
         <p:nvSpPr>
-          <p:cNvPr id="5" name="TextBox 4"/>
+          <p:cNvPr id="9" name="TextBox 8"/>
           <p:cNvSpPr txBox="1"/>
           <p:nvPr/>
         </p:nvSpPr>
         <p:spPr>
           <a:xfrm>
-            <a:off x="411480" y="1965960"/>
-            <a:ext cx="8321040" cy="274320"/>
+            <a:off x="484632" y="2148840"/>
+            <a:ext cx="8138160" cy="274320"/>
           </a:xfrm>
           <a:prstGeom prst="rect">
             <a:avLst/>
@@ -5922,11 +3936,10 @@
           <a:noFill/>
         </p:spPr>
         <p:txBody>
-          <a:bodyPr wrap="square" anchor="t" lIns="0" rIns="0" tIns="0" bIns="0">
-            <a:spAutoFit/>
-          </a:bodyPr>
-          <a:lstStyle/>
-          <a:p>
+          <a:bodyPr wrap="square" lIns="0" rIns="0" tIns="0" bIns="0" anchor="t"/>
+          <a:lstStyle/>
+          <a:p>
+            <a:pPr algn="l"/>
             <a:r>
               <a:rPr sz="1400" b="0">
                 <a:solidFill>
@@ -5934,25 +3947,25 @@
                 </a:solidFill>
                 <a:latin typeface="Arial"/>
               </a:rPr>
-              <a:t>Home prices through Jul 2026 (FHFA HPI)  |  Mortgage originations 2018 to 2025 (CFPB HMDA)</a:t>
+              <a:t>Where prices are, how fast they change, who leads, and how mortgage lending changed.</a:t>
             </a:r>
           </a:p>
         </p:txBody>
       </p:sp>
       <p:sp>
         <p:nvSpPr>
-          <p:cNvPr id="6" name="Rounded Rectangle 5"/>
+          <p:cNvPr id="10" name="Rounded Rectangle 9"/>
           <p:cNvSpPr/>
           <p:nvPr/>
         </p:nvSpPr>
         <p:spPr>
           <a:xfrm>
-            <a:off x="411480" y="2560320"/>
-            <a:ext cx="2651760" cy="1783080"/>
+            <a:off x="484632" y="2697480"/>
+            <a:ext cx="2560320" cy="1600200"/>
           </a:xfrm>
           <a:prstGeom prst="roundRect">
             <a:avLst>
-              <a:gd name="adj" fmla="val 4000"/>
+              <a:gd name="adj" fmla="val 5000"/>
             </a:avLst>
           </a:prstGeom>
           <a:solidFill>
@@ -5989,14 +4002,14 @@
       </p:sp>
       <p:sp>
         <p:nvSpPr>
-          <p:cNvPr id="7" name="Rectangle 6"/>
+          <p:cNvPr id="11" name="Rectangle 10"/>
           <p:cNvSpPr/>
           <p:nvPr/>
         </p:nvSpPr>
         <p:spPr>
           <a:xfrm>
-            <a:off x="411480" y="2560320"/>
-            <a:ext cx="2651760" cy="54864"/>
+            <a:off x="484632" y="2697480"/>
+            <a:ext cx="2560320" cy="54864"/>
           </a:xfrm>
           <a:prstGeom prst="rect">
             <a:avLst/>
@@ -6033,14 +4046,14 @@
       </p:sp>
       <p:sp>
         <p:nvSpPr>
-          <p:cNvPr id="8" name="TextBox 7"/>
+          <p:cNvPr id="12" name="TextBox 11"/>
           <p:cNvSpPr txBox="1"/>
           <p:nvPr/>
         </p:nvSpPr>
         <p:spPr>
           <a:xfrm>
-            <a:off x="612648" y="2788920"/>
-            <a:ext cx="2249424" cy="548640"/>
+            <a:off x="685800" y="2926080"/>
+            <a:ext cx="2194560" cy="548640"/>
           </a:xfrm>
           <a:prstGeom prst="rect">
             <a:avLst/>
@@ -6048,33 +4061,65 @@
           <a:noFill/>
         </p:spPr>
         <p:txBody>
-          <a:bodyPr wrap="square" anchor="t" lIns="0" rIns="0" tIns="0" bIns="0">
-            <a:spAutoFit/>
-          </a:bodyPr>
-          <a:lstStyle/>
-          <a:p>
+          <a:bodyPr wrap="square" lIns="0" rIns="0" tIns="0" bIns="0" anchor="t"/>
+          <a:lstStyle/>
+          <a:p>
+            <a:pPr algn="l"/>
             <a:r>
-              <a:rPr sz="3600" b="1">
+              <a:rPr sz="3200" b="1">
+                <a:solidFill>
+                  <a:srgbClr val="F0F6FC"/>
+                </a:solidFill>
+                <a:latin typeface="Arial"/>
+              </a:rPr>
+              <a:t>450.9</a:t>
+            </a:r>
+          </a:p>
+        </p:txBody>
+      </p:sp>
+      <p:sp>
+        <p:nvSpPr>
+          <p:cNvPr id="13" name="TextBox 12"/>
+          <p:cNvSpPr txBox="1"/>
+          <p:nvPr/>
+        </p:nvSpPr>
+        <p:spPr>
+          <a:xfrm>
+            <a:off x="685800" y="3520440"/>
+            <a:ext cx="2194560" cy="274320"/>
+          </a:xfrm>
+          <a:prstGeom prst="rect">
+            <a:avLst/>
+          </a:prstGeom>
+          <a:noFill/>
+        </p:spPr>
+        <p:txBody>
+          <a:bodyPr wrap="square" lIns="0" rIns="0" tIns="0" bIns="0" anchor="t"/>
+          <a:lstStyle/>
+          <a:p>
+            <a:pPr algn="l"/>
+            <a:r>
+              <a:rPr sz="1200" b="1">
                 <a:solidFill>
                   <a:srgbClr val="58A6FF"/>
                 </a:solidFill>
                 <a:latin typeface="Arial"/>
               </a:rPr>
-              <a:t>+59.3%</a:t>
+              <a:t>U.S. house price index</a:t>
             </a:r>
           </a:p>
         </p:txBody>
       </p:sp>
       <p:sp>
         <p:nvSpPr>
-          <p:cNvPr id="9" name="TextBox 8"/>
+          <p:cNvPr id="14" name="TextBox 13"/>
           <p:cNvSpPr txBox="1"/>
           <p:nvPr/>
         </p:nvSpPr>
         <p:spPr>
           <a:xfrm>
-            <a:off x="612648" y="3429000"/>
-            <a:ext cx="2249424" cy="777240"/>
+            <a:off x="685800" y="3794760"/>
+            <a:ext cx="2194560" cy="365760"/>
           </a:xfrm>
           <a:prstGeom prst="rect">
             <a:avLst/>
@@ -6082,37 +4127,36 @@
           <a:noFill/>
         </p:spPr>
         <p:txBody>
-          <a:bodyPr wrap="square" anchor="t" lIns="0" rIns="0" tIns="0" bIns="0">
-            <a:spAutoFit/>
-          </a:bodyPr>
-          <a:lstStyle/>
-          <a:p>
+          <a:bodyPr wrap="square" lIns="0" rIns="0" tIns="0" bIns="0" anchor="t"/>
+          <a:lstStyle/>
+          <a:p>
+            <a:pPr algn="l"/>
             <a:r>
-              <a:rPr sz="1400" b="0">
+              <a:rPr sz="1000" b="0">
                 <a:solidFill>
-                  <a:srgbClr val="B1BAC4"/>
+                  <a:srgbClr val="8B949E"/>
                 </a:solidFill>
                 <a:latin typeface="Arial"/>
               </a:rPr>
-              <a:t>Change in U.S. home prices, Jan 2020 to Jul 2026</a:t>
+              <a:t>2026 Q2, 1991 Q1 = 100</a:t>
             </a:r>
           </a:p>
         </p:txBody>
       </p:sp>
       <p:sp>
         <p:nvSpPr>
-          <p:cNvPr id="10" name="Rounded Rectangle 9"/>
+          <p:cNvPr id="15" name="Rounded Rectangle 14"/>
           <p:cNvSpPr/>
           <p:nvPr/>
         </p:nvSpPr>
         <p:spPr>
           <a:xfrm>
-            <a:off x="3246120" y="2560320"/>
-            <a:ext cx="2651760" cy="1783080"/>
+            <a:off x="3291839" y="2697480"/>
+            <a:ext cx="2560320" cy="1600200"/>
           </a:xfrm>
           <a:prstGeom prst="roundRect">
             <a:avLst>
-              <a:gd name="adj" fmla="val 4000"/>
+              <a:gd name="adj" fmla="val 5000"/>
             </a:avLst>
           </a:prstGeom>
           <a:solidFill>
@@ -6149,20 +4193,20 @@
       </p:sp>
       <p:sp>
         <p:nvSpPr>
-          <p:cNvPr id="11" name="Rectangle 10"/>
+          <p:cNvPr id="16" name="Rectangle 15"/>
           <p:cNvSpPr/>
           <p:nvPr/>
         </p:nvSpPr>
         <p:spPr>
           <a:xfrm>
-            <a:off x="3246120" y="2560320"/>
-            <a:ext cx="2651760" cy="54864"/>
+            <a:off x="3291839" y="2697480"/>
+            <a:ext cx="2560320" cy="54864"/>
           </a:xfrm>
           <a:prstGeom prst="rect">
             <a:avLst/>
           </a:prstGeom>
           <a:solidFill>
-            <a:srgbClr val="D29922"/>
+            <a:srgbClr val="58A6FF"/>
           </a:solidFill>
           <a:ln>
             <a:noFill/>
@@ -6193,14 +4237,14 @@
       </p:sp>
       <p:sp>
         <p:nvSpPr>
-          <p:cNvPr id="12" name="TextBox 11"/>
+          <p:cNvPr id="17" name="TextBox 16"/>
           <p:cNvSpPr txBox="1"/>
           <p:nvPr/>
         </p:nvSpPr>
         <p:spPr>
           <a:xfrm>
-            <a:off x="3447288" y="2788920"/>
-            <a:ext cx="2249424" cy="548640"/>
+            <a:off x="3493008" y="2926080"/>
+            <a:ext cx="2194560" cy="548640"/>
           </a:xfrm>
           <a:prstGeom prst="rect">
             <a:avLst/>
@@ -6208,33 +4252,32 @@
           <a:noFill/>
         </p:spPr>
         <p:txBody>
-          <a:bodyPr wrap="square" anchor="t" lIns="0" rIns="0" tIns="0" bIns="0">
-            <a:spAutoFit/>
-          </a:bodyPr>
-          <a:lstStyle/>
-          <a:p>
+          <a:bodyPr wrap="square" lIns="0" rIns="0" tIns="0" bIns="0" anchor="t"/>
+          <a:lstStyle/>
+          <a:p>
+            <a:pPr algn="l"/>
             <a:r>
-              <a:rPr sz="3600" b="1">
+              <a:rPr sz="3200" b="1">
                 <a:solidFill>
-                  <a:srgbClr val="D29922"/>
+                  <a:srgbClr val="F0F6FC"/>
                 </a:solidFill>
                 <a:latin typeface="Arial"/>
               </a:rPr>
-              <a:t>+2.6%</a:t>
+              <a:t>+2.3%</a:t>
             </a:r>
           </a:p>
         </p:txBody>
       </p:sp>
       <p:sp>
         <p:nvSpPr>
-          <p:cNvPr id="13" name="TextBox 12"/>
+          <p:cNvPr id="18" name="TextBox 17"/>
           <p:cNvSpPr txBox="1"/>
           <p:nvPr/>
         </p:nvSpPr>
         <p:spPr>
           <a:xfrm>
-            <a:off x="3447288" y="3429000"/>
-            <a:ext cx="2249424" cy="777240"/>
+            <a:off x="3493008" y="3520440"/>
+            <a:ext cx="2194560" cy="274320"/>
           </a:xfrm>
           <a:prstGeom prst="rect">
             <a:avLst/>
@@ -6242,37 +4285,69 @@
           <a:noFill/>
         </p:spPr>
         <p:txBody>
-          <a:bodyPr wrap="square" anchor="t" lIns="0" rIns="0" tIns="0" bIns="0">
-            <a:spAutoFit/>
-          </a:bodyPr>
-          <a:lstStyle/>
-          <a:p>
+          <a:bodyPr wrap="square" lIns="0" rIns="0" tIns="0" bIns="0" anchor="t"/>
+          <a:lstStyle/>
+          <a:p>
+            <a:pPr algn="l"/>
             <a:r>
-              <a:rPr sz="1400" b="0">
+              <a:rPr sz="1200" b="1">
                 <a:solidFill>
-                  <a:srgbClr val="B1BAC4"/>
+                  <a:srgbClr val="58A6FF"/>
                 </a:solidFill>
                 <a:latin typeface="Arial"/>
               </a:rPr>
-              <a:t>Annual price change in Jul 2026, down from +18.9% in Jul 2021</a:t>
+              <a:t>U.S. year-over-year change</a:t>
             </a:r>
           </a:p>
         </p:txBody>
       </p:sp>
       <p:sp>
         <p:nvSpPr>
-          <p:cNvPr id="14" name="Rounded Rectangle 13"/>
+          <p:cNvPr id="19" name="TextBox 18"/>
+          <p:cNvSpPr txBox="1"/>
+          <p:nvPr/>
+        </p:nvSpPr>
+        <p:spPr>
+          <a:xfrm>
+            <a:off x="3493008" y="3794760"/>
+            <a:ext cx="2194560" cy="365760"/>
+          </a:xfrm>
+          <a:prstGeom prst="rect">
+            <a:avLst/>
+          </a:prstGeom>
+          <a:noFill/>
+        </p:spPr>
+        <p:txBody>
+          <a:bodyPr wrap="square" lIns="0" rIns="0" tIns="0" bIns="0" anchor="t"/>
+          <a:lstStyle/>
+          <a:p>
+            <a:pPr algn="l"/>
+            <a:r>
+              <a:rPr sz="1000" b="0">
+                <a:solidFill>
+                  <a:srgbClr val="8B949E"/>
+                </a:solidFill>
+                <a:latin typeface="Arial"/>
+              </a:rPr>
+              <a:t>2026 Q2 compared with 2025 Q2</a:t>
+            </a:r>
+          </a:p>
+        </p:txBody>
+      </p:sp>
+      <p:sp>
+        <p:nvSpPr>
+          <p:cNvPr id="20" name="Rounded Rectangle 19"/>
           <p:cNvSpPr/>
           <p:nvPr/>
         </p:nvSpPr>
         <p:spPr>
           <a:xfrm>
-            <a:off x="6080760" y="2560320"/>
-            <a:ext cx="2651760" cy="1783080"/>
+            <a:off x="6099048" y="2697480"/>
+            <a:ext cx="2560320" cy="1600200"/>
           </a:xfrm>
           <a:prstGeom prst="roundRect">
             <a:avLst>
-              <a:gd name="adj" fmla="val 4000"/>
+              <a:gd name="adj" fmla="val 5000"/>
             </a:avLst>
           </a:prstGeom>
           <a:solidFill>
@@ -6309,20 +4384,20 @@
       </p:sp>
       <p:sp>
         <p:nvSpPr>
-          <p:cNvPr id="15" name="Rectangle 14"/>
+          <p:cNvPr id="21" name="Rectangle 20"/>
           <p:cNvSpPr/>
           <p:nvPr/>
         </p:nvSpPr>
         <p:spPr>
           <a:xfrm>
-            <a:off x="6080760" y="2560320"/>
-            <a:ext cx="2651760" cy="54864"/>
+            <a:off x="6099048" y="2697480"/>
+            <a:ext cx="2560320" cy="54864"/>
           </a:xfrm>
           <a:prstGeom prst="rect">
             <a:avLst/>
           </a:prstGeom>
           <a:solidFill>
-            <a:srgbClr val="3FB950"/>
+            <a:srgbClr val="58A6FF"/>
           </a:solidFill>
           <a:ln>
             <a:noFill/>
@@ -6353,14 +4428,14 @@
       </p:sp>
       <p:sp>
         <p:nvSpPr>
-          <p:cNvPr id="16" name="TextBox 15"/>
+          <p:cNvPr id="22" name="TextBox 21"/>
           <p:cNvSpPr txBox="1"/>
           <p:nvPr/>
         </p:nvSpPr>
         <p:spPr>
           <a:xfrm>
-            <a:off x="6281928" y="2788920"/>
-            <a:ext cx="2249424" cy="548640"/>
+            <a:off x="6300216" y="2926080"/>
+            <a:ext cx="2194560" cy="548640"/>
           </a:xfrm>
           <a:prstGeom prst="rect">
             <a:avLst/>
@@ -6368,33 +4443,32 @@
           <a:noFill/>
         </p:spPr>
         <p:txBody>
-          <a:bodyPr wrap="square" anchor="t" lIns="0" rIns="0" tIns="0" bIns="0">
-            <a:spAutoFit/>
-          </a:bodyPr>
-          <a:lstStyle/>
-          <a:p>
+          <a:bodyPr wrap="square" lIns="0" rIns="0" tIns="0" bIns="0" anchor="t"/>
+          <a:lstStyle/>
+          <a:p>
+            <a:pPr algn="l"/>
             <a:r>
-              <a:rPr sz="3600" b="1">
+              <a:rPr sz="3200" b="1">
                 <a:solidFill>
-                  <a:srgbClr val="3FB950"/>
+                  <a:srgbClr val="F0F6FC"/>
                 </a:solidFill>
                 <a:latin typeface="Arial"/>
               </a:rPr>
-              <a:t>-77.5%</a:t>
+              <a:t>+64.0%</a:t>
             </a:r>
           </a:p>
         </p:txBody>
       </p:sp>
       <p:sp>
         <p:nvSpPr>
-          <p:cNvPr id="17" name="TextBox 16"/>
+          <p:cNvPr id="23" name="TextBox 22"/>
           <p:cNvSpPr txBox="1"/>
           <p:nvPr/>
         </p:nvSpPr>
         <p:spPr>
           <a:xfrm>
-            <a:off x="6281928" y="3429000"/>
-            <a:ext cx="2249424" cy="777240"/>
+            <a:off x="6300216" y="3520440"/>
+            <a:ext cx="2194560" cy="274320"/>
           </a:xfrm>
           <a:prstGeom prst="rect">
             <a:avLst/>
@@ -6402,33 +4476,32 @@
           <a:noFill/>
         </p:spPr>
         <p:txBody>
-          <a:bodyPr wrap="square" anchor="t" lIns="0" rIns="0" tIns="0" bIns="0">
-            <a:spAutoFit/>
-          </a:bodyPr>
-          <a:lstStyle/>
-          <a:p>
+          <a:bodyPr wrap="square" lIns="0" rIns="0" tIns="0" bIns="0" anchor="t"/>
+          <a:lstStyle/>
+          <a:p>
+            <a:pPr algn="l"/>
             <a:r>
-              <a:rPr sz="1400" b="0">
+              <a:rPr sz="1200" b="1">
                 <a:solidFill>
-                  <a:srgbClr val="B1BAC4"/>
+                  <a:srgbClr val="58A6FF"/>
                 </a:solidFill>
                 <a:latin typeface="Arial"/>
               </a:rPr>
-              <a:t>Change in refinance loans, 2020 peak to 2025</a:t>
+              <a:t>Change since 2019 Q4</a:t>
             </a:r>
           </a:p>
         </p:txBody>
       </p:sp>
       <p:sp>
         <p:nvSpPr>
-          <p:cNvPr id="18" name="TextBox 17"/>
+          <p:cNvPr id="24" name="TextBox 23"/>
           <p:cNvSpPr txBox="1"/>
           <p:nvPr/>
         </p:nvSpPr>
         <p:spPr>
           <a:xfrm>
-            <a:off x="411480" y="4663440"/>
-            <a:ext cx="8321040" cy="365760"/>
+            <a:off x="6300216" y="3794760"/>
+            <a:ext cx="2194560" cy="365760"/>
           </a:xfrm>
           <a:prstGeom prst="rect">
             <a:avLst/>
@@ -6436,35 +4509,51 @@
           <a:noFill/>
         </p:spPr>
         <p:txBody>
-          <a:bodyPr wrap="square" anchor="t" lIns="0" rIns="0" tIns="0" bIns="0">
-            <a:spAutoFit/>
-          </a:bodyPr>
-          <a:lstStyle/>
-          <a:p>
+          <a:bodyPr wrap="square" lIns="0" rIns="0" tIns="0" bIns="0" anchor="t"/>
+          <a:lstStyle/>
+          <a:p>
+            <a:pPr algn="l"/>
             <a:r>
-              <a:rPr sz="800" b="0">
+              <a:rPr sz="1000" b="0">
                 <a:solidFill>
                   <a:srgbClr val="8B949E"/>
                 </a:solidFill>
                 <a:latin typeface="Arial"/>
               </a:rPr>
-              <a:t>Sources: FHFA House Price Index, purchase-only (latest Jul 2026); CFPB HMDA originations (latest 2025).</a:t>
+              <a:t>Last quarter before the pandemic</a:t>
             </a:r>
           </a:p>
-          <a:p>
-            <a:pPr>
-              <a:spcBef>
-                <a:spcPts val="320"/>
-              </a:spcBef>
-            </a:pPr>
+        </p:txBody>
+      </p:sp>
+      <p:sp>
+        <p:nvSpPr>
+          <p:cNvPr id="25" name="TextBox 24"/>
+          <p:cNvSpPr txBox="1"/>
+          <p:nvPr/>
+        </p:nvSpPr>
+        <p:spPr>
+          <a:xfrm>
+            <a:off x="484632" y="4553712"/>
+            <a:ext cx="8138160" cy="182880"/>
+          </a:xfrm>
+          <a:prstGeom prst="rect">
+            <a:avLst/>
+          </a:prstGeom>
+          <a:noFill/>
+        </p:spPr>
+        <p:txBody>
+          <a:bodyPr wrap="square" lIns="0" rIns="0" tIns="0" bIns="0" anchor="t"/>
+          <a:lstStyle/>
+          <a:p>
+            <a:pPr algn="l"/>
             <a:r>
-              <a:rPr sz="800" b="0">
+              <a:rPr sz="900" b="0">
                 <a:solidFill>
                   <a:srgbClr val="8B949E"/>
                 </a:solidFill>
                 <a:latin typeface="Arial"/>
               </a:rPr>
-              <a:t>Built from public FHFA and CFPB data. Not an official Fannie Mae, FHFA, or CFPB product.</a:t>
+              <a:t>Source: FHFA House Price Index, purchase-only, not seasonally adjusted (1991 Q1 = 100). Latest period: 2026 Q2.</a:t>
             </a:r>
           </a:p>
         </p:txBody>
@@ -6497,14 +4586,62 @@
       <p:grpSpPr/>
       <p:sp>
         <p:nvSpPr>
-          <p:cNvPr id="2" name="TextBox 1"/>
+          <p:cNvPr id="2" name="Rounded Rectangle 1"/>
+          <p:cNvSpPr/>
+          <p:nvPr/>
+        </p:nvSpPr>
+        <p:spPr>
+          <a:xfrm>
+            <a:off x="7004304" y="146304"/>
+            <a:ext cx="1536192" cy="283464"/>
+          </a:xfrm>
+          <a:prstGeom prst="roundRect">
+            <a:avLst>
+              <a:gd name="adj" fmla="val 19000"/>
+            </a:avLst>
+          </a:prstGeom>
+          <a:solidFill>
+            <a:srgbClr val="1A5D2A"/>
+          </a:solidFill>
+          <a:ln w="12700">
+            <a:solidFill>
+              <a:srgbClr val="2EA043"/>
+            </a:solidFill>
+          </a:ln>
+          <a:effectLst/>
+        </p:spPr>
+        <p:style>
+          <a:lnRef idx="1">
+            <a:schemeClr val="accent1"/>
+          </a:lnRef>
+          <a:fillRef idx="3">
+            <a:schemeClr val="accent1"/>
+          </a:fillRef>
+          <a:effectRef idx="2">
+            <a:schemeClr val="accent1"/>
+          </a:effectRef>
+          <a:fontRef idx="minor">
+            <a:schemeClr val="lt1"/>
+          </a:fontRef>
+        </p:style>
+        <p:txBody>
+          <a:bodyPr rtlCol="0" anchor="ctr"/>
+          <a:lstStyle/>
+          <a:p>
+            <a:pPr algn="ctr"/>
+          </a:p>
+        </p:txBody>
+      </p:sp>
+      <p:sp>
+        <p:nvSpPr>
+          <p:cNvPr id="3" name="TextBox 2"/>
           <p:cNvSpPr txBox="1"/>
           <p:nvPr/>
         </p:nvSpPr>
         <p:spPr>
           <a:xfrm>
-            <a:off x="411480" y="274320"/>
-            <a:ext cx="8321040" cy="228600"/>
+            <a:off x="7004304" y="146304"/>
+            <a:ext cx="1536192" cy="283464"/>
           </a:xfrm>
           <a:prstGeom prst="rect">
             <a:avLst/>
@@ -6512,33 +4649,56 @@
           <a:noFill/>
         </p:spPr>
         <p:txBody>
-          <a:bodyPr wrap="square" anchor="t" lIns="0" rIns="0" tIns="0" bIns="0">
-            <a:spAutoFit/>
-          </a:bodyPr>
-          <a:lstStyle/>
-          <a:p>
+          <a:bodyPr wrap="square" lIns="0" rIns="0" tIns="0" bIns="0" anchor="ctr"/>
+          <a:lstStyle/>
+          <a:p>
+            <a:pPr algn="ctr"/>
             <a:r>
-              <a:rPr sz="1050" b="1">
+              <a:rPr sz="1000" b="1">
                 <a:solidFill>
-                  <a:srgbClr val="58A6FF"/>
+                  <a:srgbClr val="FFFFFF"/>
                 </a:solidFill>
                 <a:latin typeface="Arial"/>
               </a:rPr>
-              <a:t>01  WHERE PRICES ARE NOW</a:t>
+              <a:t>Data through 2026 Q2</a:t>
             </a:r>
           </a:p>
         </p:txBody>
       </p:sp>
-      <p:sp>
-        <p:nvSpPr>
-          <p:cNvPr id="3" name="TextBox 2"/>
+      <p:pic>
+        <p:nvPicPr>
+          <p:cNvPr id="4" name="Picture 3" descr=".logo.png"/>
+          <p:cNvPicPr>
+            <a:picLocks noChangeAspect="1"/>
+          </p:cNvPicPr>
+          <p:nvPr/>
+        </p:nvPicPr>
+        <p:blipFill>
+          <a:blip r:embed="rId2"/>
+          <a:stretch>
+            <a:fillRect/>
+          </a:stretch>
+        </p:blipFill>
+        <p:spPr>
+          <a:xfrm>
+            <a:off x="8668512" y="137160"/>
+            <a:ext cx="301752" cy="301752"/>
+          </a:xfrm>
+          <a:prstGeom prst="rect">
+            <a:avLst/>
+          </a:prstGeom>
+        </p:spPr>
+      </p:pic>
+      <p:sp>
+        <p:nvSpPr>
+          <p:cNvPr id="5" name="TextBox 4"/>
           <p:cNvSpPr txBox="1"/>
           <p:nvPr/>
         </p:nvSpPr>
         <p:spPr>
           <a:xfrm>
-            <a:off x="411480" y="512064"/>
-            <a:ext cx="8321040" cy="731520"/>
+            <a:off x="484632" y="384048"/>
+            <a:ext cx="6400800" cy="182880"/>
           </a:xfrm>
           <a:prstGeom prst="rect">
             <a:avLst/>
@@ -6546,37 +4706,168 @@
           <a:noFill/>
         </p:spPr>
         <p:txBody>
-          <a:bodyPr wrap="square" anchor="t" lIns="0" rIns="0" tIns="0" bIns="0">
-            <a:spAutoFit/>
-          </a:bodyPr>
-          <a:lstStyle/>
-          <a:p>
+          <a:bodyPr wrap="square" lIns="0" rIns="0" tIns="0" bIns="0" anchor="t"/>
+          <a:lstStyle/>
+          <a:p>
+            <a:pPr algn="l"/>
             <a:r>
-              <a:rPr sz="2200" b="1">
+              <a:rPr sz="1100" b="1">
+                <a:solidFill>
+                  <a:srgbClr val="2EA043"/>
+                </a:solidFill>
+                <a:latin typeface="Arial"/>
+              </a:rPr>
+              <a:t>WHERE PRICES ARE NOW</a:t>
+            </a:r>
+          </a:p>
+        </p:txBody>
+      </p:sp>
+      <p:sp>
+        <p:nvSpPr>
+          <p:cNvPr id="6" name="TextBox 5"/>
+          <p:cNvSpPr txBox="1"/>
+          <p:nvPr/>
+        </p:nvSpPr>
+        <p:spPr>
+          <a:xfrm>
+            <a:off x="484632" y="603504"/>
+            <a:ext cx="8138160" cy="777240"/>
+          </a:xfrm>
+          <a:prstGeom prst="rect">
+            <a:avLst/>
+          </a:prstGeom>
+          <a:noFill/>
+        </p:spPr>
+        <p:txBody>
+          <a:bodyPr wrap="square" lIns="0" rIns="0" tIns="0" bIns="0" anchor="t"/>
+          <a:lstStyle/>
+          <a:p>
+            <a:pPr algn="l"/>
+            <a:r>
+              <a:rPr sz="2400" b="1">
                 <a:solidFill>
                   <a:srgbClr val="F0F6FC"/>
                 </a:solidFill>
                 <a:latin typeface="Arial"/>
               </a:rPr>
-              <a:t>U.S. home prices are at a record high and 59.3% above January 2020</a:t>
+              <a:t>The U.S. price index is at a record high, 64% above its pre-pandemic level</a:t>
             </a:r>
           </a:p>
         </p:txBody>
       </p:sp>
       <p:sp>
         <p:nvSpPr>
-          <p:cNvPr id="4" name="Rounded Rectangle 3"/>
+          <p:cNvPr id="7" name="TextBox 6"/>
+          <p:cNvSpPr txBox="1"/>
+          <p:nvPr/>
+        </p:nvSpPr>
+        <p:spPr>
+          <a:xfrm>
+            <a:off x="484632" y="1463040"/>
+            <a:ext cx="8138160" cy="228600"/>
+          </a:xfrm>
+          <a:prstGeom prst="rect">
+            <a:avLst/>
+          </a:prstGeom>
+          <a:noFill/>
+        </p:spPr>
+        <p:txBody>
+          <a:bodyPr wrap="square" lIns="0" rIns="0" tIns="0" bIns="0" anchor="t"/>
+          <a:lstStyle/>
+          <a:p>
+            <a:pPr algn="l"/>
+            <a:r>
+              <a:rPr sz="1300" b="0">
+                <a:solidFill>
+                  <a:srgbClr val="B1BAC4"/>
+                </a:solidFill>
+                <a:latin typeface="Arial"/>
+              </a:rPr>
+              <a:t>Quarterly U.S. house price index, 1991 Q1 to 2026 Q2. Most of the gain since 2019 came from 2020 to 2022.</a:t>
+            </a:r>
+          </a:p>
+        </p:txBody>
+      </p:sp>
+      <p:sp>
+        <p:nvSpPr>
+          <p:cNvPr id="8" name="TextBox 7"/>
+          <p:cNvSpPr txBox="1"/>
+          <p:nvPr/>
+        </p:nvSpPr>
+        <p:spPr>
+          <a:xfrm>
+            <a:off x="484632" y="4553712"/>
+            <a:ext cx="8138160" cy="182880"/>
+          </a:xfrm>
+          <a:prstGeom prst="rect">
+            <a:avLst/>
+          </a:prstGeom>
+          <a:noFill/>
+        </p:spPr>
+        <p:txBody>
+          <a:bodyPr wrap="square" lIns="0" rIns="0" tIns="0" bIns="0" anchor="t"/>
+          <a:lstStyle/>
+          <a:p>
+            <a:pPr algn="l"/>
+            <a:r>
+              <a:rPr sz="900" b="0">
+                <a:solidFill>
+                  <a:srgbClr val="8B949E"/>
+                </a:solidFill>
+                <a:latin typeface="Arial"/>
+              </a:rPr>
+              <a:t>Source: FHFA House Price Index, purchase-only, not seasonally adjusted (1991 Q1 = 100). Latest period: 2026 Q2.</a:t>
+            </a:r>
+          </a:p>
+        </p:txBody>
+      </p:sp>
+      <p:sp>
+        <p:nvSpPr>
+          <p:cNvPr id="9" name="TextBox 8"/>
+          <p:cNvSpPr txBox="1"/>
+          <p:nvPr/>
+        </p:nvSpPr>
+        <p:spPr>
+          <a:xfrm>
+            <a:off x="484632" y="4791456"/>
+            <a:ext cx="8138160" cy="182880"/>
+          </a:xfrm>
+          <a:prstGeom prst="rect">
+            <a:avLst/>
+          </a:prstGeom>
+          <a:noFill/>
+        </p:spPr>
+        <p:txBody>
+          <a:bodyPr wrap="square" lIns="0" rIns="0" tIns="0" bIns="0" anchor="t"/>
+          <a:lstStyle/>
+          <a:p>
+            <a:pPr algn="l"/>
+            <a:r>
+              <a:rPr sz="800" b="0">
+                <a:solidFill>
+                  <a:srgbClr val="8B949E"/>
+                </a:solidFill>
+                <a:latin typeface="Arial"/>
+              </a:rPr>
+              <a:t>Built from public FHFA and CFPB data. Not an official Fannie Mae, FHFA, or CFPB product.</a:t>
+            </a:r>
+          </a:p>
+        </p:txBody>
+      </p:sp>
+      <p:sp>
+        <p:nvSpPr>
+          <p:cNvPr id="10" name="Rounded Rectangle 9"/>
           <p:cNvSpPr/>
           <p:nvPr/>
         </p:nvSpPr>
         <p:spPr>
           <a:xfrm>
-            <a:off x="411480" y="1325880"/>
-            <a:ext cx="8321040" cy="3200400"/>
+            <a:off x="484632" y="1828800"/>
+            <a:ext cx="8174736" cy="2651760"/>
           </a:xfrm>
           <a:prstGeom prst="roundRect">
             <a:avLst>
-              <a:gd name="adj" fmla="val 4000"/>
+              <a:gd name="adj" fmla="val 5000"/>
             </a:avLst>
           </a:prstGeom>
           <a:solidFill>
@@ -6611,17 +4902,50 @@
           </a:p>
         </p:txBody>
       </p:sp>
+      <p:sp>
+        <p:nvSpPr>
+          <p:cNvPr id="11" name="TextBox 10"/>
+          <p:cNvSpPr txBox="1"/>
+          <p:nvPr/>
+        </p:nvSpPr>
+        <p:spPr>
+          <a:xfrm>
+            <a:off x="685800" y="1920240"/>
+            <a:ext cx="7772400" cy="228600"/>
+          </a:xfrm>
+          <a:prstGeom prst="rect">
+            <a:avLst/>
+          </a:prstGeom>
+          <a:noFill/>
+        </p:spPr>
+        <p:txBody>
+          <a:bodyPr wrap="square" lIns="0" rIns="0" tIns="0" bIns="0" anchor="t"/>
+          <a:lstStyle/>
+          <a:p>
+            <a:pPr algn="l"/>
+            <a:r>
+              <a:rPr sz="1200" b="1">
+                <a:solidFill>
+                  <a:srgbClr val="F0F6FC"/>
+                </a:solidFill>
+                <a:latin typeface="Arial"/>
+              </a:rPr>
+              <a:t>U.S. house price index (1991 Q1 = 100), quarterly</a:t>
+            </a:r>
+          </a:p>
+        </p:txBody>
+      </p:sp>
       <p:graphicFrame>
         <p:nvGraphicFramePr>
-          <p:cNvPr id="5" name="Chart 4"/>
+          <p:cNvPr id="12" name="Chart 11"/>
           <p:cNvGraphicFramePr>
             <a:graphicFrameLocks noGrp="1"/>
           </p:cNvGraphicFramePr>
           <p:nvPr/>
         </p:nvGraphicFramePr>
         <p:xfrm>
-          <a:off x="502920" y="1399032"/>
-          <a:ext cx="8138160" cy="3054096"/>
+          <a:off x="594360" y="2148840"/>
+          <a:ext cx="7955279" cy="2286000"/>
         </p:xfrm>
         <a:graphic>
           <a:graphicData uri="http://schemas.openxmlformats.org/drawingml/2006/chart">
@@ -6629,56 +4953,6 @@
           </a:graphicData>
         </a:graphic>
       </p:graphicFrame>
-      <p:sp>
-        <p:nvSpPr>
-          <p:cNvPr id="6" name="TextBox 5"/>
-          <p:cNvSpPr txBox="1"/>
-          <p:nvPr/>
-        </p:nvSpPr>
-        <p:spPr>
-          <a:xfrm>
-            <a:off x="411480" y="4663440"/>
-            <a:ext cx="8321040" cy="365760"/>
-          </a:xfrm>
-          <a:prstGeom prst="rect">
-            <a:avLst/>
-          </a:prstGeom>
-          <a:noFill/>
-        </p:spPr>
-        <p:txBody>
-          <a:bodyPr wrap="square" anchor="t" lIns="0" rIns="0" tIns="0" bIns="0">
-            <a:spAutoFit/>
-          </a:bodyPr>
-          <a:lstStyle/>
-          <a:p>
-            <a:r>
-              <a:rPr sz="800" b="0">
-                <a:solidFill>
-                  <a:srgbClr val="8B949E"/>
-                </a:solidFill>
-                <a:latin typeface="Arial"/>
-              </a:rPr>
-              <a:t>Source: FHFA House Price Index, purchase-only. Latest period: Jul 2026. Seasonally adjusted index, 1991 Q1 = 100.</a:t>
-            </a:r>
-          </a:p>
-          <a:p>
-            <a:pPr>
-              <a:spcBef>
-                <a:spcPts val="320"/>
-              </a:spcBef>
-            </a:pPr>
-            <a:r>
-              <a:rPr sz="800" b="0">
-                <a:solidFill>
-                  <a:srgbClr val="8B949E"/>
-                </a:solidFill>
-                <a:latin typeface="Arial"/>
-              </a:rPr>
-              <a:t>Built from public FHFA and CFPB data. Not an official Fannie Mae, FHFA, or CFPB product.</a:t>
-            </a:r>
-          </a:p>
-        </p:txBody>
-      </p:sp>
     </p:spTree>
   </p:cSld>
   <p:clrMapOvr>
@@ -6707,14 +4981,62 @@
       <p:grpSpPr/>
       <p:sp>
         <p:nvSpPr>
-          <p:cNvPr id="2" name="TextBox 1"/>
+          <p:cNvPr id="2" name="Rounded Rectangle 1"/>
+          <p:cNvSpPr/>
+          <p:nvPr/>
+        </p:nvSpPr>
+        <p:spPr>
+          <a:xfrm>
+            <a:off x="7004304" y="146304"/>
+            <a:ext cx="1536192" cy="283464"/>
+          </a:xfrm>
+          <a:prstGeom prst="roundRect">
+            <a:avLst>
+              <a:gd name="adj" fmla="val 19000"/>
+            </a:avLst>
+          </a:prstGeom>
+          <a:solidFill>
+            <a:srgbClr val="1A5D2A"/>
+          </a:solidFill>
+          <a:ln w="12700">
+            <a:solidFill>
+              <a:srgbClr val="2EA043"/>
+            </a:solidFill>
+          </a:ln>
+          <a:effectLst/>
+        </p:spPr>
+        <p:style>
+          <a:lnRef idx="1">
+            <a:schemeClr val="accent1"/>
+          </a:lnRef>
+          <a:fillRef idx="3">
+            <a:schemeClr val="accent1"/>
+          </a:fillRef>
+          <a:effectRef idx="2">
+            <a:schemeClr val="accent1"/>
+          </a:effectRef>
+          <a:fontRef idx="minor">
+            <a:schemeClr val="lt1"/>
+          </a:fontRef>
+        </p:style>
+        <p:txBody>
+          <a:bodyPr rtlCol="0" anchor="ctr"/>
+          <a:lstStyle/>
+          <a:p>
+            <a:pPr algn="ctr"/>
+          </a:p>
+        </p:txBody>
+      </p:sp>
+      <p:sp>
+        <p:nvSpPr>
+          <p:cNvPr id="3" name="TextBox 2"/>
           <p:cNvSpPr txBox="1"/>
           <p:nvPr/>
         </p:nvSpPr>
         <p:spPr>
           <a:xfrm>
-            <a:off x="411480" y="274320"/>
-            <a:ext cx="8321040" cy="228600"/>
+            <a:off x="7004304" y="146304"/>
+            <a:ext cx="1536192" cy="283464"/>
           </a:xfrm>
           <a:prstGeom prst="rect">
             <a:avLst/>
@@ -6722,33 +5044,56 @@
           <a:noFill/>
         </p:spPr>
         <p:txBody>
-          <a:bodyPr wrap="square" anchor="t" lIns="0" rIns="0" tIns="0" bIns="0">
-            <a:spAutoFit/>
-          </a:bodyPr>
-          <a:lstStyle/>
-          <a:p>
+          <a:bodyPr wrap="square" lIns="0" rIns="0" tIns="0" bIns="0" anchor="ctr"/>
+          <a:lstStyle/>
+          <a:p>
+            <a:pPr algn="ctr"/>
             <a:r>
-              <a:rPr sz="1050" b="1">
+              <a:rPr sz="1000" b="1">
                 <a:solidFill>
-                  <a:srgbClr val="58A6FF"/>
+                  <a:srgbClr val="FFFFFF"/>
                 </a:solidFill>
                 <a:latin typeface="Arial"/>
               </a:rPr>
-              <a:t>02  HOW FAST PRICES CHANGED</a:t>
+              <a:t>Data through 2026 Q2</a:t>
             </a:r>
           </a:p>
         </p:txBody>
       </p:sp>
-      <p:sp>
-        <p:nvSpPr>
-          <p:cNvPr id="3" name="TextBox 2"/>
+      <p:pic>
+        <p:nvPicPr>
+          <p:cNvPr id="4" name="Picture 3" descr=".logo.png"/>
+          <p:cNvPicPr>
+            <a:picLocks noChangeAspect="1"/>
+          </p:cNvPicPr>
+          <p:nvPr/>
+        </p:nvPicPr>
+        <p:blipFill>
+          <a:blip r:embed="rId2"/>
+          <a:stretch>
+            <a:fillRect/>
+          </a:stretch>
+        </p:blipFill>
+        <p:spPr>
+          <a:xfrm>
+            <a:off x="8668512" y="137160"/>
+            <a:ext cx="301752" cy="301752"/>
+          </a:xfrm>
+          <a:prstGeom prst="rect">
+            <a:avLst/>
+          </a:prstGeom>
+        </p:spPr>
+      </p:pic>
+      <p:sp>
+        <p:nvSpPr>
+          <p:cNvPr id="5" name="TextBox 4"/>
           <p:cNvSpPr txBox="1"/>
           <p:nvPr/>
         </p:nvSpPr>
         <p:spPr>
           <a:xfrm>
-            <a:off x="411480" y="512064"/>
-            <a:ext cx="8321040" cy="731520"/>
+            <a:off x="484632" y="384048"/>
+            <a:ext cx="6400800" cy="182880"/>
           </a:xfrm>
           <a:prstGeom prst="rect">
             <a:avLst/>
@@ -6756,37 +5101,168 @@
           <a:noFill/>
         </p:spPr>
         <p:txBody>
-          <a:bodyPr wrap="square" anchor="t" lIns="0" rIns="0" tIns="0" bIns="0">
-            <a:spAutoFit/>
-          </a:bodyPr>
-          <a:lstStyle/>
-          <a:p>
+          <a:bodyPr wrap="square" lIns="0" rIns="0" tIns="0" bIns="0" anchor="t"/>
+          <a:lstStyle/>
+          <a:p>
+            <a:pPr algn="l"/>
             <a:r>
-              <a:rPr sz="2200" b="1">
+              <a:rPr sz="1100" b="1">
+                <a:solidFill>
+                  <a:srgbClr val="2EA043"/>
+                </a:solidFill>
+                <a:latin typeface="Arial"/>
+              </a:rPr>
+              <a:t>HOW FAST PRICES CHANGED</a:t>
+            </a:r>
+          </a:p>
+        </p:txBody>
+      </p:sp>
+      <p:sp>
+        <p:nvSpPr>
+          <p:cNvPr id="6" name="TextBox 5"/>
+          <p:cNvSpPr txBox="1"/>
+          <p:nvPr/>
+        </p:nvSpPr>
+        <p:spPr>
+          <a:xfrm>
+            <a:off x="484632" y="603504"/>
+            <a:ext cx="8138160" cy="777240"/>
+          </a:xfrm>
+          <a:prstGeom prst="rect">
+            <a:avLst/>
+          </a:prstGeom>
+          <a:noFill/>
+        </p:spPr>
+        <p:txBody>
+          <a:bodyPr wrap="square" lIns="0" rIns="0" tIns="0" bIns="0" anchor="t"/>
+          <a:lstStyle/>
+          <a:p>
+            <a:pPr algn="l"/>
+            <a:r>
+              <a:rPr sz="2400" b="1">
                 <a:solidFill>
                   <a:srgbClr val="F0F6FC"/>
                 </a:solidFill>
                 <a:latin typeface="Arial"/>
               </a:rPr>
-              <a:t>Annual price growth slowed from +18.9% in Jul 2021 to +2.6% in Jul 2026</a:t>
+              <a:t>Annual price growth fell from 18.2% in 2021 Q3 to 2.3% in 2026 Q2</a:t>
             </a:r>
           </a:p>
         </p:txBody>
       </p:sp>
       <p:sp>
         <p:nvSpPr>
-          <p:cNvPr id="4" name="Rounded Rectangle 3"/>
+          <p:cNvPr id="7" name="TextBox 6"/>
+          <p:cNvSpPr txBox="1"/>
+          <p:nvPr/>
+        </p:nvSpPr>
+        <p:spPr>
+          <a:xfrm>
+            <a:off x="484632" y="1463040"/>
+            <a:ext cx="8138160" cy="228600"/>
+          </a:xfrm>
+          <a:prstGeom prst="rect">
+            <a:avLst/>
+          </a:prstGeom>
+          <a:noFill/>
+        </p:spPr>
+        <p:txBody>
+          <a:bodyPr wrap="square" lIns="0" rIns="0" tIns="0" bIns="0" anchor="t"/>
+          <a:lstStyle/>
+          <a:p>
+            <a:pPr algn="l"/>
+            <a:r>
+              <a:rPr sz="1300" b="0">
+                <a:solidFill>
+                  <a:srgbClr val="B1BAC4"/>
+                </a:solidFill>
+                <a:latin typeface="Arial"/>
+              </a:rPr>
+              <a:t>Year-over-year change in the U.S. index, by quarter. Prices still rise, but at a much lower rate.</a:t>
+            </a:r>
+          </a:p>
+        </p:txBody>
+      </p:sp>
+      <p:sp>
+        <p:nvSpPr>
+          <p:cNvPr id="8" name="TextBox 7"/>
+          <p:cNvSpPr txBox="1"/>
+          <p:nvPr/>
+        </p:nvSpPr>
+        <p:spPr>
+          <a:xfrm>
+            <a:off x="484632" y="4553712"/>
+            <a:ext cx="8138160" cy="182880"/>
+          </a:xfrm>
+          <a:prstGeom prst="rect">
+            <a:avLst/>
+          </a:prstGeom>
+          <a:noFill/>
+        </p:spPr>
+        <p:txBody>
+          <a:bodyPr wrap="square" lIns="0" rIns="0" tIns="0" bIns="0" anchor="t"/>
+          <a:lstStyle/>
+          <a:p>
+            <a:pPr algn="l"/>
+            <a:r>
+              <a:rPr sz="900" b="0">
+                <a:solidFill>
+                  <a:srgbClr val="8B949E"/>
+                </a:solidFill>
+                <a:latin typeface="Arial"/>
+              </a:rPr>
+              <a:t>Source: FHFA House Price Index, purchase-only, not seasonally adjusted (1991 Q1 = 100). Latest period: 2026 Q2.</a:t>
+            </a:r>
+          </a:p>
+        </p:txBody>
+      </p:sp>
+      <p:sp>
+        <p:nvSpPr>
+          <p:cNvPr id="9" name="TextBox 8"/>
+          <p:cNvSpPr txBox="1"/>
+          <p:nvPr/>
+        </p:nvSpPr>
+        <p:spPr>
+          <a:xfrm>
+            <a:off x="484632" y="4791456"/>
+            <a:ext cx="8138160" cy="182880"/>
+          </a:xfrm>
+          <a:prstGeom prst="rect">
+            <a:avLst/>
+          </a:prstGeom>
+          <a:noFill/>
+        </p:spPr>
+        <p:txBody>
+          <a:bodyPr wrap="square" lIns="0" rIns="0" tIns="0" bIns="0" anchor="t"/>
+          <a:lstStyle/>
+          <a:p>
+            <a:pPr algn="l"/>
+            <a:r>
+              <a:rPr sz="800" b="0">
+                <a:solidFill>
+                  <a:srgbClr val="8B949E"/>
+                </a:solidFill>
+                <a:latin typeface="Arial"/>
+              </a:rPr>
+              <a:t>Built from public FHFA and CFPB data. Not an official Fannie Mae, FHFA, or CFPB product.</a:t>
+            </a:r>
+          </a:p>
+        </p:txBody>
+      </p:sp>
+      <p:sp>
+        <p:nvSpPr>
+          <p:cNvPr id="10" name="Rounded Rectangle 9"/>
           <p:cNvSpPr/>
           <p:nvPr/>
         </p:nvSpPr>
         <p:spPr>
           <a:xfrm>
-            <a:off x="411480" y="1325880"/>
-            <a:ext cx="8321040" cy="3200400"/>
+            <a:off x="484632" y="1828800"/>
+            <a:ext cx="8174736" cy="2651760"/>
           </a:xfrm>
           <a:prstGeom prst="roundRect">
             <a:avLst>
-              <a:gd name="adj" fmla="val 4000"/>
+              <a:gd name="adj" fmla="val 5000"/>
             </a:avLst>
           </a:prstGeom>
           <a:solidFill>
@@ -6821,17 +5297,50 @@
           </a:p>
         </p:txBody>
       </p:sp>
+      <p:sp>
+        <p:nvSpPr>
+          <p:cNvPr id="11" name="TextBox 10"/>
+          <p:cNvSpPr txBox="1"/>
+          <p:nvPr/>
+        </p:nvSpPr>
+        <p:spPr>
+          <a:xfrm>
+            <a:off x="685800" y="1920240"/>
+            <a:ext cx="7772400" cy="228600"/>
+          </a:xfrm>
+          <a:prstGeom prst="rect">
+            <a:avLst/>
+          </a:prstGeom>
+          <a:noFill/>
+        </p:spPr>
+        <p:txBody>
+          <a:bodyPr wrap="square" lIns="0" rIns="0" tIns="0" bIns="0" anchor="t"/>
+          <a:lstStyle/>
+          <a:p>
+            <a:pPr algn="l"/>
+            <a:r>
+              <a:rPr sz="1200" b="1">
+                <a:solidFill>
+                  <a:srgbClr val="F0F6FC"/>
+                </a:solidFill>
+                <a:latin typeface="Arial"/>
+              </a:rPr>
+              <a:t>U.S. house prices: change from the same quarter one year earlier (%)</a:t>
+            </a:r>
+          </a:p>
+        </p:txBody>
+      </p:sp>
       <p:graphicFrame>
         <p:nvGraphicFramePr>
-          <p:cNvPr id="5" name="Chart 4"/>
+          <p:cNvPr id="12" name="Chart 11"/>
           <p:cNvGraphicFramePr>
             <a:graphicFrameLocks noGrp="1"/>
           </p:cNvGraphicFramePr>
           <p:nvPr/>
         </p:nvGraphicFramePr>
         <p:xfrm>
-          <a:off x="502920" y="1399032"/>
-          <a:ext cx="8138160" cy="3054096"/>
+          <a:off x="594360" y="2148840"/>
+          <a:ext cx="7955279" cy="2286000"/>
         </p:xfrm>
         <a:graphic>
           <a:graphicData uri="http://schemas.openxmlformats.org/drawingml/2006/chart">
@@ -6839,56 +5348,6 @@
           </a:graphicData>
         </a:graphic>
       </p:graphicFrame>
-      <p:sp>
-        <p:nvSpPr>
-          <p:cNvPr id="6" name="TextBox 5"/>
-          <p:cNvSpPr txBox="1"/>
-          <p:nvPr/>
-        </p:nvSpPr>
-        <p:spPr>
-          <a:xfrm>
-            <a:off x="411480" y="4663440"/>
-            <a:ext cx="8321040" cy="365760"/>
-          </a:xfrm>
-          <a:prstGeom prst="rect">
-            <a:avLst/>
-          </a:prstGeom>
-          <a:noFill/>
-        </p:spPr>
-        <p:txBody>
-          <a:bodyPr wrap="square" anchor="t" lIns="0" rIns="0" tIns="0" bIns="0">
-            <a:spAutoFit/>
-          </a:bodyPr>
-          <a:lstStyle/>
-          <a:p>
-            <a:r>
-              <a:rPr sz="800" b="0">
-                <a:solidFill>
-                  <a:srgbClr val="8B949E"/>
-                </a:solidFill>
-                <a:latin typeface="Arial"/>
-              </a:rPr>
-              <a:t>Source: FHFA House Price Index, purchase-only. Latest period: Jul 2026. Year-over-year change uses the non-seasonally adjusted index.</a:t>
-            </a:r>
-          </a:p>
-          <a:p>
-            <a:pPr>
-              <a:spcBef>
-                <a:spcPts val="320"/>
-              </a:spcBef>
-            </a:pPr>
-            <a:r>
-              <a:rPr sz="800" b="0">
-                <a:solidFill>
-                  <a:srgbClr val="8B949E"/>
-                </a:solidFill>
-                <a:latin typeface="Arial"/>
-              </a:rPr>
-              <a:t>Built from public FHFA and CFPB data. Not an official Fannie Mae, FHFA, or CFPB product.</a:t>
-            </a:r>
-          </a:p>
-        </p:txBody>
-      </p:sp>
     </p:spTree>
   </p:cSld>
   <p:clrMapOvr>
@@ -6917,14 +5376,62 @@
       <p:grpSpPr/>
       <p:sp>
         <p:nvSpPr>
-          <p:cNvPr id="2" name="TextBox 1"/>
+          <p:cNvPr id="2" name="Rounded Rectangle 1"/>
+          <p:cNvSpPr/>
+          <p:nvPr/>
+        </p:nvSpPr>
+        <p:spPr>
+          <a:xfrm>
+            <a:off x="7004304" y="146304"/>
+            <a:ext cx="1536192" cy="283464"/>
+          </a:xfrm>
+          <a:prstGeom prst="roundRect">
+            <a:avLst>
+              <a:gd name="adj" fmla="val 19000"/>
+            </a:avLst>
+          </a:prstGeom>
+          <a:solidFill>
+            <a:srgbClr val="1A5D2A"/>
+          </a:solidFill>
+          <a:ln w="12700">
+            <a:solidFill>
+              <a:srgbClr val="2EA043"/>
+            </a:solidFill>
+          </a:ln>
+          <a:effectLst/>
+        </p:spPr>
+        <p:style>
+          <a:lnRef idx="1">
+            <a:schemeClr val="accent1"/>
+          </a:lnRef>
+          <a:fillRef idx="3">
+            <a:schemeClr val="accent1"/>
+          </a:fillRef>
+          <a:effectRef idx="2">
+            <a:schemeClr val="accent1"/>
+          </a:effectRef>
+          <a:fontRef idx="minor">
+            <a:schemeClr val="lt1"/>
+          </a:fontRef>
+        </p:style>
+        <p:txBody>
+          <a:bodyPr rtlCol="0" anchor="ctr"/>
+          <a:lstStyle/>
+          <a:p>
+            <a:pPr algn="ctr"/>
+          </a:p>
+        </p:txBody>
+      </p:sp>
+      <p:sp>
+        <p:nvSpPr>
+          <p:cNvPr id="3" name="TextBox 2"/>
           <p:cNvSpPr txBox="1"/>
           <p:nvPr/>
         </p:nvSpPr>
         <p:spPr>
           <a:xfrm>
-            <a:off x="411480" y="274320"/>
-            <a:ext cx="8321040" cy="228600"/>
+            <a:off x="7004304" y="146304"/>
+            <a:ext cx="1536192" cy="283464"/>
           </a:xfrm>
           <a:prstGeom prst="rect">
             <a:avLst/>
@@ -6932,33 +5439,56 @@
           <a:noFill/>
         </p:spPr>
         <p:txBody>
-          <a:bodyPr wrap="square" anchor="t" lIns="0" rIns="0" tIns="0" bIns="0">
-            <a:spAutoFit/>
-          </a:bodyPr>
-          <a:lstStyle/>
-          <a:p>
+          <a:bodyPr wrap="square" lIns="0" rIns="0" tIns="0" bIns="0" anchor="ctr"/>
+          <a:lstStyle/>
+          <a:p>
+            <a:pPr algn="ctr"/>
             <a:r>
-              <a:rPr sz="1050" b="1">
+              <a:rPr sz="1000" b="1">
                 <a:solidFill>
-                  <a:srgbClr val="58A6FF"/>
+                  <a:srgbClr val="FFFFFF"/>
                 </a:solidFill>
                 <a:latin typeface="Arial"/>
               </a:rPr>
-              <a:t>03  STATES THAT LEAD AND LAG</a:t>
+              <a:t>Data through 2026 Q2</a:t>
             </a:r>
           </a:p>
         </p:txBody>
       </p:sp>
-      <p:sp>
-        <p:nvSpPr>
-          <p:cNvPr id="3" name="TextBox 2"/>
+      <p:pic>
+        <p:nvPicPr>
+          <p:cNvPr id="4" name="Picture 3" descr=".logo.png"/>
+          <p:cNvPicPr>
+            <a:picLocks noChangeAspect="1"/>
+          </p:cNvPicPr>
+          <p:nvPr/>
+        </p:nvPicPr>
+        <p:blipFill>
+          <a:blip r:embed="rId2"/>
+          <a:stretch>
+            <a:fillRect/>
+          </a:stretch>
+        </p:blipFill>
+        <p:spPr>
+          <a:xfrm>
+            <a:off x="8668512" y="137160"/>
+            <a:ext cx="301752" cy="301752"/>
+          </a:xfrm>
+          <a:prstGeom prst="rect">
+            <a:avLst/>
+          </a:prstGeom>
+        </p:spPr>
+      </p:pic>
+      <p:sp>
+        <p:nvSpPr>
+          <p:cNvPr id="5" name="TextBox 4"/>
           <p:cNvSpPr txBox="1"/>
           <p:nvPr/>
         </p:nvSpPr>
         <p:spPr>
           <a:xfrm>
-            <a:off x="411480" y="512064"/>
-            <a:ext cx="8321040" cy="731520"/>
+            <a:off x="484632" y="384048"/>
+            <a:ext cx="6400800" cy="182880"/>
           </a:xfrm>
           <a:prstGeom prst="rect">
             <a:avLst/>
@@ -6966,37 +5496,168 @@
           <a:noFill/>
         </p:spPr>
         <p:txBody>
-          <a:bodyPr wrap="square" anchor="t" lIns="0" rIns="0" tIns="0" bIns="0">
-            <a:spAutoFit/>
-          </a:bodyPr>
-          <a:lstStyle/>
-          <a:p>
+          <a:bodyPr wrap="square" lIns="0" rIns="0" tIns="0" bIns="0" anchor="t"/>
+          <a:lstStyle/>
+          <a:p>
+            <a:pPr algn="l"/>
             <a:r>
-              <a:rPr sz="2200" b="1">
+              <a:rPr sz="1100" b="1">
+                <a:solidFill>
+                  <a:srgbClr val="2EA043"/>
+                </a:solidFill>
+                <a:latin typeface="Arial"/>
+              </a:rPr>
+              <a:t>LEADERS AND LAGGARDS: STATES</a:t>
+            </a:r>
+          </a:p>
+        </p:txBody>
+      </p:sp>
+      <p:sp>
+        <p:nvSpPr>
+          <p:cNvPr id="6" name="TextBox 5"/>
+          <p:cNvSpPr txBox="1"/>
+          <p:nvPr/>
+        </p:nvSpPr>
+        <p:spPr>
+          <a:xfrm>
+            <a:off x="484632" y="603504"/>
+            <a:ext cx="8138160" cy="777240"/>
+          </a:xfrm>
+          <a:prstGeom prst="rect">
+            <a:avLst/>
+          </a:prstGeom>
+          <a:noFill/>
+        </p:spPr>
+        <p:txBody>
+          <a:bodyPr wrap="square" lIns="0" rIns="0" tIns="0" bIns="0" anchor="t"/>
+          <a:lstStyle/>
+          <a:p>
+            <a:pPr algn="l"/>
+            <a:r>
+              <a:rPr sz="2400" b="1">
                 <a:solidFill>
                   <a:srgbClr val="F0F6FC"/>
                 </a:solidFill>
                 <a:latin typeface="Arial"/>
               </a:rPr>
-              <a:t>Alaska leads with +8.3% a year; New Mexico lags with -1.2%</a:t>
+              <a:t>Alaska leads at +8.3%; 4 states, with New Mexico last, show price declines</a:t>
             </a:r>
           </a:p>
         </p:txBody>
       </p:sp>
       <p:sp>
         <p:nvSpPr>
-          <p:cNvPr id="4" name="Rounded Rectangle 3"/>
+          <p:cNvPr id="7" name="TextBox 6"/>
+          <p:cNvSpPr txBox="1"/>
+          <p:nvPr/>
+        </p:nvSpPr>
+        <p:spPr>
+          <a:xfrm>
+            <a:off x="484632" y="1463040"/>
+            <a:ext cx="8138160" cy="228600"/>
+          </a:xfrm>
+          <a:prstGeom prst="rect">
+            <a:avLst/>
+          </a:prstGeom>
+          <a:noFill/>
+        </p:spPr>
+        <p:txBody>
+          <a:bodyPr wrap="square" lIns="0" rIns="0" tIns="0" bIns="0" anchor="t"/>
+          <a:lstStyle/>
+          <a:p>
+            <a:pPr algn="l"/>
+            <a:r>
+              <a:rPr sz="1300" b="0">
+                <a:solidFill>
+                  <a:srgbClr val="B1BAC4"/>
+                </a:solidFill>
+                <a:latin typeface="Arial"/>
+              </a:rPr>
+              <a:t>Five fastest and five slowest of 50 states and DC. U.S.: +2.3%. Blue = increase, orange = decrease.</a:t>
+            </a:r>
+          </a:p>
+        </p:txBody>
+      </p:sp>
+      <p:sp>
+        <p:nvSpPr>
+          <p:cNvPr id="8" name="TextBox 7"/>
+          <p:cNvSpPr txBox="1"/>
+          <p:nvPr/>
+        </p:nvSpPr>
+        <p:spPr>
+          <a:xfrm>
+            <a:off x="484632" y="4553712"/>
+            <a:ext cx="8138160" cy="182880"/>
+          </a:xfrm>
+          <a:prstGeom prst="rect">
+            <a:avLst/>
+          </a:prstGeom>
+          <a:noFill/>
+        </p:spPr>
+        <p:txBody>
+          <a:bodyPr wrap="square" lIns="0" rIns="0" tIns="0" bIns="0" anchor="t"/>
+          <a:lstStyle/>
+          <a:p>
+            <a:pPr algn="l"/>
+            <a:r>
+              <a:rPr sz="900" b="0">
+                <a:solidFill>
+                  <a:srgbClr val="8B949E"/>
+                </a:solidFill>
+                <a:latin typeface="Arial"/>
+              </a:rPr>
+              <a:t>Source: FHFA House Price Index, purchase-only, not seasonally adjusted (1991 Q1 = 100). Latest period: 2026 Q2.</a:t>
+            </a:r>
+          </a:p>
+        </p:txBody>
+      </p:sp>
+      <p:sp>
+        <p:nvSpPr>
+          <p:cNvPr id="9" name="TextBox 8"/>
+          <p:cNvSpPr txBox="1"/>
+          <p:nvPr/>
+        </p:nvSpPr>
+        <p:spPr>
+          <a:xfrm>
+            <a:off x="484632" y="4791456"/>
+            <a:ext cx="8138160" cy="182880"/>
+          </a:xfrm>
+          <a:prstGeom prst="rect">
+            <a:avLst/>
+          </a:prstGeom>
+          <a:noFill/>
+        </p:spPr>
+        <p:txBody>
+          <a:bodyPr wrap="square" lIns="0" rIns="0" tIns="0" bIns="0" anchor="t"/>
+          <a:lstStyle/>
+          <a:p>
+            <a:pPr algn="l"/>
+            <a:r>
+              <a:rPr sz="800" b="0">
+                <a:solidFill>
+                  <a:srgbClr val="8B949E"/>
+                </a:solidFill>
+                <a:latin typeface="Arial"/>
+              </a:rPr>
+              <a:t>Built from public FHFA and CFPB data. Not an official Fannie Mae, FHFA, or CFPB product.</a:t>
+            </a:r>
+          </a:p>
+        </p:txBody>
+      </p:sp>
+      <p:sp>
+        <p:nvSpPr>
+          <p:cNvPr id="10" name="Rounded Rectangle 9"/>
           <p:cNvSpPr/>
           <p:nvPr/>
         </p:nvSpPr>
         <p:spPr>
           <a:xfrm>
-            <a:off x="411480" y="1325880"/>
-            <a:ext cx="8321040" cy="3200400"/>
+            <a:off x="484632" y="1828800"/>
+            <a:ext cx="8174736" cy="2651760"/>
           </a:xfrm>
           <a:prstGeom prst="roundRect">
             <a:avLst>
-              <a:gd name="adj" fmla="val 4000"/>
+              <a:gd name="adj" fmla="val 5000"/>
             </a:avLst>
           </a:prstGeom>
           <a:solidFill>
@@ -7031,17 +5692,50 @@
           </a:p>
         </p:txBody>
       </p:sp>
+      <p:sp>
+        <p:nvSpPr>
+          <p:cNvPr id="11" name="TextBox 10"/>
+          <p:cNvSpPr txBox="1"/>
+          <p:nvPr/>
+        </p:nvSpPr>
+        <p:spPr>
+          <a:xfrm>
+            <a:off x="685800" y="1920240"/>
+            <a:ext cx="7772400" cy="228600"/>
+          </a:xfrm>
+          <a:prstGeom prst="rect">
+            <a:avLst/>
+          </a:prstGeom>
+          <a:noFill/>
+        </p:spPr>
+        <p:txBody>
+          <a:bodyPr wrap="square" lIns="0" rIns="0" tIns="0" bIns="0" anchor="t"/>
+          <a:lstStyle/>
+          <a:p>
+            <a:pPr algn="l"/>
+            <a:r>
+              <a:rPr sz="1200" b="1">
+                <a:solidFill>
+                  <a:srgbClr val="F0F6FC"/>
+                </a:solidFill>
+                <a:latin typeface="Arial"/>
+              </a:rPr>
+              <a:t>State house price index: year-over-year change, 2026 Q2</a:t>
+            </a:r>
+          </a:p>
+        </p:txBody>
+      </p:sp>
       <p:graphicFrame>
         <p:nvGraphicFramePr>
-          <p:cNvPr id="5" name="Chart 4"/>
+          <p:cNvPr id="12" name="Chart 11"/>
           <p:cNvGraphicFramePr>
             <a:graphicFrameLocks noGrp="1"/>
           </p:cNvGraphicFramePr>
           <p:nvPr/>
         </p:nvGraphicFramePr>
         <p:xfrm>
-          <a:off x="502920" y="1399032"/>
-          <a:ext cx="8138160" cy="3054096"/>
+          <a:off x="594360" y="2148840"/>
+          <a:ext cx="7955279" cy="2286000"/>
         </p:xfrm>
         <a:graphic>
           <a:graphicData uri="http://schemas.openxmlformats.org/drawingml/2006/chart">
@@ -7049,56 +5743,6 @@
           </a:graphicData>
         </a:graphic>
       </p:graphicFrame>
-      <p:sp>
-        <p:nvSpPr>
-          <p:cNvPr id="6" name="TextBox 5"/>
-          <p:cNvSpPr txBox="1"/>
-          <p:nvPr/>
-        </p:nvSpPr>
-        <p:spPr>
-          <a:xfrm>
-            <a:off x="411480" y="4663440"/>
-            <a:ext cx="8321040" cy="365760"/>
-          </a:xfrm>
-          <a:prstGeom prst="rect">
-            <a:avLst/>
-          </a:prstGeom>
-          <a:noFill/>
-        </p:spPr>
-        <p:txBody>
-          <a:bodyPr wrap="square" anchor="t" lIns="0" rIns="0" tIns="0" bIns="0">
-            <a:spAutoFit/>
-          </a:bodyPr>
-          <a:lstStyle/>
-          <a:p>
-            <a:r>
-              <a:rPr sz="800" b="0">
-                <a:solidFill>
-                  <a:srgbClr val="8B949E"/>
-                </a:solidFill>
-                <a:latin typeface="Arial"/>
-              </a:rPr>
-              <a:t>Source: FHFA House Price Index, purchase-only, 50 states and DC. Latest period: Q2 2026. Change vs. Q2 2025, non-seasonally adjusted.</a:t>
-            </a:r>
-          </a:p>
-          <a:p>
-            <a:pPr>
-              <a:spcBef>
-                <a:spcPts val="320"/>
-              </a:spcBef>
-            </a:pPr>
-            <a:r>
-              <a:rPr sz="800" b="0">
-                <a:solidFill>
-                  <a:srgbClr val="8B949E"/>
-                </a:solidFill>
-                <a:latin typeface="Arial"/>
-              </a:rPr>
-              <a:t>Built from public FHFA and CFPB data. Not an official Fannie Mae, FHFA, or CFPB product.</a:t>
-            </a:r>
-          </a:p>
-        </p:txBody>
-      </p:sp>
     </p:spTree>
   </p:cSld>
   <p:clrMapOvr>
@@ -7127,14 +5771,62 @@
       <p:grpSpPr/>
       <p:sp>
         <p:nvSpPr>
-          <p:cNvPr id="2" name="TextBox 1"/>
+          <p:cNvPr id="2" name="Rounded Rectangle 1"/>
+          <p:cNvSpPr/>
+          <p:nvPr/>
+        </p:nvSpPr>
+        <p:spPr>
+          <a:xfrm>
+            <a:off x="7004304" y="146304"/>
+            <a:ext cx="1536192" cy="283464"/>
+          </a:xfrm>
+          <a:prstGeom prst="roundRect">
+            <a:avLst>
+              <a:gd name="adj" fmla="val 19000"/>
+            </a:avLst>
+          </a:prstGeom>
+          <a:solidFill>
+            <a:srgbClr val="1A5D2A"/>
+          </a:solidFill>
+          <a:ln w="12700">
+            <a:solidFill>
+              <a:srgbClr val="2EA043"/>
+            </a:solidFill>
+          </a:ln>
+          <a:effectLst/>
+        </p:spPr>
+        <p:style>
+          <a:lnRef idx="1">
+            <a:schemeClr val="accent1"/>
+          </a:lnRef>
+          <a:fillRef idx="3">
+            <a:schemeClr val="accent1"/>
+          </a:fillRef>
+          <a:effectRef idx="2">
+            <a:schemeClr val="accent1"/>
+          </a:effectRef>
+          <a:fontRef idx="minor">
+            <a:schemeClr val="lt1"/>
+          </a:fontRef>
+        </p:style>
+        <p:txBody>
+          <a:bodyPr rtlCol="0" anchor="ctr"/>
+          <a:lstStyle/>
+          <a:p>
+            <a:pPr algn="ctr"/>
+          </a:p>
+        </p:txBody>
+      </p:sp>
+      <p:sp>
+        <p:nvSpPr>
+          <p:cNvPr id="3" name="TextBox 2"/>
           <p:cNvSpPr txBox="1"/>
           <p:nvPr/>
         </p:nvSpPr>
         <p:spPr>
           <a:xfrm>
-            <a:off x="411480" y="274320"/>
-            <a:ext cx="8321040" cy="228600"/>
+            <a:off x="7004304" y="146304"/>
+            <a:ext cx="1536192" cy="283464"/>
           </a:xfrm>
           <a:prstGeom prst="rect">
             <a:avLst/>
@@ -7142,33 +5834,56 @@
           <a:noFill/>
         </p:spPr>
         <p:txBody>
-          <a:bodyPr wrap="square" anchor="t" lIns="0" rIns="0" tIns="0" bIns="0">
-            <a:spAutoFit/>
-          </a:bodyPr>
-          <a:lstStyle/>
-          <a:p>
+          <a:bodyPr wrap="square" lIns="0" rIns="0" tIns="0" bIns="0" anchor="ctr"/>
+          <a:lstStyle/>
+          <a:p>
+            <a:pPr algn="ctr"/>
             <a:r>
-              <a:rPr sz="1050" b="1">
+              <a:rPr sz="1000" b="1">
                 <a:solidFill>
-                  <a:srgbClr val="58A6FF"/>
+                  <a:srgbClr val="FFFFFF"/>
                 </a:solidFill>
                 <a:latin typeface="Arial"/>
               </a:rPr>
-              <a:t>04  METROS THAT LEAD AND LAG</a:t>
+              <a:t>Data through 2026 Q2</a:t>
             </a:r>
           </a:p>
         </p:txBody>
       </p:sp>
-      <p:sp>
-        <p:nvSpPr>
-          <p:cNvPr id="3" name="TextBox 2"/>
+      <p:pic>
+        <p:nvPicPr>
+          <p:cNvPr id="4" name="Picture 3" descr=".logo.png"/>
+          <p:cNvPicPr>
+            <a:picLocks noChangeAspect="1"/>
+          </p:cNvPicPr>
+          <p:nvPr/>
+        </p:nvPicPr>
+        <p:blipFill>
+          <a:blip r:embed="rId2"/>
+          <a:stretch>
+            <a:fillRect/>
+          </a:stretch>
+        </p:blipFill>
+        <p:spPr>
+          <a:xfrm>
+            <a:off x="8668512" y="137160"/>
+            <a:ext cx="301752" cy="301752"/>
+          </a:xfrm>
+          <a:prstGeom prst="rect">
+            <a:avLst/>
+          </a:prstGeom>
+        </p:spPr>
+      </p:pic>
+      <p:sp>
+        <p:nvSpPr>
+          <p:cNvPr id="5" name="TextBox 4"/>
           <p:cNvSpPr txBox="1"/>
           <p:nvPr/>
         </p:nvSpPr>
         <p:spPr>
           <a:xfrm>
-            <a:off x="411480" y="512064"/>
-            <a:ext cx="8321040" cy="731520"/>
+            <a:off x="484632" y="384048"/>
+            <a:ext cx="6400800" cy="182880"/>
           </a:xfrm>
           <a:prstGeom prst="rect">
             <a:avLst/>
@@ -7176,37 +5891,168 @@
           <a:noFill/>
         </p:spPr>
         <p:txBody>
-          <a:bodyPr wrap="square" anchor="t" lIns="0" rIns="0" tIns="0" bIns="0">
-            <a:spAutoFit/>
-          </a:bodyPr>
-          <a:lstStyle/>
-          <a:p>
+          <a:bodyPr wrap="square" lIns="0" rIns="0" tIns="0" bIns="0" anchor="t"/>
+          <a:lstStyle/>
+          <a:p>
+            <a:pPr algn="l"/>
             <a:r>
-              <a:rPr sz="2200" b="1">
+              <a:rPr sz="1100" b="1">
+                <a:solidFill>
+                  <a:srgbClr val="2EA043"/>
+                </a:solidFill>
+                <a:latin typeface="Arial"/>
+              </a:rPr>
+              <a:t>LEADERS AND LAGGARDS: METROS</a:t>
+            </a:r>
+          </a:p>
+        </p:txBody>
+      </p:sp>
+      <p:sp>
+        <p:nvSpPr>
+          <p:cNvPr id="6" name="TextBox 5"/>
+          <p:cNvSpPr txBox="1"/>
+          <p:nvPr/>
+        </p:nvSpPr>
+        <p:spPr>
+          <a:xfrm>
+            <a:off x="484632" y="603504"/>
+            <a:ext cx="8138160" cy="777240"/>
+          </a:xfrm>
+          <a:prstGeom prst="rect">
+            <a:avLst/>
+          </a:prstGeom>
+          <a:noFill/>
+        </p:spPr>
+        <p:txBody>
+          <a:bodyPr wrap="square" lIns="0" rIns="0" tIns="0" bIns="0" anchor="t"/>
+          <a:lstStyle/>
+          <a:p>
+            <a:pPr algn="l"/>
+            <a:r>
+              <a:rPr sz="2400" b="1">
                 <a:solidFill>
                   <a:srgbClr val="F0F6FC"/>
                 </a:solidFill>
                 <a:latin typeface="Arial"/>
               </a:rPr>
-              <a:t>Elgin, IL leads at +7.5%; prices fell in 26 of 100 metros</a:t>
+              <a:t>26 of the 100 largest metros show price declines; Elgin, IL leads at +7.5%</a:t>
             </a:r>
           </a:p>
         </p:txBody>
       </p:sp>
       <p:sp>
         <p:nvSpPr>
-          <p:cNvPr id="4" name="Rounded Rectangle 3"/>
+          <p:cNvPr id="7" name="TextBox 6"/>
+          <p:cNvSpPr txBox="1"/>
+          <p:nvPr/>
+        </p:nvSpPr>
+        <p:spPr>
+          <a:xfrm>
+            <a:off x="484632" y="1463040"/>
+            <a:ext cx="8138160" cy="228600"/>
+          </a:xfrm>
+          <a:prstGeom prst="rect">
+            <a:avLst/>
+          </a:prstGeom>
+          <a:noFill/>
+        </p:spPr>
+        <p:txBody>
+          <a:bodyPr wrap="square" lIns="0" rIns="0" tIns="0" bIns="0" anchor="t"/>
+          <a:lstStyle/>
+          <a:p>
+            <a:pPr algn="l"/>
+            <a:r>
+              <a:rPr sz="1300" b="0">
+                <a:solidFill>
+                  <a:srgbClr val="B1BAC4"/>
+                </a:solidFill>
+                <a:latin typeface="Arial"/>
+              </a:rPr>
+              <a:t>Five fastest and five slowest of the 100 largest metros. Blue = increase, orange = decrease.</a:t>
+            </a:r>
+          </a:p>
+        </p:txBody>
+      </p:sp>
+      <p:sp>
+        <p:nvSpPr>
+          <p:cNvPr id="8" name="TextBox 7"/>
+          <p:cNvSpPr txBox="1"/>
+          <p:nvPr/>
+        </p:nvSpPr>
+        <p:spPr>
+          <a:xfrm>
+            <a:off x="484632" y="4553712"/>
+            <a:ext cx="8138160" cy="182880"/>
+          </a:xfrm>
+          <a:prstGeom prst="rect">
+            <a:avLst/>
+          </a:prstGeom>
+          <a:noFill/>
+        </p:spPr>
+        <p:txBody>
+          <a:bodyPr wrap="square" lIns="0" rIns="0" tIns="0" bIns="0" anchor="t"/>
+          <a:lstStyle/>
+          <a:p>
+            <a:pPr algn="l"/>
+            <a:r>
+              <a:rPr sz="900" b="0">
+                <a:solidFill>
+                  <a:srgbClr val="8B949E"/>
+                </a:solidFill>
+                <a:latin typeface="Arial"/>
+              </a:rPr>
+              <a:t>Source: FHFA House Price Index, purchase-only, not seasonally adjusted (1991 Q1 = 100). Latest period: 2026 Q2.</a:t>
+            </a:r>
+          </a:p>
+        </p:txBody>
+      </p:sp>
+      <p:sp>
+        <p:nvSpPr>
+          <p:cNvPr id="9" name="TextBox 8"/>
+          <p:cNvSpPr txBox="1"/>
+          <p:nvPr/>
+        </p:nvSpPr>
+        <p:spPr>
+          <a:xfrm>
+            <a:off x="484632" y="4791456"/>
+            <a:ext cx="8138160" cy="182880"/>
+          </a:xfrm>
+          <a:prstGeom prst="rect">
+            <a:avLst/>
+          </a:prstGeom>
+          <a:noFill/>
+        </p:spPr>
+        <p:txBody>
+          <a:bodyPr wrap="square" lIns="0" rIns="0" tIns="0" bIns="0" anchor="t"/>
+          <a:lstStyle/>
+          <a:p>
+            <a:pPr algn="l"/>
+            <a:r>
+              <a:rPr sz="800" b="0">
+                <a:solidFill>
+                  <a:srgbClr val="8B949E"/>
+                </a:solidFill>
+                <a:latin typeface="Arial"/>
+              </a:rPr>
+              <a:t>Built from public FHFA and CFPB data. Not an official Fannie Mae, FHFA, or CFPB product.</a:t>
+            </a:r>
+          </a:p>
+        </p:txBody>
+      </p:sp>
+      <p:sp>
+        <p:nvSpPr>
+          <p:cNvPr id="10" name="Rounded Rectangle 9"/>
           <p:cNvSpPr/>
           <p:nvPr/>
         </p:nvSpPr>
         <p:spPr>
           <a:xfrm>
-            <a:off x="411480" y="1325880"/>
-            <a:ext cx="8321040" cy="3200400"/>
+            <a:off x="484632" y="1828800"/>
+            <a:ext cx="8174736" cy="2651760"/>
           </a:xfrm>
           <a:prstGeom prst="roundRect">
             <a:avLst>
-              <a:gd name="adj" fmla="val 4000"/>
+              <a:gd name="adj" fmla="val 5000"/>
             </a:avLst>
           </a:prstGeom>
           <a:solidFill>
@@ -7241,17 +6087,50 @@
           </a:p>
         </p:txBody>
       </p:sp>
+      <p:sp>
+        <p:nvSpPr>
+          <p:cNvPr id="11" name="TextBox 10"/>
+          <p:cNvSpPr txBox="1"/>
+          <p:nvPr/>
+        </p:nvSpPr>
+        <p:spPr>
+          <a:xfrm>
+            <a:off x="685800" y="1920240"/>
+            <a:ext cx="7772400" cy="228600"/>
+          </a:xfrm>
+          <a:prstGeom prst="rect">
+            <a:avLst/>
+          </a:prstGeom>
+          <a:noFill/>
+        </p:spPr>
+        <p:txBody>
+          <a:bodyPr wrap="square" lIns="0" rIns="0" tIns="0" bIns="0" anchor="t"/>
+          <a:lstStyle/>
+          <a:p>
+            <a:pPr algn="l"/>
+            <a:r>
+              <a:rPr sz="1200" b="1">
+                <a:solidFill>
+                  <a:srgbClr val="F0F6FC"/>
+                </a:solidFill>
+                <a:latin typeface="Arial"/>
+              </a:rPr>
+              <a:t>Metro house price index: year-over-year change, 2026 Q2</a:t>
+            </a:r>
+          </a:p>
+        </p:txBody>
+      </p:sp>
       <p:graphicFrame>
         <p:nvGraphicFramePr>
-          <p:cNvPr id="5" name="Chart 4"/>
+          <p:cNvPr id="12" name="Chart 11"/>
           <p:cNvGraphicFramePr>
             <a:graphicFrameLocks noGrp="1"/>
           </p:cNvGraphicFramePr>
           <p:nvPr/>
         </p:nvGraphicFramePr>
         <p:xfrm>
-          <a:off x="502920" y="1399032"/>
-          <a:ext cx="8138160" cy="3054096"/>
+          <a:off x="594360" y="2148840"/>
+          <a:ext cx="7955279" cy="2286000"/>
         </p:xfrm>
         <a:graphic>
           <a:graphicData uri="http://schemas.openxmlformats.org/drawingml/2006/chart">
@@ -7259,56 +6138,6 @@
           </a:graphicData>
         </a:graphic>
       </p:graphicFrame>
-      <p:sp>
-        <p:nvSpPr>
-          <p:cNvPr id="6" name="TextBox 5"/>
-          <p:cNvSpPr txBox="1"/>
-          <p:nvPr/>
-        </p:nvSpPr>
-        <p:spPr>
-          <a:xfrm>
-            <a:off x="411480" y="4663440"/>
-            <a:ext cx="8321040" cy="365760"/>
-          </a:xfrm>
-          <a:prstGeom prst="rect">
-            <a:avLst/>
-          </a:prstGeom>
-          <a:noFill/>
-        </p:spPr>
-        <p:txBody>
-          <a:bodyPr wrap="square" anchor="t" lIns="0" rIns="0" tIns="0" bIns="0">
-            <a:spAutoFit/>
-          </a:bodyPr>
-          <a:lstStyle/>
-          <a:p>
-            <a:r>
-              <a:rPr sz="800" b="0">
-                <a:solidFill>
-                  <a:srgbClr val="8B949E"/>
-                </a:solidFill>
-                <a:latin typeface="Arial"/>
-              </a:rPr>
-              <a:t>Source: FHFA House Price Index, purchase-only, 100 largest metros. Latest period: Q2 2026. Change vs. Q2 2025, non-seasonally adjusted.</a:t>
-            </a:r>
-          </a:p>
-          <a:p>
-            <a:pPr>
-              <a:spcBef>
-                <a:spcPts val="320"/>
-              </a:spcBef>
-            </a:pPr>
-            <a:r>
-              <a:rPr sz="800" b="0">
-                <a:solidFill>
-                  <a:srgbClr val="8B949E"/>
-                </a:solidFill>
-                <a:latin typeface="Arial"/>
-              </a:rPr>
-              <a:t>Built from public FHFA and CFPB data. Not an official Fannie Mae, FHFA, or CFPB product.</a:t>
-            </a:r>
-          </a:p>
-        </p:txBody>
-      </p:sp>
     </p:spTree>
   </p:cSld>
   <p:clrMapOvr>
@@ -7337,14 +6166,62 @@
       <p:grpSpPr/>
       <p:sp>
         <p:nvSpPr>
-          <p:cNvPr id="2" name="TextBox 1"/>
+          <p:cNvPr id="2" name="Rounded Rectangle 1"/>
+          <p:cNvSpPr/>
+          <p:nvPr/>
+        </p:nvSpPr>
+        <p:spPr>
+          <a:xfrm>
+            <a:off x="7004304" y="146304"/>
+            <a:ext cx="1536192" cy="283464"/>
+          </a:xfrm>
+          <a:prstGeom prst="roundRect">
+            <a:avLst>
+              <a:gd name="adj" fmla="val 19000"/>
+            </a:avLst>
+          </a:prstGeom>
+          <a:solidFill>
+            <a:srgbClr val="1A5D2A"/>
+          </a:solidFill>
+          <a:ln w="12700">
+            <a:solidFill>
+              <a:srgbClr val="2EA043"/>
+            </a:solidFill>
+          </a:ln>
+          <a:effectLst/>
+        </p:spPr>
+        <p:style>
+          <a:lnRef idx="1">
+            <a:schemeClr val="accent1"/>
+          </a:lnRef>
+          <a:fillRef idx="3">
+            <a:schemeClr val="accent1"/>
+          </a:fillRef>
+          <a:effectRef idx="2">
+            <a:schemeClr val="accent1"/>
+          </a:effectRef>
+          <a:fontRef idx="minor">
+            <a:schemeClr val="lt1"/>
+          </a:fontRef>
+        </p:style>
+        <p:txBody>
+          <a:bodyPr rtlCol="0" anchor="ctr"/>
+          <a:lstStyle/>
+          <a:p>
+            <a:pPr algn="ctr"/>
+          </a:p>
+        </p:txBody>
+      </p:sp>
+      <p:sp>
+        <p:nvSpPr>
+          <p:cNvPr id="3" name="TextBox 2"/>
           <p:cNvSpPr txBox="1"/>
           <p:nvPr/>
         </p:nvSpPr>
         <p:spPr>
           <a:xfrm>
-            <a:off x="411480" y="274320"/>
-            <a:ext cx="8321040" cy="228600"/>
+            <a:off x="7004304" y="146304"/>
+            <a:ext cx="1536192" cy="283464"/>
           </a:xfrm>
           <a:prstGeom prst="rect">
             <a:avLst/>
@@ -7352,33 +6229,56 @@
           <a:noFill/>
         </p:spPr>
         <p:txBody>
-          <a:bodyPr wrap="square" anchor="t" lIns="0" rIns="0" tIns="0" bIns="0">
-            <a:spAutoFit/>
-          </a:bodyPr>
-          <a:lstStyle/>
-          <a:p>
+          <a:bodyPr wrap="square" lIns="0" rIns="0" tIns="0" bIns="0" anchor="ctr"/>
+          <a:lstStyle/>
+          <a:p>
+            <a:pPr algn="ctr"/>
             <a:r>
-              <a:rPr sz="1050" b="1">
+              <a:rPr sz="1000" b="1">
                 <a:solidFill>
-                  <a:srgbClr val="58A6FF"/>
+                  <a:srgbClr val="FFFFFF"/>
                 </a:solidFill>
                 <a:latin typeface="Arial"/>
               </a:rPr>
-              <a:t>05  MORTGAGE ORIGINATIONS</a:t>
+              <a:t>Data through 2026 Q2</a:t>
             </a:r>
           </a:p>
         </p:txBody>
       </p:sp>
-      <p:sp>
-        <p:nvSpPr>
-          <p:cNvPr id="3" name="TextBox 2"/>
+      <p:pic>
+        <p:nvPicPr>
+          <p:cNvPr id="4" name="Picture 3" descr=".logo.png"/>
+          <p:cNvPicPr>
+            <a:picLocks noChangeAspect="1"/>
+          </p:cNvPicPr>
+          <p:nvPr/>
+        </p:nvPicPr>
+        <p:blipFill>
+          <a:blip r:embed="rId2"/>
+          <a:stretch>
+            <a:fillRect/>
+          </a:stretch>
+        </p:blipFill>
+        <p:spPr>
+          <a:xfrm>
+            <a:off x="8668512" y="137160"/>
+            <a:ext cx="301752" cy="301752"/>
+          </a:xfrm>
+          <a:prstGeom prst="rect">
+            <a:avLst/>
+          </a:prstGeom>
+        </p:spPr>
+      </p:pic>
+      <p:sp>
+        <p:nvSpPr>
+          <p:cNvPr id="5" name="TextBox 4"/>
           <p:cNvSpPr txBox="1"/>
           <p:nvPr/>
         </p:nvSpPr>
         <p:spPr>
           <a:xfrm>
-            <a:off x="411480" y="512064"/>
-            <a:ext cx="8321040" cy="731520"/>
+            <a:off x="484632" y="384048"/>
+            <a:ext cx="6400800" cy="182880"/>
           </a:xfrm>
           <a:prstGeom prst="rect">
             <a:avLst/>
@@ -7386,37 +6286,168 @@
           <a:noFill/>
         </p:spPr>
         <p:txBody>
-          <a:bodyPr wrap="square" anchor="t" lIns="0" rIns="0" tIns="0" bIns="0">
-            <a:spAutoFit/>
-          </a:bodyPr>
-          <a:lstStyle/>
-          <a:p>
+          <a:bodyPr wrap="square" lIns="0" rIns="0" tIns="0" bIns="0" anchor="t"/>
+          <a:lstStyle/>
+          <a:p>
+            <a:pPr algn="l"/>
             <a:r>
-              <a:rPr sz="2200" b="1">
+              <a:rPr sz="1100" b="1">
+                <a:solidFill>
+                  <a:srgbClr val="2EA043"/>
+                </a:solidFill>
+                <a:latin typeface="Arial"/>
+              </a:rPr>
+              <a:t>MORTGAGE ORIGINATIONS, 2018 TO 2025</a:t>
+            </a:r>
+          </a:p>
+        </p:txBody>
+      </p:sp>
+      <p:sp>
+        <p:nvSpPr>
+          <p:cNvPr id="6" name="TextBox 5"/>
+          <p:cNvSpPr txBox="1"/>
+          <p:nvPr/>
+        </p:nvSpPr>
+        <p:spPr>
+          <a:xfrm>
+            <a:off x="484632" y="603504"/>
+            <a:ext cx="8138160" cy="777240"/>
+          </a:xfrm>
+          <a:prstGeom prst="rect">
+            <a:avLst/>
+          </a:prstGeom>
+          <a:noFill/>
+        </p:spPr>
+        <p:txBody>
+          <a:bodyPr wrap="square" lIns="0" rIns="0" tIns="0" bIns="0" anchor="t"/>
+          <a:lstStyle/>
+          <a:p>
+            <a:pPr algn="l"/>
+            <a:r>
+              <a:rPr sz="2400" b="1">
                 <a:solidFill>
                   <a:srgbClr val="F0F6FC"/>
                 </a:solidFill>
                 <a:latin typeface="Arial"/>
               </a:rPr>
-              <a:t>Refinance loans fell 77.5% from their 2020 peak; home purchase loans were 64.2% of 2025 originations</a:t>
+              <a:t>Refinance loans fell 78% from the 2020 peak; home purchase loans are 18% below 2018</a:t>
             </a:r>
           </a:p>
         </p:txBody>
       </p:sp>
       <p:sp>
         <p:nvSpPr>
-          <p:cNvPr id="4" name="Rounded Rectangle 3"/>
+          <p:cNvPr id="7" name="TextBox 6"/>
+          <p:cNvSpPr txBox="1"/>
+          <p:nvPr/>
+        </p:nvSpPr>
+        <p:spPr>
+          <a:xfrm>
+            <a:off x="484632" y="1463040"/>
+            <a:ext cx="8138160" cy="228600"/>
+          </a:xfrm>
+          <a:prstGeom prst="rect">
+            <a:avLst/>
+          </a:prstGeom>
+          <a:noFill/>
+        </p:spPr>
+        <p:txBody>
+          <a:bodyPr wrap="square" lIns="0" rIns="0" tIns="0" bIns="0" anchor="t"/>
+          <a:lstStyle/>
+          <a:p>
+            <a:pPr algn="l"/>
+            <a:r>
+              <a:rPr sz="1300" b="0">
+                <a:solidFill>
+                  <a:srgbClr val="B1BAC4"/>
+                </a:solidFill>
+                <a:latin typeface="Arial"/>
+              </a:rPr>
+              <a:t>Originated loans each year by loan purpose. Refinance figures in the headline include cash-out refinance.</a:t>
+            </a:r>
+          </a:p>
+        </p:txBody>
+      </p:sp>
+      <p:sp>
+        <p:nvSpPr>
+          <p:cNvPr id="8" name="TextBox 7"/>
+          <p:cNvSpPr txBox="1"/>
+          <p:nvPr/>
+        </p:nvSpPr>
+        <p:spPr>
+          <a:xfrm>
+            <a:off x="484632" y="4553712"/>
+            <a:ext cx="8138160" cy="182880"/>
+          </a:xfrm>
+          <a:prstGeom prst="rect">
+            <a:avLst/>
+          </a:prstGeom>
+          <a:noFill/>
+        </p:spPr>
+        <p:txBody>
+          <a:bodyPr wrap="square" lIns="0" rIns="0" tIns="0" bIns="0" anchor="t"/>
+          <a:lstStyle/>
+          <a:p>
+            <a:pPr algn="l"/>
+            <a:r>
+              <a:rPr sz="900" b="0">
+                <a:solidFill>
+                  <a:srgbClr val="8B949E"/>
+                </a:solidFill>
+                <a:latin typeface="Arial"/>
+              </a:rPr>
+              <a:t>Source: CFPB HMDA Data Browser, originated loans, 50 states and DC. Latest year: 2025.</a:t>
+            </a:r>
+          </a:p>
+        </p:txBody>
+      </p:sp>
+      <p:sp>
+        <p:nvSpPr>
+          <p:cNvPr id="9" name="TextBox 8"/>
+          <p:cNvSpPr txBox="1"/>
+          <p:nvPr/>
+        </p:nvSpPr>
+        <p:spPr>
+          <a:xfrm>
+            <a:off x="484632" y="4791456"/>
+            <a:ext cx="8138160" cy="182880"/>
+          </a:xfrm>
+          <a:prstGeom prst="rect">
+            <a:avLst/>
+          </a:prstGeom>
+          <a:noFill/>
+        </p:spPr>
+        <p:txBody>
+          <a:bodyPr wrap="square" lIns="0" rIns="0" tIns="0" bIns="0" anchor="t"/>
+          <a:lstStyle/>
+          <a:p>
+            <a:pPr algn="l"/>
+            <a:r>
+              <a:rPr sz="800" b="0">
+                <a:solidFill>
+                  <a:srgbClr val="8B949E"/>
+                </a:solidFill>
+                <a:latin typeface="Arial"/>
+              </a:rPr>
+              <a:t>Built from public FHFA and CFPB data. Not an official Fannie Mae, FHFA, or CFPB product.</a:t>
+            </a:r>
+          </a:p>
+        </p:txBody>
+      </p:sp>
+      <p:sp>
+        <p:nvSpPr>
+          <p:cNvPr id="10" name="Rounded Rectangle 9"/>
           <p:cNvSpPr/>
           <p:nvPr/>
         </p:nvSpPr>
         <p:spPr>
           <a:xfrm>
-            <a:off x="411480" y="1325880"/>
-            <a:ext cx="8321040" cy="3200400"/>
+            <a:off x="484632" y="1828800"/>
+            <a:ext cx="8174736" cy="2651760"/>
           </a:xfrm>
           <a:prstGeom prst="roundRect">
             <a:avLst>
-              <a:gd name="adj" fmla="val 4000"/>
+              <a:gd name="adj" fmla="val 5000"/>
             </a:avLst>
           </a:prstGeom>
           <a:solidFill>
@@ -7451,17 +6482,50 @@
           </a:p>
         </p:txBody>
       </p:sp>
+      <p:sp>
+        <p:nvSpPr>
+          <p:cNvPr id="11" name="TextBox 10"/>
+          <p:cNvSpPr txBox="1"/>
+          <p:nvPr/>
+        </p:nvSpPr>
+        <p:spPr>
+          <a:xfrm>
+            <a:off x="685800" y="1920240"/>
+            <a:ext cx="7772400" cy="228600"/>
+          </a:xfrm>
+          <a:prstGeom prst="rect">
+            <a:avLst/>
+          </a:prstGeom>
+          <a:noFill/>
+        </p:spPr>
+        <p:txBody>
+          <a:bodyPr wrap="square" lIns="0" rIns="0" tIns="0" bIns="0" anchor="t"/>
+          <a:lstStyle/>
+          <a:p>
+            <a:pPr algn="l"/>
+            <a:r>
+              <a:rPr sz="1200" b="1">
+                <a:solidFill>
+                  <a:srgbClr val="F0F6FC"/>
+                </a:solidFill>
+                <a:latin typeface="Arial"/>
+              </a:rPr>
+              <a:t>Originated mortgage loans by purpose (millions)</a:t>
+            </a:r>
+          </a:p>
+        </p:txBody>
+      </p:sp>
       <p:graphicFrame>
         <p:nvGraphicFramePr>
-          <p:cNvPr id="5" name="Chart 4"/>
+          <p:cNvPr id="12" name="Chart 11"/>
           <p:cNvGraphicFramePr>
             <a:graphicFrameLocks noGrp="1"/>
           </p:cNvGraphicFramePr>
           <p:nvPr/>
         </p:nvGraphicFramePr>
         <p:xfrm>
-          <a:off x="502920" y="1399032"/>
-          <a:ext cx="8138160" cy="3054096"/>
+          <a:off x="594360" y="2148840"/>
+          <a:ext cx="7955279" cy="2286000"/>
         </p:xfrm>
         <a:graphic>
           <a:graphicData uri="http://schemas.openxmlformats.org/drawingml/2006/chart">
@@ -7469,56 +6533,6 @@
           </a:graphicData>
         </a:graphic>
       </p:graphicFrame>
-      <p:sp>
-        <p:nvSpPr>
-          <p:cNvPr id="6" name="TextBox 5"/>
-          <p:cNvSpPr txBox="1"/>
-          <p:nvPr/>
-        </p:nvSpPr>
-        <p:spPr>
-          <a:xfrm>
-            <a:off x="411480" y="4663440"/>
-            <a:ext cx="8321040" cy="365760"/>
-          </a:xfrm>
-          <a:prstGeom prst="rect">
-            <a:avLst/>
-          </a:prstGeom>
-          <a:noFill/>
-        </p:spPr>
-        <p:txBody>
-          <a:bodyPr wrap="square" anchor="t" lIns="0" rIns="0" tIns="0" bIns="0">
-            <a:spAutoFit/>
-          </a:bodyPr>
-          <a:lstStyle/>
-          <a:p>
-            <a:r>
-              <a:rPr sz="800" b="0">
-                <a:solidFill>
-                  <a:srgbClr val="8B949E"/>
-                </a:solidFill>
-                <a:latin typeface="Arial"/>
-              </a:rPr>
-              <a:t>Source: CFPB HMDA Data Browser, originated loans (action taken = 1), all states. Latest period: 2025.</a:t>
-            </a:r>
-          </a:p>
-          <a:p>
-            <a:pPr>
-              <a:spcBef>
-                <a:spcPts val="320"/>
-              </a:spcBef>
-            </a:pPr>
-            <a:r>
-              <a:rPr sz="800" b="0">
-                <a:solidFill>
-                  <a:srgbClr val="8B949E"/>
-                </a:solidFill>
-                <a:latin typeface="Arial"/>
-              </a:rPr>
-              <a:t>Built from public FHFA and CFPB data. Not an official Fannie Mae, FHFA, or CFPB product.</a:t>
-            </a:r>
-          </a:p>
-        </p:txBody>
-      </p:sp>
     </p:spTree>
   </p:cSld>
   <p:clrMapOvr>
@@ -7547,14 +6561,62 @@
       <p:grpSpPr/>
       <p:sp>
         <p:nvSpPr>
-          <p:cNvPr id="2" name="TextBox 1"/>
+          <p:cNvPr id="2" name="Rounded Rectangle 1"/>
+          <p:cNvSpPr/>
+          <p:nvPr/>
+        </p:nvSpPr>
+        <p:spPr>
+          <a:xfrm>
+            <a:off x="7004304" y="146304"/>
+            <a:ext cx="1536192" cy="283464"/>
+          </a:xfrm>
+          <a:prstGeom prst="roundRect">
+            <a:avLst>
+              <a:gd name="adj" fmla="val 19000"/>
+            </a:avLst>
+          </a:prstGeom>
+          <a:solidFill>
+            <a:srgbClr val="1A5D2A"/>
+          </a:solidFill>
+          <a:ln w="12700">
+            <a:solidFill>
+              <a:srgbClr val="2EA043"/>
+            </a:solidFill>
+          </a:ln>
+          <a:effectLst/>
+        </p:spPr>
+        <p:style>
+          <a:lnRef idx="1">
+            <a:schemeClr val="accent1"/>
+          </a:lnRef>
+          <a:fillRef idx="3">
+            <a:schemeClr val="accent1"/>
+          </a:fillRef>
+          <a:effectRef idx="2">
+            <a:schemeClr val="accent1"/>
+          </a:effectRef>
+          <a:fontRef idx="minor">
+            <a:schemeClr val="lt1"/>
+          </a:fontRef>
+        </p:style>
+        <p:txBody>
+          <a:bodyPr rtlCol="0" anchor="ctr"/>
+          <a:lstStyle/>
+          <a:p>
+            <a:pPr algn="ctr"/>
+          </a:p>
+        </p:txBody>
+      </p:sp>
+      <p:sp>
+        <p:nvSpPr>
+          <p:cNvPr id="3" name="TextBox 2"/>
           <p:cNvSpPr txBox="1"/>
           <p:nvPr/>
         </p:nvSpPr>
         <p:spPr>
           <a:xfrm>
-            <a:off x="411480" y="274320"/>
-            <a:ext cx="8321040" cy="228600"/>
+            <a:off x="7004304" y="146304"/>
+            <a:ext cx="1536192" cy="283464"/>
           </a:xfrm>
           <a:prstGeom prst="rect">
             <a:avLst/>
@@ -7562,33 +6624,56 @@
           <a:noFill/>
         </p:spPr>
         <p:txBody>
-          <a:bodyPr wrap="square" anchor="t" lIns="0" rIns="0" tIns="0" bIns="0">
-            <a:spAutoFit/>
-          </a:bodyPr>
-          <a:lstStyle/>
-          <a:p>
+          <a:bodyPr wrap="square" lIns="0" rIns="0" tIns="0" bIns="0" anchor="ctr"/>
+          <a:lstStyle/>
+          <a:p>
+            <a:pPr algn="ctr"/>
             <a:r>
-              <a:rPr sz="1050" b="1">
+              <a:rPr sz="1000" b="1">
                 <a:solidFill>
-                  <a:srgbClr val="58A6FF"/>
+                  <a:srgbClr val="FFFFFF"/>
                 </a:solidFill>
                 <a:latin typeface="Arial"/>
               </a:rPr>
-              <a:t>06  THREE TAKEAWAYS</a:t>
+              <a:t>Data through 2026 Q2</a:t>
             </a:r>
           </a:p>
         </p:txBody>
       </p:sp>
-      <p:sp>
-        <p:nvSpPr>
-          <p:cNvPr id="3" name="TextBox 2"/>
+      <p:pic>
+        <p:nvPicPr>
+          <p:cNvPr id="4" name="Picture 3" descr=".logo.png"/>
+          <p:cNvPicPr>
+            <a:picLocks noChangeAspect="1"/>
+          </p:cNvPicPr>
+          <p:nvPr/>
+        </p:nvPicPr>
+        <p:blipFill>
+          <a:blip r:embed="rId2"/>
+          <a:stretch>
+            <a:fillRect/>
+          </a:stretch>
+        </p:blipFill>
+        <p:spPr>
+          <a:xfrm>
+            <a:off x="8668512" y="137160"/>
+            <a:ext cx="301752" cy="301752"/>
+          </a:xfrm>
+          <a:prstGeom prst="rect">
+            <a:avLst/>
+          </a:prstGeom>
+        </p:spPr>
+      </p:pic>
+      <p:sp>
+        <p:nvSpPr>
+          <p:cNvPr id="5" name="TextBox 4"/>
           <p:cNvSpPr txBox="1"/>
           <p:nvPr/>
         </p:nvSpPr>
         <p:spPr>
           <a:xfrm>
-            <a:off x="411480" y="512064"/>
-            <a:ext cx="8321040" cy="731520"/>
+            <a:off x="484632" y="384048"/>
+            <a:ext cx="6400800" cy="182880"/>
           </a:xfrm>
           <a:prstGeom prst="rect">
             <a:avLst/>
@@ -7596,37 +6681,168 @@
           <a:noFill/>
         </p:spPr>
         <p:txBody>
-          <a:bodyPr wrap="square" anchor="t" lIns="0" rIns="0" tIns="0" bIns="0">
-            <a:spAutoFit/>
-          </a:bodyPr>
-          <a:lstStyle/>
-          <a:p>
+          <a:bodyPr wrap="square" lIns="0" rIns="0" tIns="0" bIns="0" anchor="t"/>
+          <a:lstStyle/>
+          <a:p>
+            <a:pPr algn="l"/>
             <a:r>
-              <a:rPr sz="2200" b="1">
+              <a:rPr sz="1100" b="1">
+                <a:solidFill>
+                  <a:srgbClr val="2EA043"/>
+                </a:solidFill>
+                <a:latin typeface="Arial"/>
+              </a:rPr>
+              <a:t>THREE TAKEAWAYS</a:t>
+            </a:r>
+          </a:p>
+        </p:txBody>
+      </p:sp>
+      <p:sp>
+        <p:nvSpPr>
+          <p:cNvPr id="6" name="TextBox 5"/>
+          <p:cNvSpPr txBox="1"/>
+          <p:nvPr/>
+        </p:nvSpPr>
+        <p:spPr>
+          <a:xfrm>
+            <a:off x="484632" y="603504"/>
+            <a:ext cx="8138160" cy="777240"/>
+          </a:xfrm>
+          <a:prstGeom prst="rect">
+            <a:avLst/>
+          </a:prstGeom>
+          <a:noFill/>
+        </p:spPr>
+        <p:txBody>
+          <a:bodyPr wrap="square" lIns="0" rIns="0" tIns="0" bIns="0" anchor="t"/>
+          <a:lstStyle/>
+          <a:p>
+            <a:pPr algn="l"/>
+            <a:r>
+              <a:rPr sz="2400" b="1">
                 <a:solidFill>
                   <a:srgbClr val="F0F6FC"/>
                 </a:solidFill>
                 <a:latin typeface="Arial"/>
               </a:rPr>
-              <a:t>Prices are high, growth has slowed, and refinancing fell</a:t>
+              <a:t>Prices are high and still rise slowly, but gains are uneven and refinance activity is low</a:t>
             </a:r>
           </a:p>
         </p:txBody>
       </p:sp>
       <p:sp>
         <p:nvSpPr>
-          <p:cNvPr id="4" name="Rounded Rectangle 3"/>
+          <p:cNvPr id="7" name="TextBox 6"/>
+          <p:cNvSpPr txBox="1"/>
+          <p:nvPr/>
+        </p:nvSpPr>
+        <p:spPr>
+          <a:xfrm>
+            <a:off x="484632" y="1463040"/>
+            <a:ext cx="8138160" cy="228600"/>
+          </a:xfrm>
+          <a:prstGeom prst="rect">
+            <a:avLst/>
+          </a:prstGeom>
+          <a:noFill/>
+        </p:spPr>
+        <p:txBody>
+          <a:bodyPr wrap="square" lIns="0" rIns="0" tIns="0" bIns="0" anchor="t"/>
+          <a:lstStyle/>
+          <a:p>
+            <a:pPr algn="l"/>
+            <a:r>
+              <a:rPr sz="1300" b="0">
+                <a:solidFill>
+                  <a:srgbClr val="B1BAC4"/>
+                </a:solidFill>
+                <a:latin typeface="Arial"/>
+              </a:rPr>
+              <a:t>Facts from the FHFA and CFPB data in this briefing. No forecasts.</a:t>
+            </a:r>
+          </a:p>
+        </p:txBody>
+      </p:sp>
+      <p:sp>
+        <p:nvSpPr>
+          <p:cNvPr id="8" name="TextBox 7"/>
+          <p:cNvSpPr txBox="1"/>
+          <p:nvPr/>
+        </p:nvSpPr>
+        <p:spPr>
+          <a:xfrm>
+            <a:off x="484632" y="4553712"/>
+            <a:ext cx="8138160" cy="182880"/>
+          </a:xfrm>
+          <a:prstGeom prst="rect">
+            <a:avLst/>
+          </a:prstGeom>
+          <a:noFill/>
+        </p:spPr>
+        <p:txBody>
+          <a:bodyPr wrap="square" lIns="0" rIns="0" tIns="0" bIns="0" anchor="t"/>
+          <a:lstStyle/>
+          <a:p>
+            <a:pPr algn="l"/>
+            <a:r>
+              <a:rPr sz="900" b="0">
+                <a:solidFill>
+                  <a:srgbClr val="8B949E"/>
+                </a:solidFill>
+                <a:latin typeface="Arial"/>
+              </a:rPr>
+              <a:t>Sources: FHFA HPI (latest period 2026 Q2); CFPB HMDA (2018 to 2025).</a:t>
+            </a:r>
+          </a:p>
+        </p:txBody>
+      </p:sp>
+      <p:sp>
+        <p:nvSpPr>
+          <p:cNvPr id="9" name="TextBox 8"/>
+          <p:cNvSpPr txBox="1"/>
+          <p:nvPr/>
+        </p:nvSpPr>
+        <p:spPr>
+          <a:xfrm>
+            <a:off x="484632" y="4791456"/>
+            <a:ext cx="8138160" cy="182880"/>
+          </a:xfrm>
+          <a:prstGeom prst="rect">
+            <a:avLst/>
+          </a:prstGeom>
+          <a:noFill/>
+        </p:spPr>
+        <p:txBody>
+          <a:bodyPr wrap="square" lIns="0" rIns="0" tIns="0" bIns="0" anchor="t"/>
+          <a:lstStyle/>
+          <a:p>
+            <a:pPr algn="l"/>
+            <a:r>
+              <a:rPr sz="800" b="0">
+                <a:solidFill>
+                  <a:srgbClr val="8B949E"/>
+                </a:solidFill>
+                <a:latin typeface="Arial"/>
+              </a:rPr>
+              <a:t>Built from public FHFA and CFPB data. Not an official Fannie Mae, FHFA, or CFPB product.</a:t>
+            </a:r>
+          </a:p>
+        </p:txBody>
+      </p:sp>
+      <p:sp>
+        <p:nvSpPr>
+          <p:cNvPr id="10" name="Rounded Rectangle 9"/>
           <p:cNvSpPr/>
           <p:nvPr/>
         </p:nvSpPr>
         <p:spPr>
           <a:xfrm>
-            <a:off x="411480" y="1325880"/>
-            <a:ext cx="2651760" cy="3200400"/>
+            <a:off x="484632" y="1783080"/>
+            <a:ext cx="2560320" cy="2697480"/>
           </a:xfrm>
           <a:prstGeom prst="roundRect">
             <a:avLst>
-              <a:gd name="adj" fmla="val 4000"/>
+              <a:gd name="adj" fmla="val 5000"/>
             </a:avLst>
           </a:prstGeom>
           <a:solidFill>
@@ -7663,14 +6879,14 @@
       </p:sp>
       <p:sp>
         <p:nvSpPr>
-          <p:cNvPr id="5" name="Rectangle 4"/>
+          <p:cNvPr id="11" name="Rectangle 10"/>
           <p:cNvSpPr/>
           <p:nvPr/>
         </p:nvSpPr>
         <p:spPr>
           <a:xfrm>
-            <a:off x="411480" y="1325880"/>
-            <a:ext cx="2651760" cy="54864"/>
+            <a:off x="484632" y="1783080"/>
+            <a:ext cx="2560320" cy="54864"/>
           </a:xfrm>
           <a:prstGeom prst="rect">
             <a:avLst/>
@@ -7707,14 +6923,58 @@
       </p:sp>
       <p:sp>
         <p:nvSpPr>
-          <p:cNvPr id="6" name="TextBox 5"/>
+          <p:cNvPr id="12" name="Oval 11"/>
+          <p:cNvSpPr/>
+          <p:nvPr/>
+        </p:nvSpPr>
+        <p:spPr>
+          <a:xfrm>
+            <a:off x="685800" y="2011680"/>
+            <a:ext cx="292608" cy="292608"/>
+          </a:xfrm>
+          <a:prstGeom prst="ellipse">
+            <a:avLst/>
+          </a:prstGeom>
+          <a:solidFill>
+            <a:srgbClr val="58A6FF"/>
+          </a:solidFill>
+          <a:ln>
+            <a:noFill/>
+          </a:ln>
+          <a:effectLst/>
+        </p:spPr>
+        <p:style>
+          <a:lnRef idx="1">
+            <a:schemeClr val="accent1"/>
+          </a:lnRef>
+          <a:fillRef idx="3">
+            <a:schemeClr val="accent1"/>
+          </a:fillRef>
+          <a:effectRef idx="2">
+            <a:schemeClr val="accent1"/>
+          </a:effectRef>
+          <a:fontRef idx="minor">
+            <a:schemeClr val="lt1"/>
+          </a:fontRef>
+        </p:style>
+        <p:txBody>
+          <a:bodyPr rtlCol="0" anchor="ctr"/>
+          <a:lstStyle/>
+          <a:p>
+            <a:pPr algn="ctr"/>
+          </a:p>
+        </p:txBody>
+      </p:sp>
+      <p:sp>
+        <p:nvSpPr>
+          <p:cNvPr id="13" name="TextBox 12"/>
           <p:cNvSpPr txBox="1"/>
           <p:nvPr/>
         </p:nvSpPr>
         <p:spPr>
           <a:xfrm>
-            <a:off x="612648" y="1554480"/>
-            <a:ext cx="2249424" cy="670560"/>
+            <a:off x="685800" y="2011680"/>
+            <a:ext cx="292608" cy="292608"/>
           </a:xfrm>
           <a:prstGeom prst="rect">
             <a:avLst/>
@@ -7722,33 +6982,32 @@
           <a:noFill/>
         </p:spPr>
         <p:txBody>
-          <a:bodyPr wrap="square" anchor="t" lIns="0" rIns="0" tIns="0" bIns="0">
-            <a:spAutoFit/>
-          </a:bodyPr>
-          <a:lstStyle/>
-          <a:p>
+          <a:bodyPr wrap="square" lIns="0" rIns="0" tIns="0" bIns="0" anchor="ctr"/>
+          <a:lstStyle/>
+          <a:p>
+            <a:pPr algn="ctr"/>
             <a:r>
-              <a:rPr sz="4400" b="1">
+              <a:rPr sz="1200" b="1">
                 <a:solidFill>
-                  <a:srgbClr val="58A6FF"/>
+                  <a:srgbClr val="FFFFFF"/>
                 </a:solidFill>
                 <a:latin typeface="Arial"/>
               </a:rPr>
-              <a:t>+59.3%</a:t>
+              <a:t>1</a:t>
             </a:r>
           </a:p>
         </p:txBody>
       </p:sp>
       <p:sp>
         <p:nvSpPr>
-          <p:cNvPr id="7" name="TextBox 6"/>
+          <p:cNvPr id="14" name="TextBox 13"/>
           <p:cNvSpPr txBox="1"/>
           <p:nvPr/>
         </p:nvSpPr>
         <p:spPr>
           <a:xfrm>
-            <a:off x="612648" y="2316480"/>
-            <a:ext cx="2249424" cy="2072640"/>
+            <a:off x="1078992" y="2011680"/>
+            <a:ext cx="1828800" cy="292608"/>
           </a:xfrm>
           <a:prstGeom prst="rect">
             <a:avLst/>
@@ -7756,13 +7015,12 @@
           <a:noFill/>
         </p:spPr>
         <p:txBody>
-          <a:bodyPr wrap="square" anchor="t" lIns="0" rIns="0" tIns="0" bIns="0">
-            <a:spAutoFit/>
-          </a:bodyPr>
-          <a:lstStyle/>
-          <a:p>
+          <a:bodyPr wrap="square" lIns="0" rIns="0" tIns="0" bIns="0" anchor="ctr"/>
+          <a:lstStyle/>
+          <a:p>
+            <a:pPr algn="l"/>
             <a:r>
-              <a:rPr sz="1800" b="1">
+              <a:rPr sz="1300" b="1">
                 <a:solidFill>
                   <a:srgbClr val="F0F6FC"/>
                 </a:solidFill>
@@ -7771,38 +7029,88 @@
               <a:t>Prices are high</a:t>
             </a:r>
           </a:p>
-          <a:p>
-            <a:pPr>
-              <a:spcBef>
-                <a:spcPts val="600"/>
-              </a:spcBef>
-            </a:pPr>
+        </p:txBody>
+      </p:sp>
+      <p:sp>
+        <p:nvSpPr>
+          <p:cNvPr id="15" name="TextBox 14"/>
+          <p:cNvSpPr txBox="1"/>
+          <p:nvPr/>
+        </p:nvSpPr>
+        <p:spPr>
+          <a:xfrm>
+            <a:off x="685800" y="2514600"/>
+            <a:ext cx="2194560" cy="548640"/>
+          </a:xfrm>
+          <a:prstGeom prst="rect">
+            <a:avLst/>
+          </a:prstGeom>
+          <a:noFill/>
+        </p:spPr>
+        <p:txBody>
+          <a:bodyPr wrap="square" lIns="0" rIns="0" tIns="0" bIns="0" anchor="t"/>
+          <a:lstStyle/>
+          <a:p>
+            <a:pPr algn="l"/>
             <a:r>
-              <a:rPr sz="1500" b="0">
+              <a:rPr sz="2800" b="1">
+                <a:solidFill>
+                  <a:srgbClr val="F0F6FC"/>
+                </a:solidFill>
+                <a:latin typeface="Arial"/>
+              </a:rPr>
+              <a:t>+64%</a:t>
+            </a:r>
+          </a:p>
+        </p:txBody>
+      </p:sp>
+      <p:sp>
+        <p:nvSpPr>
+          <p:cNvPr id="16" name="TextBox 15"/>
+          <p:cNvSpPr txBox="1"/>
+          <p:nvPr/>
+        </p:nvSpPr>
+        <p:spPr>
+          <a:xfrm>
+            <a:off x="685800" y="3154680"/>
+            <a:ext cx="2194560" cy="1234440"/>
+          </a:xfrm>
+          <a:prstGeom prst="rect">
+            <a:avLst/>
+          </a:prstGeom>
+          <a:noFill/>
+        </p:spPr>
+        <p:txBody>
+          <a:bodyPr wrap="square" lIns="0" rIns="0" tIns="0" bIns="0" anchor="t"/>
+          <a:lstStyle/>
+          <a:p>
+            <a:pPr algn="l"/>
+            <a:r>
+              <a:rPr sz="1200" b="0">
                 <a:solidFill>
                   <a:srgbClr val="B1BAC4"/>
                 </a:solidFill>
                 <a:latin typeface="Arial"/>
               </a:rPr>
-              <a:t>The U.S. index is 59.3% above January 2020 and at a record high in Jul 2026.</a:t>
+              <a:t>U.S. index change since 2019 Q4. Growth slowed to +2.3% year over year in 2026 Q2.</a:t>
             </a:r>
           </a:p>
         </p:txBody>
       </p:sp>
       <p:sp>
         <p:nvSpPr>
-          <p:cNvPr id="8" name="Rounded Rectangle 7"/>
+          <p:cNvPr id="17" name="Rounded Rectangle 16"/>
           <p:cNvSpPr/>
           <p:nvPr/>
         </p:nvSpPr>
         <p:spPr>
           <a:xfrm>
-            <a:off x="3246120" y="1325880"/>
-            <a:ext cx="2651760" cy="3200400"/>
+            <a:off x="3291839" y="1783080"/>
+            <a:ext cx="2560320" cy="2697480"/>
           </a:xfrm>
           <a:prstGeom prst="roundRect">
             <a:avLst>
-              <a:gd name="adj" fmla="val 4000"/>
+              <a:gd name="adj" fmla="val 5000"/>
             </a:avLst>
           </a:prstGeom>
           <a:solidFill>
@@ -7839,20 +7147,20 @@
       </p:sp>
       <p:sp>
         <p:nvSpPr>
-          <p:cNvPr id="9" name="Rectangle 8"/>
+          <p:cNvPr id="18" name="Rectangle 17"/>
           <p:cNvSpPr/>
           <p:nvPr/>
         </p:nvSpPr>
         <p:spPr>
           <a:xfrm>
-            <a:off x="3246120" y="1325880"/>
-            <a:ext cx="2651760" cy="54864"/>
+            <a:off x="3291839" y="1783080"/>
+            <a:ext cx="2560320" cy="54864"/>
           </a:xfrm>
           <a:prstGeom prst="rect">
             <a:avLst/>
           </a:prstGeom>
           <a:solidFill>
-            <a:srgbClr val="D29922"/>
+            <a:srgbClr val="F0883E"/>
           </a:solidFill>
           <a:ln>
             <a:noFill/>
@@ -7883,14 +7191,58 @@
       </p:sp>
       <p:sp>
         <p:nvSpPr>
-          <p:cNvPr id="10" name="TextBox 9"/>
+          <p:cNvPr id="19" name="Oval 18"/>
+          <p:cNvSpPr/>
+          <p:nvPr/>
+        </p:nvSpPr>
+        <p:spPr>
+          <a:xfrm>
+            <a:off x="3493008" y="2011680"/>
+            <a:ext cx="292608" cy="292608"/>
+          </a:xfrm>
+          <a:prstGeom prst="ellipse">
+            <a:avLst/>
+          </a:prstGeom>
+          <a:solidFill>
+            <a:srgbClr val="58A6FF"/>
+          </a:solidFill>
+          <a:ln>
+            <a:noFill/>
+          </a:ln>
+          <a:effectLst/>
+        </p:spPr>
+        <p:style>
+          <a:lnRef idx="1">
+            <a:schemeClr val="accent1"/>
+          </a:lnRef>
+          <a:fillRef idx="3">
+            <a:schemeClr val="accent1"/>
+          </a:fillRef>
+          <a:effectRef idx="2">
+            <a:schemeClr val="accent1"/>
+          </a:effectRef>
+          <a:fontRef idx="minor">
+            <a:schemeClr val="lt1"/>
+          </a:fontRef>
+        </p:style>
+        <p:txBody>
+          <a:bodyPr rtlCol="0" anchor="ctr"/>
+          <a:lstStyle/>
+          <a:p>
+            <a:pPr algn="ctr"/>
+          </a:p>
+        </p:txBody>
+      </p:sp>
+      <p:sp>
+        <p:nvSpPr>
+          <p:cNvPr id="20" name="TextBox 19"/>
           <p:cNvSpPr txBox="1"/>
           <p:nvPr/>
         </p:nvSpPr>
         <p:spPr>
           <a:xfrm>
-            <a:off x="3447288" y="1554480"/>
-            <a:ext cx="2249424" cy="670560"/>
+            <a:off x="3493008" y="2011680"/>
+            <a:ext cx="292608" cy="292608"/>
           </a:xfrm>
           <a:prstGeom prst="rect">
             <a:avLst/>
@@ -7898,33 +7250,32 @@
           <a:noFill/>
         </p:spPr>
         <p:txBody>
-          <a:bodyPr wrap="square" anchor="t" lIns="0" rIns="0" tIns="0" bIns="0">
-            <a:spAutoFit/>
-          </a:bodyPr>
-          <a:lstStyle/>
-          <a:p>
+          <a:bodyPr wrap="square" lIns="0" rIns="0" tIns="0" bIns="0" anchor="ctr"/>
+          <a:lstStyle/>
+          <a:p>
+            <a:pPr algn="ctr"/>
             <a:r>
-              <a:rPr sz="4400" b="1">
+              <a:rPr sz="1200" b="1">
                 <a:solidFill>
-                  <a:srgbClr val="D29922"/>
+                  <a:srgbClr val="FFFFFF"/>
                 </a:solidFill>
                 <a:latin typeface="Arial"/>
               </a:rPr>
-              <a:t>+2.6%</a:t>
+              <a:t>2</a:t>
             </a:r>
           </a:p>
         </p:txBody>
       </p:sp>
       <p:sp>
         <p:nvSpPr>
-          <p:cNvPr id="11" name="TextBox 10"/>
+          <p:cNvPr id="21" name="TextBox 20"/>
           <p:cNvSpPr txBox="1"/>
           <p:nvPr/>
         </p:nvSpPr>
         <p:spPr>
           <a:xfrm>
-            <a:off x="3447288" y="2316480"/>
-            <a:ext cx="2249424" cy="2072640"/>
+            <a:off x="3886200" y="2011680"/>
+            <a:ext cx="1828800" cy="292608"/>
           </a:xfrm>
           <a:prstGeom prst="rect">
             <a:avLst/>
@@ -7932,53 +7283,102 @@
           <a:noFill/>
         </p:spPr>
         <p:txBody>
-          <a:bodyPr wrap="square" anchor="t" lIns="0" rIns="0" tIns="0" bIns="0">
-            <a:spAutoFit/>
-          </a:bodyPr>
-          <a:lstStyle/>
-          <a:p>
+          <a:bodyPr wrap="square" lIns="0" rIns="0" tIns="0" bIns="0" anchor="ctr"/>
+          <a:lstStyle/>
+          <a:p>
+            <a:pPr algn="l"/>
             <a:r>
-              <a:rPr sz="1800" b="1">
+              <a:rPr sz="1300" b="1">
                 <a:solidFill>
                   <a:srgbClr val="F0F6FC"/>
                 </a:solidFill>
                 <a:latin typeface="Arial"/>
               </a:rPr>
-              <a:t>Growth has slowed</a:t>
+              <a:t>Gains are uneven</a:t>
             </a:r>
           </a:p>
-          <a:p>
-            <a:pPr>
-              <a:spcBef>
-                <a:spcPts val="600"/>
-              </a:spcBef>
-            </a:pPr>
+        </p:txBody>
+      </p:sp>
+      <p:sp>
+        <p:nvSpPr>
+          <p:cNvPr id="22" name="TextBox 21"/>
+          <p:cNvSpPr txBox="1"/>
+          <p:nvPr/>
+        </p:nvSpPr>
+        <p:spPr>
+          <a:xfrm>
+            <a:off x="3493008" y="2514600"/>
+            <a:ext cx="2194560" cy="548640"/>
+          </a:xfrm>
+          <a:prstGeom prst="rect">
+            <a:avLst/>
+          </a:prstGeom>
+          <a:noFill/>
+        </p:spPr>
+        <p:txBody>
+          <a:bodyPr wrap="square" lIns="0" rIns="0" tIns="0" bIns="0" anchor="t"/>
+          <a:lstStyle/>
+          <a:p>
+            <a:pPr algn="l"/>
             <a:r>
-              <a:rPr sz="1500" b="0">
+              <a:rPr sz="2800" b="1">
+                <a:solidFill>
+                  <a:srgbClr val="F0F6FC"/>
+                </a:solidFill>
+                <a:latin typeface="Arial"/>
+              </a:rPr>
+              <a:t>26 of 100</a:t>
+            </a:r>
+          </a:p>
+        </p:txBody>
+      </p:sp>
+      <p:sp>
+        <p:nvSpPr>
+          <p:cNvPr id="23" name="TextBox 22"/>
+          <p:cNvSpPr txBox="1"/>
+          <p:nvPr/>
+        </p:nvSpPr>
+        <p:spPr>
+          <a:xfrm>
+            <a:off x="3493008" y="3154680"/>
+            <a:ext cx="2194560" cy="1234440"/>
+          </a:xfrm>
+          <a:prstGeom prst="rect">
+            <a:avLst/>
+          </a:prstGeom>
+          <a:noFill/>
+        </p:spPr>
+        <p:txBody>
+          <a:bodyPr wrap="square" lIns="0" rIns="0" tIns="0" bIns="0" anchor="t"/>
+          <a:lstStyle/>
+          <a:p>
+            <a:pPr algn="l"/>
+            <a:r>
+              <a:rPr sz="1200" b="0">
                 <a:solidFill>
                   <a:srgbClr val="B1BAC4"/>
                 </a:solidFill>
                 <a:latin typeface="Arial"/>
               </a:rPr>
-              <a:t>Annual growth fell from +18.9% in Jul 2021. In Q2 2026, 4 states and 26 of 100 large metros had price declines.</a:t>
+              <a:t>largest metros and 4 states show price declines. Alaska leads states at +8.3%.</a:t>
             </a:r>
           </a:p>
         </p:txBody>
       </p:sp>
       <p:sp>
         <p:nvSpPr>
-          <p:cNvPr id="12" name="Rounded Rectangle 11"/>
+          <p:cNvPr id="24" name="Rounded Rectangle 23"/>
           <p:cNvSpPr/>
           <p:nvPr/>
         </p:nvSpPr>
         <p:spPr>
           <a:xfrm>
-            <a:off x="6080760" y="1325880"/>
-            <a:ext cx="2651760" cy="3200400"/>
+            <a:off x="6099048" y="1783080"/>
+            <a:ext cx="2560320" cy="2697480"/>
           </a:xfrm>
           <a:prstGeom prst="roundRect">
             <a:avLst>
-              <a:gd name="adj" fmla="val 4000"/>
+              <a:gd name="adj" fmla="val 5000"/>
             </a:avLst>
           </a:prstGeom>
           <a:solidFill>
@@ -8015,20 +7415,20 @@
       </p:sp>
       <p:sp>
         <p:nvSpPr>
-          <p:cNvPr id="13" name="Rectangle 12"/>
+          <p:cNvPr id="25" name="Rectangle 24"/>
           <p:cNvSpPr/>
           <p:nvPr/>
         </p:nvSpPr>
         <p:spPr>
           <a:xfrm>
-            <a:off x="6080760" y="1325880"/>
-            <a:ext cx="2651760" cy="54864"/>
+            <a:off x="6099048" y="1783080"/>
+            <a:ext cx="2560320" cy="54864"/>
           </a:xfrm>
           <a:prstGeom prst="rect">
             <a:avLst/>
           </a:prstGeom>
           <a:solidFill>
-            <a:srgbClr val="3FB950"/>
+            <a:srgbClr val="8B949E"/>
           </a:solidFill>
           <a:ln>
             <a:noFill/>
@@ -8059,14 +7459,58 @@
       </p:sp>
       <p:sp>
         <p:nvSpPr>
-          <p:cNvPr id="14" name="TextBox 13"/>
+          <p:cNvPr id="26" name="Oval 25"/>
+          <p:cNvSpPr/>
+          <p:nvPr/>
+        </p:nvSpPr>
+        <p:spPr>
+          <a:xfrm>
+            <a:off x="6300216" y="2011680"/>
+            <a:ext cx="292608" cy="292608"/>
+          </a:xfrm>
+          <a:prstGeom prst="ellipse">
+            <a:avLst/>
+          </a:prstGeom>
+          <a:solidFill>
+            <a:srgbClr val="58A6FF"/>
+          </a:solidFill>
+          <a:ln>
+            <a:noFill/>
+          </a:ln>
+          <a:effectLst/>
+        </p:spPr>
+        <p:style>
+          <a:lnRef idx="1">
+            <a:schemeClr val="accent1"/>
+          </a:lnRef>
+          <a:fillRef idx="3">
+            <a:schemeClr val="accent1"/>
+          </a:fillRef>
+          <a:effectRef idx="2">
+            <a:schemeClr val="accent1"/>
+          </a:effectRef>
+          <a:fontRef idx="minor">
+            <a:schemeClr val="lt1"/>
+          </a:fontRef>
+        </p:style>
+        <p:txBody>
+          <a:bodyPr rtlCol="0" anchor="ctr"/>
+          <a:lstStyle/>
+          <a:p>
+            <a:pPr algn="ctr"/>
+          </a:p>
+        </p:txBody>
+      </p:sp>
+      <p:sp>
+        <p:nvSpPr>
+          <p:cNvPr id="27" name="TextBox 26"/>
           <p:cNvSpPr txBox="1"/>
           <p:nvPr/>
         </p:nvSpPr>
         <p:spPr>
           <a:xfrm>
-            <a:off x="6281928" y="1554480"/>
-            <a:ext cx="2249424" cy="670560"/>
+            <a:off x="6300216" y="2011680"/>
+            <a:ext cx="292608" cy="292608"/>
           </a:xfrm>
           <a:prstGeom prst="rect">
             <a:avLst/>
@@ -8074,33 +7518,32 @@
           <a:noFill/>
         </p:spPr>
         <p:txBody>
-          <a:bodyPr wrap="square" anchor="t" lIns="0" rIns="0" tIns="0" bIns="0">
-            <a:spAutoFit/>
-          </a:bodyPr>
-          <a:lstStyle/>
-          <a:p>
+          <a:bodyPr wrap="square" lIns="0" rIns="0" tIns="0" bIns="0" anchor="ctr"/>
+          <a:lstStyle/>
+          <a:p>
+            <a:pPr algn="ctr"/>
             <a:r>
-              <a:rPr sz="4400" b="1">
+              <a:rPr sz="1200" b="1">
                 <a:solidFill>
-                  <a:srgbClr val="3FB950"/>
+                  <a:srgbClr val="FFFFFF"/>
                 </a:solidFill>
                 <a:latin typeface="Arial"/>
               </a:rPr>
-              <a:t>-77.5%</a:t>
+              <a:t>3</a:t>
             </a:r>
           </a:p>
         </p:txBody>
       </p:sp>
       <p:sp>
         <p:nvSpPr>
-          <p:cNvPr id="15" name="TextBox 14"/>
+          <p:cNvPr id="28" name="TextBox 27"/>
           <p:cNvSpPr txBox="1"/>
           <p:nvPr/>
         </p:nvSpPr>
         <p:spPr>
           <a:xfrm>
-            <a:off x="6281928" y="2316480"/>
-            <a:ext cx="2249424" cy="2072640"/>
+            <a:off x="6693408" y="2011680"/>
+            <a:ext cx="1828800" cy="292608"/>
           </a:xfrm>
           <a:prstGeom prst="rect">
             <a:avLst/>
@@ -8108,85 +7551,84 @@
           <a:noFill/>
         </p:spPr>
         <p:txBody>
-          <a:bodyPr wrap="square" anchor="t" lIns="0" rIns="0" tIns="0" bIns="0">
-            <a:spAutoFit/>
-          </a:bodyPr>
-          <a:lstStyle/>
-          <a:p>
+          <a:bodyPr wrap="square" lIns="0" rIns="0" tIns="0" bIns="0" anchor="ctr"/>
+          <a:lstStyle/>
+          <a:p>
+            <a:pPr algn="l"/>
             <a:r>
-              <a:rPr sz="1800" b="1">
+              <a:rPr sz="1300" b="1">
                 <a:solidFill>
                   <a:srgbClr val="F0F6FC"/>
                 </a:solidFill>
                 <a:latin typeface="Arial"/>
               </a:rPr>
-              <a:t>Refinancing fell</a:t>
+              <a:t>Refinance is low</a:t>
             </a:r>
           </a:p>
-          <a:p>
-            <a:pPr>
-              <a:spcBef>
-                <a:spcPts val="600"/>
-              </a:spcBef>
-            </a:pPr>
+        </p:txBody>
+      </p:sp>
+      <p:sp>
+        <p:nvSpPr>
+          <p:cNvPr id="29" name="TextBox 28"/>
+          <p:cNvSpPr txBox="1"/>
+          <p:nvPr/>
+        </p:nvSpPr>
+        <p:spPr>
+          <a:xfrm>
+            <a:off x="6300216" y="2514600"/>
+            <a:ext cx="2194560" cy="548640"/>
+          </a:xfrm>
+          <a:prstGeom prst="rect">
+            <a:avLst/>
+          </a:prstGeom>
+          <a:noFill/>
+        </p:spPr>
+        <p:txBody>
+          <a:bodyPr wrap="square" lIns="0" rIns="0" tIns="0" bIns="0" anchor="t"/>
+          <a:lstStyle/>
+          <a:p>
+            <a:pPr algn="l"/>
             <a:r>
-              <a:rPr sz="1500" b="0">
+              <a:rPr sz="2800" b="1">
+                <a:solidFill>
+                  <a:srgbClr val="F0F6FC"/>
+                </a:solidFill>
+                <a:latin typeface="Arial"/>
+              </a:rPr>
+              <a:t>-78%</a:t>
+            </a:r>
+          </a:p>
+        </p:txBody>
+      </p:sp>
+      <p:sp>
+        <p:nvSpPr>
+          <p:cNvPr id="30" name="TextBox 29"/>
+          <p:cNvSpPr txBox="1"/>
+          <p:nvPr/>
+        </p:nvSpPr>
+        <p:spPr>
+          <a:xfrm>
+            <a:off x="6300216" y="3154680"/>
+            <a:ext cx="2194560" cy="1234440"/>
+          </a:xfrm>
+          <a:prstGeom prst="rect">
+            <a:avLst/>
+          </a:prstGeom>
+          <a:noFill/>
+        </p:spPr>
+        <p:txBody>
+          <a:bodyPr wrap="square" lIns="0" rIns="0" tIns="0" bIns="0" anchor="t"/>
+          <a:lstStyle/>
+          <a:p>
+            <a:pPr algn="l"/>
+            <a:r>
+              <a:rPr sz="1200" b="0">
                 <a:solidFill>
                   <a:srgbClr val="B1BAC4"/>
                 </a:solidFill>
                 <a:latin typeface="Arial"/>
               </a:rPr>
-              <a:t>Refinance loans fell from 8.9M in 2020 to 2.0M in 2025. Purchase loans were 64.2% of 2025 originations.</a:t>
-            </a:r>
-          </a:p>
-        </p:txBody>
-      </p:sp>
-      <p:sp>
-        <p:nvSpPr>
-          <p:cNvPr id="16" name="TextBox 15"/>
-          <p:cNvSpPr txBox="1"/>
-          <p:nvPr/>
-        </p:nvSpPr>
-        <p:spPr>
-          <a:xfrm>
-            <a:off x="411480" y="4663440"/>
-            <a:ext cx="8321040" cy="365760"/>
-          </a:xfrm>
-          <a:prstGeom prst="rect">
-            <a:avLst/>
-          </a:prstGeom>
-          <a:noFill/>
-        </p:spPr>
-        <p:txBody>
-          <a:bodyPr wrap="square" anchor="t" lIns="0" rIns="0" tIns="0" bIns="0">
-            <a:spAutoFit/>
-          </a:bodyPr>
-          <a:lstStyle/>
-          <a:p>
-            <a:r>
-              <a:rPr sz="800" b="0">
-                <a:solidFill>
-                  <a:srgbClr val="8B949E"/>
-                </a:solidFill>
-                <a:latin typeface="Arial"/>
-              </a:rPr>
-              <a:t>Sources: FHFA House Price Index, purchase-only (latest Jul 2026; Q2 2026 for states and metros); CFPB HMDA originations (latest 2025).</a:t>
-            </a:r>
-          </a:p>
-          <a:p>
-            <a:pPr>
-              <a:spcBef>
-                <a:spcPts val="320"/>
-              </a:spcBef>
-            </a:pPr>
-            <a:r>
-              <a:rPr sz="800" b="0">
-                <a:solidFill>
-                  <a:srgbClr val="8B949E"/>
-                </a:solidFill>
-                <a:latin typeface="Arial"/>
-              </a:rPr>
-              <a:t>Built from public FHFA and CFPB data. Not an official Fannie Mae, FHFA, or CFPB product.</a:t>
+              <a:t>Refinance loans in 2025 compared with 2020. Home purchase loans are 18% below 2018.</a:t>
             </a:r>
           </a:p>
         </p:txBody>
@@ -8505,44 +7947,44 @@
         <a:sysClr val="window" lastClr="FFFFFF"/>
       </a:lt1>
       <a:dk2>
-        <a:srgbClr val="1F497D"/>
+        <a:srgbClr val="0E2841"/>
       </a:dk2>
       <a:lt2>
-        <a:srgbClr val="EEECE1"/>
+        <a:srgbClr val="E8E8E8"/>
       </a:lt2>
       <a:accent1>
-        <a:srgbClr val="4F81BD"/>
+        <a:srgbClr val="156082"/>
       </a:accent1>
       <a:accent2>
-        <a:srgbClr val="C0504D"/>
+        <a:srgbClr val="E97132"/>
       </a:accent2>
       <a:accent3>
-        <a:srgbClr val="9BBB59"/>
+        <a:srgbClr val="196B24"/>
       </a:accent3>
       <a:accent4>
-        <a:srgbClr val="8064A2"/>
+        <a:srgbClr val="0F9ED5"/>
       </a:accent4>
       <a:accent5>
-        <a:srgbClr val="4BACC6"/>
+        <a:srgbClr val="A02B93"/>
       </a:accent5>
       <a:accent6>
-        <a:srgbClr val="F79646"/>
+        <a:srgbClr val="4EA72E"/>
       </a:accent6>
       <a:hlink>
-        <a:srgbClr val="0000FF"/>
+        <a:srgbClr val="467886"/>
       </a:hlink>
       <a:folHlink>
-        <a:srgbClr val="800080"/>
+        <a:srgbClr val="96607D"/>
       </a:folHlink>
     </a:clrScheme>
     <a:fontScheme name="Office">
       <a:majorFont>
-        <a:latin typeface="Calibri"/>
+        <a:latin typeface="Aptos Display" panose="02110004020202020204"/>
         <a:ea typeface=""/>
         <a:cs typeface=""/>
-        <a:font script="Jpan" typeface="ＭＳ Ｐゴシック"/>
+        <a:font script="Jpan" typeface="游ゴシック Light"/>
         <a:font script="Hang" typeface="맑은 고딕"/>
-        <a:font script="Hans" typeface="宋体"/>
+        <a:font script="Hans" typeface="等线 Light"/>
         <a:font script="Hant" typeface="新細明體"/>
         <a:font script="Arab" typeface="Times New Roman"/>
         <a:font script="Hebr" typeface="Times New Roman"/>
@@ -8570,14 +8012,31 @@
         <a:font script="Viet" typeface="Times New Roman"/>
         <a:font script="Uigh" typeface="Microsoft Uighur"/>
         <a:font script="Geor" typeface="Sylfaen"/>
+        <a:font script="Armn" typeface="Arial"/>
+        <a:font script="Bugi" typeface="Leelawadee UI"/>
+        <a:font script="Bopo" typeface="Microsoft JhengHei"/>
+        <a:font script="Java" typeface="Javanese Text"/>
+        <a:font script="Lisu" typeface="Segoe UI"/>
+        <a:font script="Mymr" typeface="Myanmar Text"/>
+        <a:font script="Nkoo" typeface="Ebrima"/>
+        <a:font script="Olck" typeface="Nirmala UI"/>
+        <a:font script="Osma" typeface="Ebrima"/>
+        <a:font script="Phag" typeface="Phagspa"/>
+        <a:font script="Syrn" typeface="Estrangelo Edessa"/>
+        <a:font script="Syrj" typeface="Estrangelo Edessa"/>
+        <a:font script="Syre" typeface="Estrangelo Edessa"/>
+        <a:font script="Sora" typeface="Nirmala UI"/>
+        <a:font script="Tale" typeface="Microsoft Tai Le"/>
+        <a:font script="Talu" typeface="Microsoft New Tai Lue"/>
+        <a:font script="Tfng" typeface="Ebrima"/>
       </a:majorFont>
       <a:minorFont>
-        <a:latin typeface="Calibri"/>
+        <a:latin typeface="Aptos" panose="02110004020202020204"/>
         <a:ea typeface=""/>
         <a:cs typeface=""/>
-        <a:font script="Jpan" typeface="ＭＳ Ｐゴシック"/>
+        <a:font script="Jpan" typeface="游ゴシック"/>
         <a:font script="Hang" typeface="맑은 고딕"/>
-        <a:font script="Hans" typeface="宋体"/>
+        <a:font script="Hans" typeface="等线"/>
         <a:font script="Hant" typeface="新細明體"/>
         <a:font script="Arab" typeface="Arial"/>
         <a:font script="Hebr" typeface="Arial"/>
@@ -8605,6 +8064,23 @@
         <a:font script="Viet" typeface="Arial"/>
         <a:font script="Uigh" typeface="Microsoft Uighur"/>
         <a:font script="Geor" typeface="Sylfaen"/>
+        <a:font script="Armn" typeface="Arial"/>
+        <a:font script="Bugi" typeface="Leelawadee UI"/>
+        <a:font script="Bopo" typeface="Microsoft JhengHei"/>
+        <a:font script="Java" typeface="Javanese Text"/>
+        <a:font script="Lisu" typeface="Segoe UI"/>
+        <a:font script="Mymr" typeface="Myanmar Text"/>
+        <a:font script="Nkoo" typeface="Ebrima"/>
+        <a:font script="Olck" typeface="Nirmala UI"/>
+        <a:font script="Osma" typeface="Ebrima"/>
+        <a:font script="Phag" typeface="Phagspa"/>
+        <a:font script="Syrn" typeface="Estrangelo Edessa"/>
+        <a:font script="Syrj" typeface="Estrangelo Edessa"/>
+        <a:font script="Syre" typeface="Estrangelo Edessa"/>
+        <a:font script="Sora" typeface="Nirmala UI"/>
+        <a:font script="Tale" typeface="Microsoft Tai Le"/>
+        <a:font script="Talu" typeface="Microsoft New Tai Lue"/>
+        <a:font script="Tfng" typeface="Ebrima"/>
       </a:minorFont>
     </a:fontScheme>
     <a:fmtScheme name="Office">
@@ -8616,180 +8092,136 @@
           <a:gsLst>
             <a:gs pos="0">
               <a:schemeClr val="phClr">
-                <a:tint val="50000"/>
-                <a:satMod val="300000"/>
+                <a:lumMod val="110000"/>
+                <a:satMod val="105000"/>
+                <a:tint val="67000"/>
               </a:schemeClr>
             </a:gs>
-            <a:gs pos="35000">
+            <a:gs pos="50000">
               <a:schemeClr val="phClr">
-                <a:tint val="37000"/>
-                <a:satMod val="300000"/>
+                <a:lumMod val="105000"/>
+                <a:satMod val="103000"/>
+                <a:tint val="73000"/>
               </a:schemeClr>
             </a:gs>
             <a:gs pos="100000">
               <a:schemeClr val="phClr">
-                <a:tint val="15000"/>
-                <a:satMod val="350000"/>
+                <a:lumMod val="105000"/>
+                <a:satMod val="109000"/>
+                <a:tint val="81000"/>
               </a:schemeClr>
             </a:gs>
           </a:gsLst>
-          <a:lin ang="16200000" scaled="1"/>
+          <a:lin ang="5400000" scaled="0"/>
         </a:gradFill>
         <a:gradFill rotWithShape="1">
           <a:gsLst>
             <a:gs pos="0">
               <a:schemeClr val="phClr">
-                <a:tint val="100000"/>
+                <a:satMod val="103000"/>
+                <a:lumMod val="102000"/>
+                <a:tint val="94000"/>
+              </a:schemeClr>
+            </a:gs>
+            <a:gs pos="50000">
+              <a:schemeClr val="phClr">
+                <a:satMod val="110000"/>
+                <a:lumMod val="100000"/>
                 <a:shade val="100000"/>
-                <a:satMod val="130000"/>
               </a:schemeClr>
             </a:gs>
             <a:gs pos="100000">
               <a:schemeClr val="phClr">
-                <a:tint val="50000"/>
-                <a:shade val="100000"/>
-                <a:satMod val="350000"/>
+                <a:lumMod val="99000"/>
+                <a:satMod val="120000"/>
+                <a:shade val="78000"/>
               </a:schemeClr>
             </a:gs>
           </a:gsLst>
-          <a:lin ang="16200000" scaled="0"/>
+          <a:lin ang="5400000" scaled="0"/>
         </a:gradFill>
       </a:fillStyleLst>
       <a:lnStyleLst>
-        <a:ln w="9525" cap="flat" cmpd="sng" algn="ctr">
+        <a:ln w="12700" cap="flat" cmpd="sng" algn="ctr">
           <a:solidFill>
-            <a:schemeClr val="phClr">
-              <a:shade val="95000"/>
-              <a:satMod val="105000"/>
-            </a:schemeClr>
+            <a:schemeClr val="phClr"/>
           </a:solidFill>
           <a:prstDash val="solid"/>
+          <a:miter lim="800000"/>
+        </a:ln>
+        <a:ln w="19050" cap="flat" cmpd="sng" algn="ctr">
+          <a:solidFill>
+            <a:schemeClr val="phClr"/>
+          </a:solidFill>
+          <a:prstDash val="solid"/>
+          <a:miter lim="800000"/>
         </a:ln>
         <a:ln w="25400" cap="flat" cmpd="sng" algn="ctr">
           <a:solidFill>
             <a:schemeClr val="phClr"/>
           </a:solidFill>
           <a:prstDash val="solid"/>
-        </a:ln>
-        <a:ln w="38100" cap="flat" cmpd="sng" algn="ctr">
-          <a:solidFill>
-            <a:schemeClr val="phClr"/>
-          </a:solidFill>
-          <a:prstDash val="solid"/>
+          <a:miter lim="800000"/>
         </a:ln>
       </a:lnStyleLst>
       <a:effectStyleLst>
         <a:effectStyle>
+          <a:effectLst/>
+        </a:effectStyle>
+        <a:effectStyle>
+          <a:effectLst/>
+        </a:effectStyle>
+        <a:effectStyle>
           <a:effectLst>
-            <a:outerShdw blurRad="40000" dist="20000" dir="5400000" rotWithShape="0">
+            <a:outerShdw blurRad="57150" dist="19050" dir="5400000" algn="ctr" rotWithShape="0">
               <a:srgbClr val="000000">
-                <a:alpha val="38000"/>
+                <a:alpha val="63000"/>
               </a:srgbClr>
             </a:outerShdw>
           </a:effectLst>
-        </a:effectStyle>
-        <a:effectStyle>
-          <a:effectLst>
-            <a:outerShdw blurRad="40000" dist="23000" dir="5400000" rotWithShape="0">
-              <a:srgbClr val="000000">
-                <a:alpha val="35000"/>
-              </a:srgbClr>
-            </a:outerShdw>
-          </a:effectLst>
-        </a:effectStyle>
-        <a:effectStyle>
-          <a:effectLst>
-            <a:outerShdw blurRad="40000" dist="23000" dir="5400000" rotWithShape="0">
-              <a:srgbClr val="000000">
-                <a:alpha val="35000"/>
-              </a:srgbClr>
-            </a:outerShdw>
-          </a:effectLst>
-          <a:scene3d>
-            <a:camera prst="orthographicFront">
-              <a:rot lat="0" lon="0" rev="0"/>
-            </a:camera>
-            <a:lightRig rig="threePt" dir="t">
-              <a:rot lat="0" lon="0" rev="1200000"/>
-            </a:lightRig>
-          </a:scene3d>
-          <a:sp3d>
-            <a:bevelT w="63500" h="25400"/>
-          </a:sp3d>
         </a:effectStyle>
       </a:effectStyleLst>
       <a:bgFillStyleLst>
         <a:solidFill>
           <a:schemeClr val="phClr"/>
         </a:solidFill>
+        <a:solidFill>
+          <a:schemeClr val="phClr">
+            <a:tint val="95000"/>
+            <a:satMod val="170000"/>
+          </a:schemeClr>
+        </a:solidFill>
         <a:gradFill rotWithShape="1">
           <a:gsLst>
             <a:gs pos="0">
               <a:schemeClr val="phClr">
-                <a:tint val="40000"/>
-                <a:satMod val="350000"/>
+                <a:tint val="93000"/>
+                <a:satMod val="150000"/>
+                <a:shade val="98000"/>
+                <a:lumMod val="102000"/>
               </a:schemeClr>
             </a:gs>
-            <a:gs pos="40000">
+            <a:gs pos="50000">
               <a:schemeClr val="phClr">
-                <a:tint val="45000"/>
-                <a:shade val="99000"/>
-                <a:satMod val="350000"/>
+                <a:tint val="98000"/>
+                <a:satMod val="130000"/>
+                <a:shade val="90000"/>
+                <a:lumMod val="103000"/>
               </a:schemeClr>
             </a:gs>
             <a:gs pos="100000">
               <a:schemeClr val="phClr">
-                <a:shade val="20000"/>
-                <a:satMod val="255000"/>
+                <a:shade val="63000"/>
+                <a:satMod val="120000"/>
               </a:schemeClr>
             </a:gs>
           </a:gsLst>
-          <a:path path="circle">
-            <a:fillToRect l="50000" t="-80000" r="50000" b="180000"/>
-          </a:path>
-        </a:gradFill>
-        <a:gradFill rotWithShape="1">
-          <a:gsLst>
-            <a:gs pos="0">
-              <a:schemeClr val="phClr">
-                <a:tint val="80000"/>
-                <a:satMod val="300000"/>
-              </a:schemeClr>
-            </a:gs>
-            <a:gs pos="100000">
-              <a:schemeClr val="phClr">
-                <a:shade val="30000"/>
-                <a:satMod val="200000"/>
-              </a:schemeClr>
-            </a:gs>
-          </a:gsLst>
-          <a:path path="circle">
-            <a:fillToRect l="50000" t="50000" r="50000" b="50000"/>
-          </a:path>
+          <a:lin ang="5400000" scaled="0"/>
         </a:gradFill>
       </a:bgFillStyleLst>
     </a:fmtScheme>
   </a:themeElements>
   <a:objectDefaults>
-    <a:spDef>
-      <a:spPr/>
-      <a:bodyPr/>
-      <a:lstStyle/>
-      <a:style>
-        <a:lnRef idx="1">
-          <a:schemeClr val="accent1"/>
-        </a:lnRef>
-        <a:fillRef idx="3">
-          <a:schemeClr val="accent1"/>
-        </a:fillRef>
-        <a:effectRef idx="2">
-          <a:schemeClr val="accent1"/>
-        </a:effectRef>
-        <a:fontRef idx="minor">
-          <a:schemeClr val="lt1"/>
-        </a:fontRef>
-      </a:style>
-    </a:spDef>
     <a:lnDef>
       <a:spPr/>
       <a:bodyPr/>
@@ -8811,5 +8243,10 @@
     </a:lnDef>
   </a:objectDefaults>
   <a:extraClrSchemeLst/>
+  <a:extLst>
+    <a:ext uri="{05A4C25C-085E-4340-85A3-A5531E510DB2}">
+      <thm15:themeFamily xmlns:thm15="http://schemas.microsoft.com/office/thememl/2012/main" name="Office Theme" id="{2E142A2C-CD16-42D6-873A-C26D2A0506FA}" vid="{1BDDFF52-6CD6-40A5-AB3C-68EB2F1E4D0A}"/>
+    </a:ext>
+  </a:extLst>
 </a:theme>
 </file>
--- a/briefings/housing-market-briefing.pptx
+++ b/briefings/housing-market-briefing.pptx
@@ -136,7 +136,7 @@
               <c:strCache>
                 <c:ptCount val="1"/>
                 <c:pt idx="0">
-                  <c:v>U.S. HPI</c:v>
+                  <c:v>U.S. HPI, seasonally adjusted</c:v>
                 </c:pt>
               </c:strCache>
             </c:strRef>
@@ -175,7 +175,7 @@
                           <a:srgbClr val="B1BAC4"/>
                         </a:solidFill>
                       </a:rPr>
-                      <a:t>275.0</a:t>
+                      <a:t>271.5</a:t>
                     </a:r>
                   </a:p>
                 </c:rich>
@@ -211,7 +211,7 @@
                           <a:srgbClr val="F0F6FC"/>
                         </a:solidFill>
                       </a:rPr>
-                      <a:t>450.9</a:t>
+                      <a:t>435.7</a:t>
                     </a:r>
                   </a:p>
                 </c:rich>
@@ -673,430 +673,430 @@
                 <c:formatCode>General</c:formatCode>
                 <c:ptCount val="142"/>
                 <c:pt idx="0">
-                  <c:v>100.3</c:v>
+                  <c:v>100.0</c:v>
                 </c:pt>
                 <c:pt idx="1">
+                  <c:v>100.0</c:v>
+                </c:pt>
+                <c:pt idx="2">
+                  <c:v>100.2</c:v>
+                </c:pt>
+                <c:pt idx="3">
                   <c:v>101.0</c:v>
                 </c:pt>
-                <c:pt idx="2">
-                  <c:v>101.3</c:v>
-                </c:pt>
-                <c:pt idx="3">
-                  <c:v>101.9</c:v>
-                </c:pt>
                 <c:pt idx="4">
-                  <c:v>102.7</c:v>
+                  <c:v>102.3</c:v>
                 </c:pt>
                 <c:pt idx="5">
-                  <c:v>103.1</c:v>
+                  <c:v>102.1</c:v>
                 </c:pt>
                 <c:pt idx="6">
-                  <c:v>104.1</c:v>
+                  <c:v>103.0</c:v>
                 </c:pt>
                 <c:pt idx="7">
-                  <c:v>104.7</c:v>
+                  <c:v>103.8</c:v>
                 </c:pt>
                 <c:pt idx="8">
-                  <c:v>104.2</c:v>
+                  <c:v>103.8</c:v>
                 </c:pt>
                 <c:pt idx="9">
-                  <c:v>105.9</c:v>
+                  <c:v>104.8</c:v>
                 </c:pt>
                 <c:pt idx="10">
-                  <c:v>106.9</c:v>
+                  <c:v>105.6</c:v>
                 </c:pt>
                 <c:pt idx="11">
-                  <c:v>107.5</c:v>
+                  <c:v>106.7</c:v>
                 </c:pt>
                 <c:pt idx="12">
-                  <c:v>108.0</c:v>
+                  <c:v>107.6</c:v>
                 </c:pt>
                 <c:pt idx="13">
-                  <c:v>109.6</c:v>
+                  <c:v>108.5</c:v>
                 </c:pt>
                 <c:pt idx="14">
-                  <c:v>110.5</c:v>
+                  <c:v>109.1</c:v>
                 </c:pt>
                 <c:pt idx="15">
-                  <c:v>110.6</c:v>
+                  <c:v>109.7</c:v>
                 </c:pt>
                 <c:pt idx="16">
-                  <c:v>110.8</c:v>
+                  <c:v>110.3</c:v>
                 </c:pt>
                 <c:pt idx="17">
-                  <c:v>112.2</c:v>
+                  <c:v>111.0</c:v>
                 </c:pt>
                 <c:pt idx="18">
-                  <c:v>113.5</c:v>
+                  <c:v>112.0</c:v>
                 </c:pt>
                 <c:pt idx="19">
+                  <c:v>112.7</c:v>
+                </c:pt>
+                <c:pt idx="20">
                   <c:v>113.6</c:v>
                 </c:pt>
-                <c:pt idx="20">
-                  <c:v>114.1</c:v>
-                </c:pt>
                 <c:pt idx="21">
+                  <c:v>114.4</c:v>
+                </c:pt>
+                <c:pt idx="22">
+                  <c:v>115.1</c:v>
+                </c:pt>
+                <c:pt idx="23">
                   <c:v>115.8</c:v>
                 </c:pt>
-                <c:pt idx="22">
-                  <c:v>116.7</c:v>
-                </c:pt>
-                <c:pt idx="23">
-                  <c:v>116.7</c:v>
-                </c:pt>
                 <c:pt idx="24">
-                  <c:v>117.0</c:v>
+                  <c:v>116.5</c:v>
                 </c:pt>
                 <c:pt idx="25">
-                  <c:v>118.9</c:v>
+                  <c:v>117.5</c:v>
                 </c:pt>
                 <c:pt idx="26">
-                  <c:v>120.0</c:v>
+                  <c:v>118.3</c:v>
                 </c:pt>
                 <c:pt idx="27">
-                  <c:v>120.5</c:v>
+                  <c:v>119.6</c:v>
                 </c:pt>
                 <c:pt idx="28">
-                  <c:v>121.6</c:v>
+                  <c:v>121.1</c:v>
                 </c:pt>
                 <c:pt idx="29">
+                  <c:v>122.7</c:v>
+                </c:pt>
+                <c:pt idx="30">
                   <c:v>124.3</c:v>
                 </c:pt>
-                <c:pt idx="30">
-                  <c:v>126.2</c:v>
-                </c:pt>
                 <c:pt idx="31">
-                  <c:v>127.4</c:v>
+                  <c:v>126.4</c:v>
                 </c:pt>
                 <c:pt idx="32">
-                  <c:v>128.8</c:v>
+                  <c:v>128.2</c:v>
                 </c:pt>
                 <c:pt idx="33">
-                  <c:v>131.8</c:v>
+                  <c:v>130.1</c:v>
                 </c:pt>
                 <c:pt idx="34">
+                  <c:v>132.1</c:v>
+                </c:pt>
+                <c:pt idx="35">
                   <c:v>134.1</c:v>
                 </c:pt>
-                <c:pt idx="35">
-                  <c:v>135.1</c:v>
-                </c:pt>
                 <c:pt idx="36">
-                  <c:v>137.1</c:v>
+                  <c:v>136.4</c:v>
                 </c:pt>
                 <c:pt idx="37">
-                  <c:v>140.6</c:v>
+                  <c:v>138.7</c:v>
                 </c:pt>
                 <c:pt idx="38">
-                  <c:v>143.1</c:v>
+                  <c:v>140.9</c:v>
                 </c:pt>
                 <c:pt idx="39">
-                  <c:v>144.6</c:v>
+                  <c:v>143.4</c:v>
                 </c:pt>
                 <c:pt idx="40">
-                  <c:v>146.7</c:v>
+                  <c:v>146.0</c:v>
                 </c:pt>
                 <c:pt idx="41">
-                  <c:v>150.4</c:v>
+                  <c:v>148.4</c:v>
                 </c:pt>
                 <c:pt idx="42">
-                  <c:v>153.1</c:v>
+                  <c:v>150.6</c:v>
                 </c:pt>
                 <c:pt idx="43">
-                  <c:v>154.3</c:v>
+                  <c:v>153.0</c:v>
                 </c:pt>
                 <c:pt idx="44">
-                  <c:v>156.3</c:v>
+                  <c:v>155.5</c:v>
                 </c:pt>
                 <c:pt idx="45">
-                  <c:v>160.6</c:v>
+                  <c:v>158.4</c:v>
                 </c:pt>
                 <c:pt idx="46">
-                  <c:v>164.1</c:v>
+                  <c:v>161.4</c:v>
                 </c:pt>
                 <c:pt idx="47">
-                  <c:v>166.1</c:v>
+                  <c:v>164.6</c:v>
                 </c:pt>
                 <c:pt idx="48">
-                  <c:v>168.3</c:v>
+                  <c:v>167.5</c:v>
                 </c:pt>
                 <c:pt idx="49">
-                  <c:v>172.6</c:v>
+                  <c:v>170.2</c:v>
                 </c:pt>
                 <c:pt idx="50">
-                  <c:v>176.6</c:v>
+                  <c:v>173.6</c:v>
                 </c:pt>
                 <c:pt idx="51">
-                  <c:v>179.0</c:v>
+                  <c:v>177.4</c:v>
                 </c:pt>
                 <c:pt idx="52">
-                  <c:v>182.0</c:v>
+                  <c:v>181.4</c:v>
                 </c:pt>
                 <c:pt idx="53">
+                  <c:v>186.0</c:v>
+                </c:pt>
+                <c:pt idx="54">
+                  <c:v>190.8</c:v>
+                </c:pt>
+                <c:pt idx="55">
+                  <c:v>195.4</c:v>
+                </c:pt>
+                <c:pt idx="56">
+                  <c:v>200.3</c:v>
+                </c:pt>
+                <c:pt idx="57">
+                  <c:v>205.6</c:v>
+                </c:pt>
+                <c:pt idx="58">
+                  <c:v>211.0</c:v>
+                </c:pt>
+                <c:pt idx="59">
+                  <c:v>215.5</c:v>
+                </c:pt>
+                <c:pt idx="60">
+                  <c:v>218.7</c:v>
+                </c:pt>
+                <c:pt idx="61">
+                  <c:v>220.2</c:v>
+                </c:pt>
+                <c:pt idx="62">
+                  <c:v>220.5</c:v>
+                </c:pt>
+                <c:pt idx="63">
+                  <c:v>221.5</c:v>
+                </c:pt>
+                <c:pt idx="64">
+                  <c:v>222.8</c:v>
+                </c:pt>
+                <c:pt idx="65">
+                  <c:v>222.2</c:v>
+                </c:pt>
+                <c:pt idx="66">
+                  <c:v>219.3</c:v>
+                </c:pt>
+                <c:pt idx="67">
+                  <c:v>215.3</c:v>
+                </c:pt>
+                <c:pt idx="68">
+                  <c:v>210.4</c:v>
+                </c:pt>
+                <c:pt idx="69">
+                  <c:v>204.5</c:v>
+                </c:pt>
+                <c:pt idx="70">
+                  <c:v>199.3</c:v>
+                </c:pt>
+                <c:pt idx="71">
+                  <c:v>193.5</c:v>
+                </c:pt>
+                <c:pt idx="72">
+                  <c:v>192.2</c:v>
+                </c:pt>
+                <c:pt idx="73">
+                  <c:v>189.6</c:v>
+                </c:pt>
+                <c:pt idx="74">
                   <c:v>188.7</c:v>
                 </c:pt>
-                <c:pt idx="54">
-                  <c:v>194.1</c:v>
-                </c:pt>
-                <c:pt idx="55">
-                  <c:v>197.1</c:v>
-                </c:pt>
-                <c:pt idx="56">
-                  <c:v>200.8</c:v>
-                </c:pt>
-                <c:pt idx="57">
-                  <c:v>208.6</c:v>
-                </c:pt>
-                <c:pt idx="58">
-                  <c:v>214.7</c:v>
-                </c:pt>
-                <c:pt idx="59">
-                  <c:v>217.1</c:v>
-                </c:pt>
-                <c:pt idx="60">
-                  <c:v>219.2</c:v>
-                </c:pt>
-                <c:pt idx="61">
-                  <c:v>223.5</c:v>
-                </c:pt>
-                <c:pt idx="62">
-                  <c:v>224.4</c:v>
-                </c:pt>
-                <c:pt idx="63">
-                  <c:v>223.1</c:v>
-                </c:pt>
-                <c:pt idx="64">
-                  <c:v>223.2</c:v>
-                </c:pt>
-                <c:pt idx="65">
-                  <c:v>225.9</c:v>
-                </c:pt>
-                <c:pt idx="66">
-                  <c:v>223.3</c:v>
-                </c:pt>
-                <c:pt idx="67">
-                  <c:v>216.9</c:v>
-                </c:pt>
-                <c:pt idx="68">
-                  <c:v>210.9</c:v>
-                </c:pt>
-                <c:pt idx="69">
-                  <c:v>208.1</c:v>
-                </c:pt>
-                <c:pt idx="70">
-                  <c:v>203.0</c:v>
-                </c:pt>
-                <c:pt idx="71">
-                  <c:v>194.7</c:v>
-                </c:pt>
-                <c:pt idx="72">
-                  <c:v>192.6</c:v>
-                </c:pt>
-                <c:pt idx="73">
-                  <c:v>193.2</c:v>
-                </c:pt>
-                <c:pt idx="74">
-                  <c:v>192.7</c:v>
-                </c:pt>
                 <c:pt idx="75">
-                  <c:v>190.4</c:v>
+                  <c:v>188.6</c:v>
                 </c:pt>
                 <c:pt idx="76">
-                  <c:v>187.1</c:v>
+                  <c:v>186.9</c:v>
                 </c:pt>
                 <c:pt idx="77">
-                  <c:v>189.9</c:v>
+                  <c:v>185.9</c:v>
                 </c:pt>
                 <c:pt idx="78">
-                  <c:v>187.2</c:v>
+                  <c:v>182.9</c:v>
                 </c:pt>
                 <c:pt idx="79">
-                  <c:v>183.1</c:v>
+                  <c:v>181.1</c:v>
                 </c:pt>
                 <c:pt idx="80">
-                  <c:v>177.3</c:v>
+                  <c:v>177.0</c:v>
                 </c:pt>
                 <c:pt idx="81">
-                  <c:v>179.5</c:v>
+                  <c:v>175.5</c:v>
                 </c:pt>
                 <c:pt idx="82">
-                  <c:v>180.6</c:v>
+                  <c:v>176.0</c:v>
                 </c:pt>
                 <c:pt idx="83">
-                  <c:v>178.3</c:v>
+                  <c:v>176.3</c:v>
                 </c:pt>
                 <c:pt idx="84">
                   <c:v>177.1</c:v>
                 </c:pt>
                 <c:pt idx="85">
-                  <c:v>184.2</c:v>
+                  <c:v>179.9</c:v>
                 </c:pt>
                 <c:pt idx="86">
-                  <c:v>187.0</c:v>
+                  <c:v>182.0</c:v>
                 </c:pt>
                 <c:pt idx="87">
-                  <c:v>186.9</c:v>
+                  <c:v>184.8</c:v>
                 </c:pt>
                 <c:pt idx="88">
-                  <c:v>188.8</c:v>
+                  <c:v>188.6</c:v>
                 </c:pt>
                 <c:pt idx="89">
-                  <c:v>197.2</c:v>
+                  <c:v>192.3</c:v>
                 </c:pt>
                 <c:pt idx="90">
-                  <c:v>200.7</c:v>
+                  <c:v>195.3</c:v>
                 </c:pt>
                 <c:pt idx="91">
-                  <c:v>199.5</c:v>
+                  <c:v>197.3</c:v>
                 </c:pt>
                 <c:pt idx="92">
-                  <c:v>200.1</c:v>
+                  <c:v>199.7</c:v>
                 </c:pt>
                 <c:pt idx="93">
-                  <c:v>206.7</c:v>
+                  <c:v>201.4</c:v>
                 </c:pt>
                 <c:pt idx="94">
-                  <c:v>209.2</c:v>
+                  <c:v>203.6</c:v>
                 </c:pt>
                 <c:pt idx="95">
-                  <c:v>208.5</c:v>
+                  <c:v>206.2</c:v>
                 </c:pt>
                 <c:pt idx="96">
-                  <c:v>209.8</c:v>
+                  <c:v>209.0</c:v>
                 </c:pt>
                 <c:pt idx="97">
-                  <c:v>217.4</c:v>
+                  <c:v>211.7</c:v>
                 </c:pt>
                 <c:pt idx="98">
-                  <c:v>220.1</c:v>
+                  <c:v>214.2</c:v>
                 </c:pt>
                 <c:pt idx="99">
-                  <c:v>219.8</c:v>
+                  <c:v>217.3</c:v>
                 </c:pt>
                 <c:pt idx="100">
-                  <c:v>221.2</c:v>
+                  <c:v>219.9</c:v>
                 </c:pt>
                 <c:pt idx="101">
-                  <c:v>229.2</c:v>
+                  <c:v>223.1</c:v>
                 </c:pt>
                 <c:pt idx="102">
-                  <c:v>232.6</c:v>
+                  <c:v>226.4</c:v>
                 </c:pt>
                 <c:pt idx="103">
-                  <c:v>232.7</c:v>
+                  <c:v>229.9</c:v>
                 </c:pt>
                 <c:pt idx="104">
-                  <c:v>234.6</c:v>
+                  <c:v>232.9</c:v>
                 </c:pt>
                 <c:pt idx="105">
-                  <c:v>243.4</c:v>
+                  <c:v>236.9</c:v>
                 </c:pt>
                 <c:pt idx="106">
-                  <c:v>246.9</c:v>
+                  <c:v>240.4</c:v>
                 </c:pt>
                 <c:pt idx="107">
-                  <c:v>247.1</c:v>
+                  <c:v>244.1</c:v>
                 </c:pt>
                 <c:pt idx="108">
-                  <c:v>250.9</c:v>
+                  <c:v>248.6</c:v>
                 </c:pt>
                 <c:pt idx="109">
-                  <c:v>258.5</c:v>
+                  <c:v>251.4</c:v>
                 </c:pt>
                 <c:pt idx="110">
-                  <c:v>261.4</c:v>
+                  <c:v>254.6</c:v>
                 </c:pt>
                 <c:pt idx="111">
-                  <c:v>260.6</c:v>
+                  <c:v>257.4</c:v>
                 </c:pt>
                 <c:pt idx="112">
-                  <c:v>263.2</c:v>
+                  <c:v>260.5</c:v>
                 </c:pt>
                 <c:pt idx="113">
-                  <c:v>271.3</c:v>
+                  <c:v>263.5</c:v>
                 </c:pt>
                 <c:pt idx="114">
-                  <c:v>274.1</c:v>
+                  <c:v>267.0</c:v>
                 </c:pt>
                 <c:pt idx="115">
-                  <c:v>275.0</c:v>
+                  <c:v>271.5</c:v>
                 </c:pt>
                 <c:pt idx="116">
-                  <c:v>279.6</c:v>
+                  <c:v>276.7</c:v>
                 </c:pt>
                 <c:pt idx="117">
-                  <c:v>286.6</c:v>
+                  <c:v>278.3</c:v>
                 </c:pt>
                 <c:pt idx="118">
-                  <c:v>296.6</c:v>
+                  <c:v>288.8</c:v>
                 </c:pt>
                 <c:pt idx="119">
-                  <c:v>305.5</c:v>
+                  <c:v>301.7</c:v>
                 </c:pt>
                 <c:pt idx="120">
-                  <c:v>316.0</c:v>
+                  <c:v>312.5</c:v>
                 </c:pt>
                 <c:pt idx="121">
-                  <c:v>336.8</c:v>
+                  <c:v>326.6</c:v>
                 </c:pt>
                 <c:pt idx="122">
-                  <c:v>350.4</c:v>
+                  <c:v>341.2</c:v>
                 </c:pt>
                 <c:pt idx="123">
-                  <c:v>358.3</c:v>
+                  <c:v>354.1</c:v>
                 </c:pt>
                 <c:pt idx="124">
-                  <c:v>373.3</c:v>
+                  <c:v>369.1</c:v>
                 </c:pt>
                 <c:pt idx="125">
-                  <c:v>393.3</c:v>
+                  <c:v>380.8</c:v>
                 </c:pt>
                 <c:pt idx="126">
-                  <c:v>390.5</c:v>
+                  <c:v>380.4</c:v>
                 </c:pt>
                 <c:pt idx="127">
-                  <c:v>385.3</c:v>
+                  <c:v>381.3</c:v>
                 </c:pt>
                 <c:pt idx="128">
-                  <c:v>388.6</c:v>
+                  <c:v>384.2</c:v>
                 </c:pt>
                 <c:pt idx="129">
-                  <c:v>404.4</c:v>
+                  <c:v>391.5</c:v>
                 </c:pt>
                 <c:pt idx="130">
-                  <c:v>410.5</c:v>
+                  <c:v>400.0</c:v>
                 </c:pt>
                 <c:pt idx="131">
-                  <c:v>409.4</c:v>
+                  <c:v>404.6</c:v>
                 </c:pt>
                 <c:pt idx="132">
-                  <c:v>414.1</c:v>
+                  <c:v>408.9</c:v>
                 </c:pt>
                 <c:pt idx="133">
-                  <c:v>427.8</c:v>
+                  <c:v>413.8</c:v>
                 </c:pt>
                 <c:pt idx="134">
-                  <c:v>429.1</c:v>
+                  <c:v>417.8</c:v>
                 </c:pt>
                 <c:pt idx="135">
-                  <c:v>428.8</c:v>
+                  <c:v>423.1</c:v>
                 </c:pt>
                 <c:pt idx="136">
-                  <c:v>432.6</c:v>
+                  <c:v>426.2</c:v>
                 </c:pt>
                 <c:pt idx="137">
-                  <c:v>441.0</c:v>
+                  <c:v>426.6</c:v>
                 </c:pt>
                 <c:pt idx="138">
-                  <c:v>439.5</c:v>
+                  <c:v>428.1</c:v>
                 </c:pt>
                 <c:pt idx="139">
-                  <c:v>437.9</c:v>
+                  <c:v>431.7</c:v>
                 </c:pt>
                 <c:pt idx="140">
-                  <c:v>441.2</c:v>
+                  <c:v>434.2</c:v>
                 </c:pt>
                 <c:pt idx="141">
-                  <c:v>450.9</c:v>
+                  <c:v>435.7</c:v>
                 </c:pt>
               </c:numCache>
             </c:numRef>
@@ -1334,7 +1334,7 @@
                           <a:srgbClr val="F0F6FC"/>
                         </a:solidFill>
                       </a:rPr>
-                      <a:t>18.2%</a:t>
+                      <a:t>18.1%</a:t>
                     </a:r>
                   </a:p>
                 </c:rich>
@@ -1360,7 +1360,7 @@
                           <a:srgbClr val="F0F6FC"/>
                         </a:solidFill>
                       </a:rPr>
-                      <a:t>2.3%</a:t>
+                      <a:t>2.1%</a:t>
                     </a:r>
                   </a:p>
                 </c:rich>
@@ -1498,16 +1498,16 @@
                 <c:formatCode>General</c:formatCode>
                 <c:ptCount val="34"/>
                 <c:pt idx="0">
-                  <c:v>6.9</c:v>
+                  <c:v>6.8</c:v>
                 </c:pt>
                 <c:pt idx="1">
-                  <c:v>6.2</c:v>
+                  <c:v>6.1</c:v>
                 </c:pt>
                 <c:pt idx="2">
-                  <c:v>5.9</c:v>
+                  <c:v>5.8</c:v>
                 </c:pt>
                 <c:pt idx="3">
-                  <c:v>5.5</c:v>
+                  <c:v>5.4</c:v>
                 </c:pt>
                 <c:pt idx="4">
                   <c:v>4.9</c:v>
@@ -1516,22 +1516,22 @@
                   <c:v>4.9</c:v>
                 </c:pt>
                 <c:pt idx="6">
-                  <c:v>4.9</c:v>
+                  <c:v>4.8</c:v>
                 </c:pt>
                 <c:pt idx="7">
-                  <c:v>5.5</c:v>
+                  <c:v>5.4</c:v>
                 </c:pt>
                 <c:pt idx="8">
                   <c:v>6.2</c:v>
                 </c:pt>
                 <c:pt idx="9">
-                  <c:v>5.6</c:v>
+                  <c:v>5.7</c:v>
                 </c:pt>
                 <c:pt idx="10">
-                  <c:v>8.2</c:v>
+                  <c:v>8.1</c:v>
                 </c:pt>
                 <c:pt idx="11">
-                  <c:v>11.1</c:v>
+                  <c:v>11.0</c:v>
                 </c:pt>
                 <c:pt idx="12">
                   <c:v>13.0</c:v>
@@ -1540,7 +1540,7 @@
                   <c:v>17.5</c:v>
                 </c:pt>
                 <c:pt idx="14">
-                  <c:v>18.2</c:v>
+                  <c:v>18.1</c:v>
                 </c:pt>
                 <c:pt idx="15">
                   <c:v>17.3</c:v>
@@ -1549,13 +1549,13 @@
                   <c:v>18.1</c:v>
                 </c:pt>
                 <c:pt idx="17">
-                  <c:v>16.8</c:v>
+                  <c:v>16.7</c:v>
                 </c:pt>
                 <c:pt idx="18">
-                  <c:v>11.4</c:v>
+                  <c:v>11.5</c:v>
                 </c:pt>
                 <c:pt idx="19">
-                  <c:v>7.5</c:v>
+                  <c:v>7.6</c:v>
                 </c:pt>
                 <c:pt idx="20">
                   <c:v>4.1</c:v>
@@ -1567,25 +1567,25 @@
                   <c:v>5.1</c:v>
                 </c:pt>
                 <c:pt idx="23">
-                  <c:v>6.3</c:v>
+                  <c:v>6.1</c:v>
                 </c:pt>
                 <c:pt idx="24">
-                  <c:v>6.6</c:v>
+                  <c:v>6.5</c:v>
                 </c:pt>
                 <c:pt idx="25">
-                  <c:v>5.8</c:v>
+                  <c:v>5.7</c:v>
                 </c:pt>
                 <c:pt idx="26">
-                  <c:v>4.5</c:v>
+                  <c:v>4.4</c:v>
                 </c:pt>
                 <c:pt idx="27">
-                  <c:v>4.7</c:v>
+                  <c:v>4.6</c:v>
                 </c:pt>
                 <c:pt idx="28">
-                  <c:v>4.5</c:v>
+                  <c:v>4.3</c:v>
                 </c:pt>
                 <c:pt idx="29">
-                  <c:v>3.1</c:v>
+                  <c:v>3.0</c:v>
                 </c:pt>
                 <c:pt idx="30">
                   <c:v>2.4</c:v>
@@ -1594,10 +1594,10 @@
                   <c:v>2.1</c:v>
                 </c:pt>
                 <c:pt idx="32">
-                  <c:v>2.0</c:v>
+                  <c:v>1.9</c:v>
                 </c:pt>
                 <c:pt idx="33">
-                  <c:v>2.3</c:v>
+                  <c:v>2.1</c:v>
                 </c:pt>
               </c:numCache>
             </c:numRef>
@@ -3022,7 +3022,7 @@
           <a:lstStyle/>
           <a:p>
             <a:r>
-              <a:t>This briefing uses public FHFA house price index data through 2026 Q2 and CFPB HMDA mortgage data for 2018 to 2025. The U.S. index is 450.9, where 1991 Q1 equals 100. The index shows price change, not dollar prices. Prices are 64.0% above 2019 Q4, the last quarter before the pandemic. Compared with 2025 Q2, they rose 2.3%. Each U.S. quarterly value is the average of the three monthly values.</a:t>
+              <a:t>This briefing uses public FHFA house price index data through 2026 Q2 and CFPB HMDA mortgage data for 2018 to 2025. The U.S. index is 435.7, where 1991 Q1 equals 100. The index shows price change, not dollar prices. Prices are 60.5% above 2019 Q4, the last quarter before the pandemic. Compared with 2025 Q2, they rose 2.1%. The U.S. values come from FHFA's quarterly U.S. index. The index level and the change since 2019 Q4 are seasonally adjusted, because they compare different seasons. The year-over-year change is not seasonally adjusted.</a:t>
             </a:r>
           </a:p>
         </p:txBody>
@@ -3073,7 +3073,7 @@
           <a:lstStyle/>
           <a:p>
             <a:r>
-              <a:t>The line shows the U.S. purchase-only house price index since 1991. In 2019 Q4 the index was 275.0. In 2026 Q2 it is 450.9, an increase of 64.0%. The steepest climb was from 2020 to 2022. Since then the line continues to go up, but more slowly. This is an index of price change, not an average dollar price.</a:t>
+              <a:t>The line shows the U.S. purchase-only house price index since 1991. In 2019 Q4 the seasonally adjusted index was 271.5. In 2026 Q2 it is 435.7, an increase of 60.5%. The steepest climb was from 2020 to 2022. Since then the line continues to go up, but more slowly. This is an index of price change, not an average dollar price.</a:t>
             </a:r>
           </a:p>
         </p:txBody>
@@ -3124,7 +3124,7 @@
           <a:lstStyle/>
           <a:p>
             <a:r>
-              <a:t>Each bar shows how much U.S. prices changed compared with the same quarter one year earlier. Growth peaked at 18.2% in 2021 Q3. In 2026 Q2 it is 2.3%. The two orange bars mark the peak and the latest quarter. At the national level prices did not fall; the rate of increase became smaller.</a:t>
+              <a:t>Each bar shows how much U.S. prices changed compared with the same quarter one year earlier. Growth peaked at 18.1% in 2021 Q3. In 2026 Q2 it is 2.1%. The two orange bars mark the peak and the latest quarter. At the national level prices did not fall; the rate of increase became smaller.</a:t>
             </a:r>
           </a:p>
         </p:txBody>
@@ -3328,7 +3328,7 @@
           <a:lstStyle/>
           <a:p>
             <a:r>
-              <a:t>First, U.S. prices are 64.0% above 2019 Q4 and rose 2.3% in the last year. Second, the change is uneven: 4 states and 26 of the 100 largest metros show a decrease, while Alaska rose 8.3%. Third, refinance and cash-out refinance originations in 2025 were 78% below the 2020 peak, and home purchase originations were 18% below 2018. These are facts from the data, not forecasts.</a:t>
+              <a:t>First, U.S. prices are 60.5% above 2019 Q4 and rose 2.1% in the last year. Second, the change is uneven: 4 states and 26 of the 100 largest metros show a decrease, while Alaska rose 8.3%. Third, refinance and cash-out refinance originations in 2025 were 78% below the 2020 peak, and home purchase originations were 18% below 2018. These are facts from the data, not forecasts.</a:t>
             </a:r>
           </a:p>
         </p:txBody>
@@ -3914,7 +3914,7 @@
                 </a:solidFill>
                 <a:latin typeface="Arial"/>
               </a:rPr>
-              <a:t>U.S. home prices are 64% above 2019 Q4, but annual growth has slowed to 2.3%</a:t>
+              <a:t>U.S. home prices are 60% above 2019 Q4, but annual growth has slowed to 2.1%</a:t>
             </a:r>
           </a:p>
         </p:txBody>
@@ -4072,7 +4072,7 @@
                 </a:solidFill>
                 <a:latin typeface="Arial"/>
               </a:rPr>
-              <a:t>450.9</a:t>
+              <a:t>435.7</a:t>
             </a:r>
           </a:p>
         </p:txBody>
@@ -4138,7 +4138,7 @@
                 </a:solidFill>
                 <a:latin typeface="Arial"/>
               </a:rPr>
-              <a:t>2026 Q2, 1991 Q1 = 100</a:t>
+              <a:t>2026 Q2, seasonally adjusted</a:t>
             </a:r>
           </a:p>
         </p:txBody>
@@ -4263,7 +4263,7 @@
                 </a:solidFill>
                 <a:latin typeface="Arial"/>
               </a:rPr>
-              <a:t>+2.3%</a:t>
+              <a:t>+2.1%</a:t>
             </a:r>
           </a:p>
         </p:txBody>
@@ -4454,7 +4454,7 @@
                 </a:solidFill>
                 <a:latin typeface="Arial"/>
               </a:rPr>
-              <a:t>+64.0%</a:t>
+              <a:t>+60.5%</a:t>
             </a:r>
           </a:p>
         </p:txBody>
@@ -4553,7 +4553,7 @@
                 </a:solidFill>
                 <a:latin typeface="Arial"/>
               </a:rPr>
-              <a:t>Source: FHFA House Price Index, purchase-only, not seasonally adjusted (1991 Q1 = 100). Latest period: 2026 Q2.</a:t>
+              <a:t>Source: FHFA HPI, purchase-only (1991 Q1 = 100), 2026 Q2. YoY: not seasonally adjusted. Levels and since 2019 Q4: seasonally adjusted.</a:t>
             </a:r>
           </a:p>
         </p:txBody>
@@ -4750,7 +4750,7 @@
                 </a:solidFill>
                 <a:latin typeface="Arial"/>
               </a:rPr>
-              <a:t>The U.S. price index is at a record high, 64% above its pre-pandemic level</a:t>
+              <a:t>The U.S. price index is at a record high, 60% above its pre-pandemic level</a:t>
             </a:r>
           </a:p>
         </p:txBody>
@@ -4816,7 +4816,7 @@
                 </a:solidFill>
                 <a:latin typeface="Arial"/>
               </a:rPr>
-              <a:t>Source: FHFA House Price Index, purchase-only, not seasonally adjusted (1991 Q1 = 100). Latest period: 2026 Q2.</a:t>
+              <a:t>Source: FHFA HPI, purchase-only (1991 Q1 = 100), 2026 Q2. YoY: not seasonally adjusted. Levels and since 2019 Q4: seasonally adjusted.</a:t>
             </a:r>
           </a:p>
         </p:txBody>
@@ -4930,7 +4930,7 @@
                 </a:solidFill>
                 <a:latin typeface="Arial"/>
               </a:rPr>
-              <a:t>U.S. house price index (1991 Q1 = 100), quarterly</a:t>
+              <a:t>U.S. house price index (1991 Q1 = 100), quarterly, seasonally adjusted</a:t>
             </a:r>
           </a:p>
         </p:txBody>
@@ -5145,7 +5145,7 @@
                 </a:solidFill>
                 <a:latin typeface="Arial"/>
               </a:rPr>
-              <a:t>Annual price growth fell from 18.2% in 2021 Q3 to 2.3% in 2026 Q2</a:t>
+              <a:t>Annual price growth fell from 18.1% in 2021 Q3 to 2.1% in 2026 Q2</a:t>
             </a:r>
           </a:p>
         </p:txBody>
@@ -5211,7 +5211,7 @@
                 </a:solidFill>
                 <a:latin typeface="Arial"/>
               </a:rPr>
-              <a:t>Source: FHFA House Price Index, purchase-only, not seasonally adjusted (1991 Q1 = 100). Latest period: 2026 Q2.</a:t>
+              <a:t>Source: FHFA HPI, purchase-only (1991 Q1 = 100), 2026 Q2. YoY: not seasonally adjusted. Levels and since 2019 Q4: seasonally adjusted.</a:t>
             </a:r>
           </a:p>
         </p:txBody>
@@ -5573,7 +5573,7 @@
                 </a:solidFill>
                 <a:latin typeface="Arial"/>
               </a:rPr>
-              <a:t>Five fastest and five slowest of 50 states and DC. U.S.: +2.3%. Blue = increase, orange = decrease.</a:t>
+              <a:t>Five fastest and five slowest of 50 states and DC. U.S.: +2.1%. Blue = increase, orange = decrease.</a:t>
             </a:r>
           </a:p>
         </p:txBody>
@@ -5606,7 +5606,7 @@
                 </a:solidFill>
                 <a:latin typeface="Arial"/>
               </a:rPr>
-              <a:t>Source: FHFA House Price Index, purchase-only, not seasonally adjusted (1991 Q1 = 100). Latest period: 2026 Q2.</a:t>
+              <a:t>Source: FHFA HPI, purchase-only (1991 Q1 = 100), 2026 Q2. YoY: not seasonally adjusted. Levels and since 2019 Q4: seasonally adjusted.</a:t>
             </a:r>
           </a:p>
         </p:txBody>
@@ -6001,7 +6001,7 @@
                 </a:solidFill>
                 <a:latin typeface="Arial"/>
               </a:rPr>
-              <a:t>Source: FHFA House Price Index, purchase-only, not seasonally adjusted (1991 Q1 = 100). Latest period: 2026 Q2.</a:t>
+              <a:t>Source: FHFA HPI, purchase-only (1991 Q1 = 100), 2026 Q2. YoY: not seasonally adjusted. Levels and since 2019 Q4: seasonally adjusted.</a:t>
             </a:r>
           </a:p>
         </p:txBody>
@@ -7059,7 +7059,7 @@
                 </a:solidFill>
                 <a:latin typeface="Arial"/>
               </a:rPr>
-              <a:t>+64%</a:t>
+              <a:t>+60%</a:t>
             </a:r>
           </a:p>
         </p:txBody>
@@ -7092,7 +7092,7 @@
                 </a:solidFill>
                 <a:latin typeface="Arial"/>
               </a:rPr>
-              <a:t>U.S. index change since 2019 Q4. Growth slowed to +2.3% year over year in 2026 Q2.</a:t>
+              <a:t>U.S. index change since 2019 Q4. Growth slowed to +2.1% year over year in 2026 Q2.</a:t>
             </a:r>
           </a:p>
         </p:txBody>
